--- a/docs/sales/JESS-MOVE-for-organisations.pptx
+++ b/docs/sales/JESS-MOVE-for-organisations.pptx
@@ -16,9 +16,10 @@
     <p:sldId id="264" r:id="rId10"/>
     <p:sldId id="265" r:id="rId11"/>
     <p:sldId id="266" r:id="rId12"/>
+    <p:sldId id="267" r:id="rId13"/>
   </p:sldIdLst>
   <p:notesMasterIdLst>
-    <p:notesMasterId r:id="rId13"/>
+    <p:notesMasterId r:id="rId14"/>
   </p:notesMasterIdLst>
   <p:sldSz cx="12192000" cy="6858000"/>
   <p:notesSz cx="6858000" cy="12192000"/>
@@ -600,7 +601,7 @@
           <a:p>
             <a:r>
               <a:rPr lang="en-US" dirty="0"/>
-              <a:t>Twelve weeks is short enough to approve without a procurement cycle and long enough to see whether behaviour changed.</a:t>
+              <a:t>The design-partner discount buys feedback and a future reference. Do not promise a testimonial before there is a result to describe.</a:t>
             </a:r>
             <a:endParaRPr lang="en-US" dirty="0"/>
           </a:p>
@@ -688,7 +689,7 @@
           <a:p>
             <a:r>
               <a:rPr lang="en-US" dirty="0"/>
-              <a:t>Close on the clinical boundary. It signals seriousness to a health-adjacent buyer rather than reading as a disclaimer.</a:t>
+              <a:t>Twelve weeks is short enough to approve without a procurement cycle and long enough to see whether behaviour changed.</a:t>
             </a:r>
             <a:endParaRPr lang="en-US" dirty="0"/>
           </a:p>
@@ -712,6 +713,94 @@
             <a:fld id="{F7021451-1387-4CA6-816F-3879F97B5CBC}" type="slidenum">
               <a:rPr lang="en-US"/>
               <a:t>11</a:t>
+            </a:fld>
+            <a:endParaRPr lang="en-US"/>
+          </a:p>
+        </p:txBody>
+      </p:sp>
+    </p:spTree>
+    <p:extLst>
+      <p:ext uri="{BB962C8B-B14F-4D97-AF65-F5344CB8AC3E}">
+        <p14:creationId xmlns:p14="http://schemas.microsoft.com/office/powerpoint/2010/main" val="1024086991"/>
+      </p:ext>
+    </p:extLst>
+  </p:cSld>
+  <p:clrMapOvr>
+    <a:masterClrMapping/>
+  </p:clrMapOvr>
+</p:notes>
+</file>
+
+<file path=ppt/notesSlides/notesSlide12.xml><?xml version="1.0" encoding="utf-8"?>
+<p:notes xmlns:a="http://schemas.openxmlformats.org/drawingml/2006/main" xmlns:r="http://schemas.openxmlformats.org/officeDocument/2006/relationships" xmlns:p="http://schemas.openxmlformats.org/presentationml/2006/main">
+  <p:cSld>
+    <p:spTree>
+      <p:nvGrpSpPr>
+        <p:cNvPr id="1" name=""/>
+        <p:cNvGrpSpPr/>
+        <p:nvPr/>
+      </p:nvGrpSpPr>
+      <p:grpSpPr>
+        <a:xfrm>
+          <a:off x="0" y="0"/>
+          <a:ext cx="0" cy="0"/>
+          <a:chOff x="0" y="0"/>
+          <a:chExt cx="0" cy="0"/>
+        </a:xfrm>
+      </p:grpSpPr>
+      <p:sp>
+        <p:nvSpPr>
+          <p:cNvPr id="2" name="Slide Image Placeholder 1"/>
+          <p:cNvSpPr>
+            <a:spLocks noGrp="1" noRot="1" noChangeAspect="1"/>
+          </p:cNvSpPr>
+          <p:nvPr>
+            <p:ph type="sldImg"/>
+          </p:nvPr>
+        </p:nvSpPr>
+        <p:spPr/>
+      </p:sp>
+      <p:sp>
+        <p:nvSpPr>
+          <p:cNvPr id="3" name="Notes Placeholder 2"/>
+          <p:cNvSpPr>
+            <a:spLocks noGrp="1"/>
+          </p:cNvSpPr>
+          <p:nvPr>
+            <p:ph type="body" idx="1"/>
+          </p:nvPr>
+        </p:nvSpPr>
+        <p:spPr/>
+        <p:txBody>
+          <a:bodyPr/>
+          <a:lstStyle/>
+          <a:p>
+            <a:r>
+              <a:rPr lang="en-US" dirty="0"/>
+              <a:t>Close on the clinical boundary. It signals seriousness to a health-adjacent buyer rather than reading as a disclaimer.</a:t>
+            </a:r>
+            <a:endParaRPr lang="en-US" dirty="0"/>
+          </a:p>
+        </p:txBody>
+      </p:sp>
+      <p:sp>
+        <p:nvSpPr>
+          <p:cNvPr id="4" name="Slide Number Placeholder 3"/>
+          <p:cNvSpPr>
+            <a:spLocks noGrp="1"/>
+          </p:cNvSpPr>
+          <p:nvPr>
+            <p:ph type="sldNum" sz="quarter" idx="10"/>
+          </p:nvPr>
+        </p:nvSpPr>
+        <p:spPr/>
+        <p:txBody>
+          <a:bodyPr/>
+          <a:lstStyle/>
+          <a:p>
+            <a:fld id="{F7021451-1387-4CA6-816F-3879F97B5CBC}" type="slidenum">
+              <a:rPr lang="en-US"/>
+              <a:t>12</a:t>
             </a:fld>
             <a:endParaRPr lang="en-US"/>
           </a:p>
@@ -1040,7 +1129,7 @@
           <a:p>
             <a:r>
               <a:rPr lang="en-US" dirty="0"/>
-              <a:t>For employers with an older or mixed workforce, and for care and local-government buyers, this is usually the differentiator that matters most.</a:t>
+              <a:t>For a workforce that spans apprentices to people working past 65, this is usually the differentiator that matters most. Most step-count programmes are designed for the 18-39 band; 40-64 is where sedentary risk actually bites and it is usually a large part of the payroll.</a:t>
             </a:r>
             <a:endParaRPr lang="en-US" dirty="0"/>
           </a:p>
@@ -1392,7 +1481,7 @@
           <a:p>
             <a:r>
               <a:rPr lang="en-US" dirty="0"/>
-              <a:t>The design-partner discount buys feedback and a future reference. Do not promise a testimonial before there is a result to describe.</a:t>
+              <a:t>Hand this slide to their security lead early rather than defending it late. If they ask which gap is closest to closing, the export archive — the data is already readable through the member endpoints, it needs an archive endpoint around them. If they ask about the age gap, say it bites a school far harder than an employer, and that it is listed rather than argued away for that reason.</a:t>
             </a:r>
             <a:endParaRPr lang="en-US" dirty="0"/>
           </a:p>
@@ -1961,7 +2050,7 @@
                 <a:ea typeface="Calibri" pitchFamily="34" charset="-122"/>
                 <a:cs typeface="Calibri" pitchFamily="34" charset="-120"/>
               </a:rPr>
-              <a:t>A workplace movement and food-intelligence platform for ages 10 to 100 — built so an employer can run a programme without ever seeing one employee.</a:t>
+              <a:t>A movement and food-intelligence platform for your workforce — built so an employer can run a programme without ever seeing one employee.</a:t>
             </a:r>
             <a:endParaRPr lang="en-US" sz="1400" dirty="0"/>
           </a:p>
@@ -2091,7 +2180,7 @@
                 <a:ea typeface="Arial" pitchFamily="34" charset="-122"/>
                 <a:cs typeface="Arial" pitchFamily="34" charset="-120"/>
               </a:rPr>
-              <a:t>THE ASK</a:t>
+              <a:t>COMMERCIALS</a:t>
             </a:r>
             <a:endParaRPr lang="en-US" sz="1200" dirty="0"/>
           </a:p>
@@ -2122,7 +2211,7 @@
               <a:buNone/>
             </a:pPr>
             <a:r>
-              <a:rPr lang="en-US" sz="3400" b="1" dirty="0">
+              <a:rPr lang="en-US" sz="3800" b="1" dirty="0">
                 <a:solidFill>
                   <a:srgbClr val="102A43"/>
                 </a:solidFill>
@@ -2130,43 +2219,180 @@
                 <a:ea typeface="Cambria" pitchFamily="34" charset="-122"/>
                 <a:cs typeface="Cambria" pitchFamily="34" charset="-120"/>
               </a:rPr>
-              <a:t>A twelve-week pilot,</a:t>
-            </a:r>
-            <a:endParaRPr lang="en-US" sz="3400" dirty="0"/>
-          </a:p>
-          <a:p>
-            <a:pPr indent="0" marL="0">
-              <a:buNone/>
-            </a:pPr>
-            <a:r>
-              <a:rPr lang="en-US" sz="3400" b="1" dirty="0">
-                <a:solidFill>
-                  <a:srgbClr val="102A43"/>
+              <a:t>From £2 per employee per month.</a:t>
+            </a:r>
+            <a:endParaRPr lang="en-US" sz="3800" dirty="0"/>
+          </a:p>
+        </p:txBody>
+      </p:sp>
+      <p:sp>
+        <p:nvSpPr>
+          <p:cNvPr id="5" name="Shape 3"/>
+          <p:cNvSpPr/>
+          <p:nvPr/>
+        </p:nvSpPr>
+        <p:spPr>
+          <a:xfrm>
+            <a:off x="731520" y="2194560"/>
+            <a:ext cx="5166360" cy="3200400"/>
+          </a:xfrm>
+          <a:prstGeom prst="roundRect">
+            <a:avLst>
+              <a:gd name="adj" fmla="val 2286"/>
+            </a:avLst>
+          </a:prstGeom>
+          <a:solidFill>
+            <a:srgbClr val="102A43"/>
+          </a:solidFill>
+          <a:ln w="12700">
+            <a:solidFill>
+              <a:srgbClr val="102A43"/>
+            </a:solidFill>
+            <a:prstDash val="solid"/>
+          </a:ln>
+          <a:effectLst>
+            <a:outerShdw sx="100000" sy="100000" kx="0" ky="0" algn="bl" rotWithShape="0" blurRad="127000" dist="508" dir="5400000">
+              <a:srgbClr val="9AA8B4">
+                <a:alpha val="25000"/>
+              </a:srgbClr>
+            </a:outerShdw>
+          </a:effectLst>
+        </p:spPr>
+      </p:sp>
+      <p:sp>
+        <p:nvSpPr>
+          <p:cNvPr id="6" name="Text 4"/>
+          <p:cNvSpPr txBox="1"/>
+          <p:nvPr/>
+        </p:nvSpPr>
+        <p:spPr>
+          <a:xfrm>
+            <a:off x="1143000" y="2560320"/>
+            <a:ext cx="4114800" cy="914400"/>
+          </a:xfrm>
+          <a:prstGeom prst="rect">
+            <a:avLst/>
+          </a:prstGeom>
+          <a:noFill/>
+          <a:ln/>
+        </p:spPr>
+        <p:txBody>
+          <a:bodyPr wrap="square" lIns="0" tIns="0" rIns="0" bIns="0" rtlCol="0" anchor="ctr"/>
+          <a:lstStyle/>
+          <a:p>
+            <a:pPr indent="0" marL="0">
+              <a:buNone/>
+            </a:pPr>
+            <a:r>
+              <a:rPr lang="en-US" sz="5400" b="1" dirty="0">
+                <a:solidFill>
+                  <a:srgbClr val="B7E436"/>
                 </a:solidFill>
                 <a:latin typeface="Cambria" pitchFamily="34" charset="0"/>
                 <a:ea typeface="Cambria" pitchFamily="34" charset="-122"/>
                 <a:cs typeface="Cambria" pitchFamily="34" charset="-120"/>
               </a:rPr>
-              <a:t>one team, no procurement epic.</a:t>
-            </a:r>
-            <a:endParaRPr lang="en-US" sz="3400" dirty="0"/>
-          </a:p>
-        </p:txBody>
-      </p:sp>
-      <p:sp>
-        <p:nvSpPr>
-          <p:cNvPr id="5" name="Shape 3"/>
+              <a:t>from £2</a:t>
+            </a:r>
+            <a:endParaRPr lang="en-US" sz="5400" dirty="0"/>
+          </a:p>
+        </p:txBody>
+      </p:sp>
+      <p:sp>
+        <p:nvSpPr>
+          <p:cNvPr id="7" name="Text 5"/>
+          <p:cNvSpPr txBox="1"/>
+          <p:nvPr/>
+        </p:nvSpPr>
+        <p:spPr>
+          <a:xfrm>
+            <a:off x="1143000" y="3520440"/>
+            <a:ext cx="4114800" cy="320040"/>
+          </a:xfrm>
+          <a:prstGeom prst="rect">
+            <a:avLst/>
+          </a:prstGeom>
+          <a:noFill/>
+          <a:ln/>
+        </p:spPr>
+        <p:txBody>
+          <a:bodyPr wrap="square" lIns="0" tIns="0" rIns="0" bIns="0" rtlCol="0" anchor="ctr"/>
+          <a:lstStyle/>
+          <a:p>
+            <a:pPr indent="0" marL="0">
+              <a:buNone/>
+            </a:pPr>
+            <a:r>
+              <a:rPr lang="en-US" sz="1400" dirty="0">
+                <a:solidFill>
+                  <a:srgbClr val="FFFFFF"/>
+                </a:solidFill>
+                <a:latin typeface="Calibri" pitchFamily="34" charset="0"/>
+                <a:ea typeface="Calibri" pitchFamily="34" charset="-122"/>
+                <a:cs typeface="Calibri" pitchFamily="34" charset="-120"/>
+              </a:rPr>
+              <a:t>per seat, per month</a:t>
+            </a:r>
+            <a:endParaRPr lang="en-US" sz="1400" dirty="0"/>
+          </a:p>
+        </p:txBody>
+      </p:sp>
+      <p:sp>
+        <p:nvSpPr>
+          <p:cNvPr id="8" name="Text 6"/>
+          <p:cNvSpPr txBox="1"/>
+          <p:nvPr/>
+        </p:nvSpPr>
+        <p:spPr>
+          <a:xfrm>
+            <a:off x="1143000" y="4023360"/>
+            <a:ext cx="4343400" cy="1097280"/>
+          </a:xfrm>
+          <a:prstGeom prst="rect">
+            <a:avLst/>
+          </a:prstGeom>
+          <a:noFill/>
+          <a:ln/>
+        </p:spPr>
+        <p:txBody>
+          <a:bodyPr wrap="square" lIns="0" tIns="0" rIns="0" bIns="0" rtlCol="0" anchor="ctr"/>
+          <a:lstStyle/>
+          <a:p>
+            <a:pPr indent="0" marL="0">
+              <a:lnSpc>
+                <a:spcPts val="1900"/>
+              </a:lnSpc>
+              <a:buNone/>
+            </a:pPr>
+            <a:r>
+              <a:rPr lang="en-US" sz="1250" dirty="0">
+                <a:solidFill>
+                  <a:srgbClr val="B8C6D1"/>
+                </a:solidFill>
+                <a:latin typeface="Calibri" pitchFamily="34" charset="0"/>
+                <a:ea typeface="Calibri" pitchFamily="34" charset="-122"/>
+                <a:cs typeface="Calibri" pitchFamily="34" charset="-120"/>
+              </a:rPr>
+              <a:t>The floor, not a teaser. Up to £5 depending on sector, seat count and support level. Organisation deals are contracts, so the figure is agreed rather than picked at a checkout.</a:t>
+            </a:r>
+            <a:endParaRPr lang="en-US" sz="1250" dirty="0"/>
+          </a:p>
+        </p:txBody>
+      </p:sp>
+      <p:sp>
+        <p:nvSpPr>
+          <p:cNvPr id="9" name="Shape 7"/>
           <p:cNvSpPr/>
           <p:nvPr/>
         </p:nvSpPr>
         <p:spPr>
           <a:xfrm>
-            <a:off x="731520" y="2514600"/>
-            <a:ext cx="3502152" cy="2377440"/>
+            <a:off x="6263640" y="2194560"/>
+            <a:ext cx="5166360" cy="621792"/>
           </a:xfrm>
           <a:prstGeom prst="roundRect">
             <a:avLst>
-              <a:gd name="adj" fmla="val 3077"/>
+              <a:gd name="adj" fmla="val 11765"/>
             </a:avLst>
           </a:prstGeom>
           <a:solidFill>
@@ -2189,89 +2415,30 @@
       </p:sp>
       <p:sp>
         <p:nvSpPr>
-          <p:cNvPr id="6" name="Shape 4"/>
-          <p:cNvSpPr/>
-          <p:nvPr/>
-        </p:nvSpPr>
-        <p:spPr>
-          <a:xfrm>
-            <a:off x="1051560" y="2743200"/>
-            <a:ext cx="548640" cy="548640"/>
-          </a:xfrm>
-          <a:prstGeom prst="ellipse">
-            <a:avLst/>
-          </a:prstGeom>
-          <a:solidFill>
-            <a:srgbClr val="00A99D"/>
-          </a:solidFill>
-          <a:ln/>
-        </p:spPr>
-      </p:sp>
-      <p:sp>
-        <p:nvSpPr>
-          <p:cNvPr id="7" name="Text 5"/>
-          <p:cNvSpPr txBox="1"/>
-          <p:nvPr/>
-        </p:nvSpPr>
-        <p:spPr>
-          <a:xfrm>
-            <a:off x="1051560" y="2816352"/>
-            <a:ext cx="548640" cy="411480"/>
-          </a:xfrm>
-          <a:prstGeom prst="rect">
-            <a:avLst/>
-          </a:prstGeom>
-          <a:noFill/>
-          <a:ln/>
-        </p:spPr>
-        <p:txBody>
-          <a:bodyPr wrap="square" lIns="0" tIns="0" rIns="0" bIns="0" rtlCol="0" anchor="ctr"/>
-          <a:lstStyle/>
-          <a:p>
-            <a:pPr algn="ctr" indent="0" marL="0">
-              <a:buNone/>
-            </a:pPr>
-            <a:r>
-              <a:rPr lang="en-US" sz="2200" b="1" dirty="0">
-                <a:solidFill>
-                  <a:srgbClr val="FFFFFF"/>
-                </a:solidFill>
-                <a:latin typeface="Cambria" pitchFamily="34" charset="0"/>
-                <a:ea typeface="Cambria" pitchFamily="34" charset="-122"/>
-                <a:cs typeface="Cambria" pitchFamily="34" charset="-120"/>
-              </a:rPr>
-              <a:t>1</a:t>
-            </a:r>
-            <a:endParaRPr lang="en-US" sz="2200" dirty="0"/>
-          </a:p>
-        </p:txBody>
-      </p:sp>
-      <p:sp>
-        <p:nvSpPr>
-          <p:cNvPr id="8" name="Text 6"/>
-          <p:cNvSpPr txBox="1"/>
-          <p:nvPr/>
-        </p:nvSpPr>
-        <p:spPr>
-          <a:xfrm>
-            <a:off x="1051560" y="3456432"/>
-            <a:ext cx="2834640" cy="320040"/>
-          </a:xfrm>
-          <a:prstGeom prst="rect">
-            <a:avLst/>
-          </a:prstGeom>
-          <a:noFill/>
-          <a:ln/>
-        </p:spPr>
-        <p:txBody>
-          <a:bodyPr wrap="square" lIns="0" tIns="0" rIns="0" bIns="0" rtlCol="0" anchor="ctr"/>
-          <a:lstStyle/>
-          <a:p>
-            <a:pPr indent="0" marL="0">
-              <a:buNone/>
-            </a:pPr>
-            <a:r>
-              <a:rPr lang="en-US" sz="1500" b="1" dirty="0">
+          <p:cNvPr id="10" name="Text 8"/>
+          <p:cNvSpPr txBox="1"/>
+          <p:nvPr/>
+        </p:nvSpPr>
+        <p:spPr>
+          <a:xfrm>
+            <a:off x="6583680" y="2304288"/>
+            <a:ext cx="4572000" cy="274320"/>
+          </a:xfrm>
+          <a:prstGeom prst="rect">
+            <a:avLst/>
+          </a:prstGeom>
+          <a:noFill/>
+          <a:ln/>
+        </p:spPr>
+        <p:txBody>
+          <a:bodyPr wrap="square" lIns="0" tIns="0" rIns="0" bIns="0" rtlCol="0" anchor="ctr"/>
+          <a:lstStyle/>
+          <a:p>
+            <a:pPr indent="0" marL="0">
+              <a:buNone/>
+            </a:pPr>
+            <a:r>
+              <a:rPr lang="en-US" sz="1300" b="1" dirty="0">
                 <a:solidFill>
                   <a:srgbClr val="102A43"/>
                 </a:solidFill>
@@ -2279,41 +2446,38 @@
                 <a:ea typeface="Arial" pitchFamily="34" charset="-122"/>
                 <a:cs typeface="Arial" pitchFamily="34" charset="-120"/>
               </a:rPr>
-              <a:t>Week 0</a:t>
-            </a:r>
-            <a:endParaRPr lang="en-US" sz="1500" dirty="0"/>
-          </a:p>
-        </p:txBody>
-      </p:sp>
-      <p:sp>
-        <p:nvSpPr>
-          <p:cNvPr id="9" name="Text 7"/>
-          <p:cNvSpPr txBox="1"/>
-          <p:nvPr/>
-        </p:nvSpPr>
-        <p:spPr>
-          <a:xfrm>
-            <a:off x="1051560" y="3840480"/>
-            <a:ext cx="2834640" cy="914400"/>
-          </a:xfrm>
-          <a:prstGeom prst="rect">
-            <a:avLst/>
-          </a:prstGeom>
-          <a:noFill/>
-          <a:ln/>
-        </p:spPr>
-        <p:txBody>
-          <a:bodyPr wrap="square" lIns="0" tIns="0" rIns="0" bIns="0" rtlCol="0" anchor="ctr"/>
-          <a:lstStyle/>
-          <a:p>
-            <a:pPr indent="0" marL="0">
-              <a:lnSpc>
-                <a:spcPts val="1800"/>
-              </a:lnSpc>
-              <a:buNone/>
-            </a:pPr>
-            <a:r>
-              <a:rPr lang="en-US" sz="1250" dirty="0">
+              <a:t>Minimum 10 seats</a:t>
+            </a:r>
+            <a:endParaRPr lang="en-US" sz="1300" dirty="0"/>
+          </a:p>
+        </p:txBody>
+      </p:sp>
+      <p:sp>
+        <p:nvSpPr>
+          <p:cNvPr id="11" name="Text 9"/>
+          <p:cNvSpPr txBox="1"/>
+          <p:nvPr/>
+        </p:nvSpPr>
+        <p:spPr>
+          <a:xfrm>
+            <a:off x="6583680" y="2578608"/>
+            <a:ext cx="4572000" cy="274320"/>
+          </a:xfrm>
+          <a:prstGeom prst="rect">
+            <a:avLst/>
+          </a:prstGeom>
+          <a:noFill/>
+          <a:ln/>
+        </p:spPr>
+        <p:txBody>
+          <a:bodyPr wrap="square" lIns="0" tIns="0" rIns="0" bIns="0" rtlCol="0" anchor="ctr"/>
+          <a:lstStyle/>
+          <a:p>
+            <a:pPr indent="0" marL="0">
+              <a:buNone/>
+            </a:pPr>
+            <a:r>
+              <a:rPr lang="en-US" sz="1150" dirty="0">
                 <a:solidFill>
                   <a:srgbClr val="475663"/>
                 </a:solidFill>
@@ -2321,26 +2485,26 @@
                 <a:ea typeface="Calibri" pitchFamily="34" charset="-122"/>
                 <a:cs typeface="Calibri" pitchFamily="34" charset="-120"/>
               </a:rPr>
-              <a:t>One team, 10–100 people. Invited by email, and a named sponsor on your side and ours.</a:t>
-            </a:r>
-            <a:endParaRPr lang="en-US" sz="1250" dirty="0"/>
-          </a:p>
-        </p:txBody>
-      </p:sp>
-      <p:sp>
-        <p:nvSpPr>
-          <p:cNvPr id="10" name="Shape 8"/>
+              <a:t>And a minimum annual contract.</a:t>
+            </a:r>
+            <a:endParaRPr lang="en-US" sz="1150" dirty="0"/>
+          </a:p>
+        </p:txBody>
+      </p:sp>
+      <p:sp>
+        <p:nvSpPr>
+          <p:cNvPr id="12" name="Shape 10"/>
           <p:cNvSpPr/>
           <p:nvPr/>
         </p:nvSpPr>
         <p:spPr>
           <a:xfrm>
-            <a:off x="4389120" y="2514600"/>
-            <a:ext cx="3502152" cy="2377440"/>
+            <a:off x="6263640" y="3063240"/>
+            <a:ext cx="5166360" cy="621792"/>
           </a:xfrm>
           <a:prstGeom prst="roundRect">
             <a:avLst>
-              <a:gd name="adj" fmla="val 3077"/>
+              <a:gd name="adj" fmla="val 11765"/>
             </a:avLst>
           </a:prstGeom>
           <a:solidFill>
@@ -2363,89 +2527,30 @@
       </p:sp>
       <p:sp>
         <p:nvSpPr>
-          <p:cNvPr id="11" name="Shape 9"/>
-          <p:cNvSpPr/>
-          <p:nvPr/>
-        </p:nvSpPr>
-        <p:spPr>
-          <a:xfrm>
-            <a:off x="4709160" y="2743200"/>
-            <a:ext cx="548640" cy="548640"/>
-          </a:xfrm>
-          <a:prstGeom prst="ellipse">
-            <a:avLst/>
-          </a:prstGeom>
-          <a:solidFill>
-            <a:srgbClr val="00A99D"/>
-          </a:solidFill>
-          <a:ln/>
-        </p:spPr>
-      </p:sp>
-      <p:sp>
-        <p:nvSpPr>
-          <p:cNvPr id="12" name="Text 10"/>
-          <p:cNvSpPr txBox="1"/>
-          <p:nvPr/>
-        </p:nvSpPr>
-        <p:spPr>
-          <a:xfrm>
-            <a:off x="4709160" y="2816352"/>
-            <a:ext cx="548640" cy="411480"/>
-          </a:xfrm>
-          <a:prstGeom prst="rect">
-            <a:avLst/>
-          </a:prstGeom>
-          <a:noFill/>
-          <a:ln/>
-        </p:spPr>
-        <p:txBody>
-          <a:bodyPr wrap="square" lIns="0" tIns="0" rIns="0" bIns="0" rtlCol="0" anchor="ctr"/>
-          <a:lstStyle/>
-          <a:p>
-            <a:pPr algn="ctr" indent="0" marL="0">
-              <a:buNone/>
-            </a:pPr>
-            <a:r>
-              <a:rPr lang="en-US" sz="2200" b="1" dirty="0">
-                <a:solidFill>
-                  <a:srgbClr val="FFFFFF"/>
-                </a:solidFill>
-                <a:latin typeface="Cambria" pitchFamily="34" charset="0"/>
-                <a:ea typeface="Cambria" pitchFamily="34" charset="-122"/>
-                <a:cs typeface="Cambria" pitchFamily="34" charset="-120"/>
-              </a:rPr>
-              <a:t>2</a:t>
-            </a:r>
-            <a:endParaRPr lang="en-US" sz="2200" dirty="0"/>
-          </a:p>
-        </p:txBody>
-      </p:sp>
-      <p:sp>
-        <p:nvSpPr>
           <p:cNvPr id="13" name="Text 11"/>
           <p:cNvSpPr txBox="1"/>
           <p:nvPr/>
         </p:nvSpPr>
         <p:spPr>
           <a:xfrm>
-            <a:off x="4709160" y="3456432"/>
-            <a:ext cx="2834640" cy="320040"/>
-          </a:xfrm>
-          <a:prstGeom prst="rect">
-            <a:avLst/>
-          </a:prstGeom>
-          <a:noFill/>
-          <a:ln/>
-        </p:spPr>
-        <p:txBody>
-          <a:bodyPr wrap="square" lIns="0" tIns="0" rIns="0" bIns="0" rtlCol="0" anchor="ctr"/>
-          <a:lstStyle/>
-          <a:p>
-            <a:pPr indent="0" marL="0">
-              <a:buNone/>
-            </a:pPr>
-            <a:r>
-              <a:rPr lang="en-US" sz="1500" b="1" dirty="0">
+            <a:off x="6583680" y="3172968"/>
+            <a:ext cx="4572000" cy="274320"/>
+          </a:xfrm>
+          <a:prstGeom prst="rect">
+            <a:avLst/>
+          </a:prstGeom>
+          <a:noFill/>
+          <a:ln/>
+        </p:spPr>
+        <p:txBody>
+          <a:bodyPr wrap="square" lIns="0" tIns="0" rIns="0" bIns="0" rtlCol="0" anchor="ctr"/>
+          <a:lstStyle/>
+          <a:p>
+            <a:pPr indent="0" marL="0">
+              <a:buNone/>
+            </a:pPr>
+            <a:r>
+              <a:rPr lang="en-US" sz="1300" b="1" dirty="0">
                 <a:solidFill>
                   <a:srgbClr val="102A43"/>
                 </a:solidFill>
@@ -2453,9 +2558,9 @@
                 <a:ea typeface="Arial" pitchFamily="34" charset="-122"/>
                 <a:cs typeface="Arial" pitchFamily="34" charset="-120"/>
               </a:rPr>
-              <a:t>Weeks 1–8</a:t>
-            </a:r>
-            <a:endParaRPr lang="en-US" sz="1500" dirty="0"/>
+              <a:t>Challenge builder and campaigns</a:t>
+            </a:r>
+            <a:endParaRPr lang="en-US" sz="1300" dirty="0"/>
           </a:p>
         </p:txBody>
       </p:sp>
@@ -2467,27 +2572,24 @@
         </p:nvSpPr>
         <p:spPr>
           <a:xfrm>
-            <a:off x="4709160" y="3840480"/>
-            <a:ext cx="2834640" cy="914400"/>
-          </a:xfrm>
-          <a:prstGeom prst="rect">
-            <a:avLst/>
-          </a:prstGeom>
-          <a:noFill/>
-          <a:ln/>
-        </p:spPr>
-        <p:txBody>
-          <a:bodyPr wrap="square" lIns="0" tIns="0" rIns="0" bIns="0" rtlCol="0" anchor="ctr"/>
-          <a:lstStyle/>
-          <a:p>
-            <a:pPr indent="0" marL="0">
-              <a:lnSpc>
-                <a:spcPts val="1800"/>
-              </a:lnSpc>
-              <a:buNone/>
-            </a:pPr>
-            <a:r>
-              <a:rPr lang="en-US" sz="1250" dirty="0">
+            <a:off x="6583680" y="3447288"/>
+            <a:ext cx="4572000" cy="274320"/>
+          </a:xfrm>
+          <a:prstGeom prst="rect">
+            <a:avLst/>
+          </a:prstGeom>
+          <a:noFill/>
+          <a:ln/>
+        </p:spPr>
+        <p:txBody>
+          <a:bodyPr wrap="square" lIns="0" tIns="0" rIns="0" bIns="0" rtlCol="0" anchor="ctr"/>
+          <a:lstStyle/>
+          <a:p>
+            <a:pPr indent="0" marL="0">
+              <a:buNone/>
+            </a:pPr>
+            <a:r>
+              <a:rPr lang="en-US" sz="1150" dirty="0">
                 <a:solidFill>
                   <a:srgbClr val="475663"/>
                 </a:solidFill>
@@ -2495,9 +2597,9 @@
                 <a:ea typeface="Calibri" pitchFamily="34" charset="-122"/>
                 <a:cs typeface="Calibri" pitchFamily="34" charset="-120"/>
               </a:rPr>
-              <a:t>People use it. We watch the held rate and completion, not the vanity numbers.</a:t>
-            </a:r>
-            <a:endParaRPr lang="en-US" sz="1250" dirty="0"/>
+              <a:t>Branded to your organisation.</a:t>
+            </a:r>
+            <a:endParaRPr lang="en-US" sz="1150" dirty="0"/>
           </a:p>
         </p:txBody>
       </p:sp>
@@ -2509,12 +2611,12 @@
         </p:nvSpPr>
         <p:spPr>
           <a:xfrm>
-            <a:off x="8046720" y="2514600"/>
-            <a:ext cx="3502152" cy="2377440"/>
+            <a:off x="6263640" y="3931920"/>
+            <a:ext cx="5166360" cy="621792"/>
           </a:xfrm>
           <a:prstGeom prst="roundRect">
             <a:avLst>
-              <a:gd name="adj" fmla="val 3077"/>
+              <a:gd name="adj" fmla="val 11765"/>
             </a:avLst>
           </a:prstGeom>
           <a:solidFill>
@@ -2537,89 +2639,30 @@
       </p:sp>
       <p:sp>
         <p:nvSpPr>
-          <p:cNvPr id="16" name="Shape 14"/>
-          <p:cNvSpPr/>
-          <p:nvPr/>
-        </p:nvSpPr>
-        <p:spPr>
-          <a:xfrm>
-            <a:off x="8366760" y="2743200"/>
-            <a:ext cx="548640" cy="548640"/>
-          </a:xfrm>
-          <a:prstGeom prst="ellipse">
-            <a:avLst/>
-          </a:prstGeom>
-          <a:solidFill>
-            <a:srgbClr val="00A99D"/>
-          </a:solidFill>
-          <a:ln/>
-        </p:spPr>
-      </p:sp>
-      <p:sp>
-        <p:nvSpPr>
-          <p:cNvPr id="17" name="Text 15"/>
-          <p:cNvSpPr txBox="1"/>
-          <p:nvPr/>
-        </p:nvSpPr>
-        <p:spPr>
-          <a:xfrm>
-            <a:off x="8366760" y="2816352"/>
-            <a:ext cx="548640" cy="411480"/>
-          </a:xfrm>
-          <a:prstGeom prst="rect">
-            <a:avLst/>
-          </a:prstGeom>
-          <a:noFill/>
-          <a:ln/>
-        </p:spPr>
-        <p:txBody>
-          <a:bodyPr wrap="square" lIns="0" tIns="0" rIns="0" bIns="0" rtlCol="0" anchor="ctr"/>
-          <a:lstStyle/>
-          <a:p>
-            <a:pPr algn="ctr" indent="0" marL="0">
-              <a:buNone/>
-            </a:pPr>
-            <a:r>
-              <a:rPr lang="en-US" sz="2200" b="1" dirty="0">
-                <a:solidFill>
-                  <a:srgbClr val="FFFFFF"/>
-                </a:solidFill>
-                <a:latin typeface="Cambria" pitchFamily="34" charset="0"/>
-                <a:ea typeface="Cambria" pitchFamily="34" charset="-122"/>
-                <a:cs typeface="Cambria" pitchFamily="34" charset="-120"/>
-              </a:rPr>
-              <a:t>3</a:t>
-            </a:r>
-            <a:endParaRPr lang="en-US" sz="2200" dirty="0"/>
-          </a:p>
-        </p:txBody>
-      </p:sp>
-      <p:sp>
-        <p:nvSpPr>
-          <p:cNvPr id="18" name="Text 16"/>
-          <p:cNvSpPr txBox="1"/>
-          <p:nvPr/>
-        </p:nvSpPr>
-        <p:spPr>
-          <a:xfrm>
-            <a:off x="8366760" y="3456432"/>
-            <a:ext cx="2834640" cy="320040"/>
-          </a:xfrm>
-          <a:prstGeom prst="rect">
-            <a:avLst/>
-          </a:prstGeom>
-          <a:noFill/>
-          <a:ln/>
-        </p:spPr>
-        <p:txBody>
-          <a:bodyPr wrap="square" lIns="0" tIns="0" rIns="0" bIns="0" rtlCol="0" anchor="ctr"/>
-          <a:lstStyle/>
-          <a:p>
-            <a:pPr indent="0" marL="0">
-              <a:buNone/>
-            </a:pPr>
-            <a:r>
-              <a:rPr lang="en-US" sz="1500" b="1" dirty="0">
+          <p:cNvPr id="16" name="Text 14"/>
+          <p:cNvSpPr txBox="1"/>
+          <p:nvPr/>
+        </p:nvSpPr>
+        <p:spPr>
+          <a:xfrm>
+            <a:off x="6583680" y="4041648"/>
+            <a:ext cx="4572000" cy="274320"/>
+          </a:xfrm>
+          <a:prstGeom prst="rect">
+            <a:avLst/>
+          </a:prstGeom>
+          <a:noFill/>
+          <a:ln/>
+        </p:spPr>
+        <p:txBody>
+          <a:bodyPr wrap="square" lIns="0" tIns="0" rIns="0" bIns="0" rtlCol="0" anchor="ctr"/>
+          <a:lstStyle/>
+          <a:p>
+            <a:pPr indent="0" marL="0">
+              <a:buNone/>
+            </a:pPr>
+            <a:r>
+              <a:rPr lang="en-US" sz="1300" b="1" dirty="0">
                 <a:solidFill>
                   <a:srgbClr val="102A43"/>
                 </a:solidFill>
@@ -2627,41 +2670,38 @@
                 <a:ea typeface="Arial" pitchFamily="34" charset="-122"/>
                 <a:cs typeface="Arial" pitchFamily="34" charset="-120"/>
               </a:rPr>
-              <a:t>Weeks 9–12</a:t>
-            </a:r>
-            <a:endParaRPr lang="en-US" sz="1500" dirty="0"/>
-          </a:p>
-        </p:txBody>
-      </p:sp>
-      <p:sp>
-        <p:nvSpPr>
-          <p:cNvPr id="19" name="Text 17"/>
-          <p:cNvSpPr txBox="1"/>
-          <p:nvPr/>
-        </p:nvSpPr>
-        <p:spPr>
-          <a:xfrm>
-            <a:off x="8366760" y="3840480"/>
-            <a:ext cx="2834640" cy="914400"/>
-          </a:xfrm>
-          <a:prstGeom prst="rect">
-            <a:avLst/>
-          </a:prstGeom>
-          <a:noFill/>
-          <a:ln/>
-        </p:spPr>
-        <p:txBody>
-          <a:bodyPr wrap="square" lIns="0" tIns="0" rIns="0" bIns="0" rtlCol="0" anchor="ctr"/>
-          <a:lstStyle/>
-          <a:p>
-            <a:pPr indent="0" marL="0">
-              <a:lnSpc>
-                <a:spcPts val="1800"/>
-              </a:lnSpc>
-              <a:buNone/>
-            </a:pPr>
-            <a:r>
-              <a:rPr lang="en-US" sz="1250" dirty="0">
+              <a:t>Setup and integration support</a:t>
+            </a:r>
+            <a:endParaRPr lang="en-US" sz="1300" dirty="0"/>
+          </a:p>
+        </p:txBody>
+      </p:sp>
+      <p:sp>
+        <p:nvSpPr>
+          <p:cNvPr id="17" name="Text 15"/>
+          <p:cNvSpPr txBox="1"/>
+          <p:nvPr/>
+        </p:nvSpPr>
+        <p:spPr>
+          <a:xfrm>
+            <a:off x="6583680" y="4315968"/>
+            <a:ext cx="4572000" cy="274320"/>
+          </a:xfrm>
+          <a:prstGeom prst="rect">
+            <a:avLst/>
+          </a:prstGeom>
+          <a:noFill/>
+          <a:ln/>
+        </p:spPr>
+        <p:txBody>
+          <a:bodyPr wrap="square" lIns="0" tIns="0" rIns="0" bIns="0" rtlCol="0" anchor="ctr"/>
+          <a:lstStyle/>
+          <a:p>
+            <a:pPr indent="0" marL="0">
+              <a:buNone/>
+            </a:pPr>
+            <a:r>
+              <a:rPr lang="en-US" sz="1150" dirty="0">
                 <a:solidFill>
                   <a:srgbClr val="475663"/>
                 </a:solidFill>
@@ -2669,26 +2709,26 @@
                 <a:ea typeface="Calibri" pitchFamily="34" charset="-122"/>
                 <a:cs typeface="Calibri" pitchFamily="34" charset="-120"/>
               </a:rPr>
-              <a:t>Cohort report against baseline. Honest review — including whether it did nothing.</a:t>
-            </a:r>
-            <a:endParaRPr lang="en-US" sz="1250" dirty="0"/>
-          </a:p>
-        </p:txBody>
-      </p:sp>
-      <p:sp>
-        <p:nvSpPr>
-          <p:cNvPr id="20" name="Shape 18"/>
+              <a:t>Included in every contract.</a:t>
+            </a:r>
+            <a:endParaRPr lang="en-US" sz="1150" dirty="0"/>
+          </a:p>
+        </p:txBody>
+      </p:sp>
+      <p:sp>
+        <p:nvSpPr>
+          <p:cNvPr id="18" name="Shape 16"/>
           <p:cNvSpPr/>
           <p:nvPr/>
         </p:nvSpPr>
         <p:spPr>
           <a:xfrm>
-            <a:off x="731520" y="5120640"/>
-            <a:ext cx="10698480" cy="960120"/>
+            <a:off x="6263640" y="4800600"/>
+            <a:ext cx="5166360" cy="621792"/>
           </a:xfrm>
           <a:prstGeom prst="roundRect">
             <a:avLst>
-              <a:gd name="adj" fmla="val 7619"/>
+              <a:gd name="adj" fmla="val 11765"/>
             </a:avLst>
           </a:prstGeom>
           <a:solidFill>
@@ -2711,43 +2751,121 @@
       </p:sp>
       <p:sp>
         <p:nvSpPr>
-          <p:cNvPr id="21" name="Text 19"/>
-          <p:cNvSpPr txBox="1"/>
-          <p:nvPr/>
-        </p:nvSpPr>
-        <p:spPr>
-          <a:xfrm>
-            <a:off x="1097280" y="5321808"/>
-            <a:ext cx="9966960" cy="594360"/>
-          </a:xfrm>
-          <a:prstGeom prst="rect">
-            <a:avLst/>
-          </a:prstGeom>
-          <a:noFill/>
-          <a:ln/>
-        </p:spPr>
-        <p:txBody>
-          <a:bodyPr wrap="square" lIns="0" tIns="0" rIns="0" bIns="0" rtlCol="0" anchor="ctr"/>
-          <a:lstStyle/>
-          <a:p>
-            <a:pPr indent="0" marL="0">
-              <a:lnSpc>
-                <a:spcPts val="2000"/>
-              </a:lnSpc>
-              <a:buNone/>
-            </a:pPr>
-            <a:r>
-              <a:rPr lang="en-US" sz="1350" i="1" dirty="0">
+          <p:cNvPr id="19" name="Text 17"/>
+          <p:cNvSpPr txBox="1"/>
+          <p:nvPr/>
+        </p:nvSpPr>
+        <p:spPr>
+          <a:xfrm>
+            <a:off x="6583680" y="4910328"/>
+            <a:ext cx="4572000" cy="274320"/>
+          </a:xfrm>
+          <a:prstGeom prst="rect">
+            <a:avLst/>
+          </a:prstGeom>
+          <a:noFill/>
+          <a:ln/>
+        </p:spPr>
+        <p:txBody>
+          <a:bodyPr wrap="square" lIns="0" tIns="0" rIns="0" bIns="0" rtlCol="0" anchor="ctr"/>
+          <a:lstStyle/>
+          <a:p>
+            <a:pPr indent="0" marL="0">
+              <a:buNone/>
+            </a:pPr>
+            <a:r>
+              <a:rPr lang="en-US" sz="1300" b="1" dirty="0">
                 <a:solidFill>
                   <a:srgbClr val="102A43"/>
+                </a:solidFill>
+                <a:latin typeface="Arial" pitchFamily="34" charset="0"/>
+                <a:ea typeface="Arial" pitchFamily="34" charset="-122"/>
+                <a:cs typeface="Arial" pitchFamily="34" charset="-120"/>
+              </a:rPr>
+              <a:t>Single sign-on and directory sync</a:t>
+            </a:r>
+            <a:endParaRPr lang="en-US" sz="1300" dirty="0"/>
+          </a:p>
+        </p:txBody>
+      </p:sp>
+      <p:sp>
+        <p:nvSpPr>
+          <p:cNvPr id="20" name="Text 18"/>
+          <p:cNvSpPr txBox="1"/>
+          <p:nvPr/>
+        </p:nvSpPr>
+        <p:spPr>
+          <a:xfrm>
+            <a:off x="6583680" y="5184648"/>
+            <a:ext cx="4572000" cy="274320"/>
+          </a:xfrm>
+          <a:prstGeom prst="rect">
+            <a:avLst/>
+          </a:prstGeom>
+          <a:noFill/>
+          <a:ln/>
+        </p:spPr>
+        <p:txBody>
+          <a:bodyPr wrap="square" lIns="0" tIns="0" rIns="0" bIns="0" rtlCol="0" anchor="ctr"/>
+          <a:lstStyle/>
+          <a:p>
+            <a:pPr indent="0" marL="0">
+              <a:buNone/>
+            </a:pPr>
+            <a:r>
+              <a:rPr lang="en-US" sz="1150" dirty="0">
+                <a:solidFill>
+                  <a:srgbClr val="475663"/>
                 </a:solidFill>
                 <a:latin typeface="Calibri" pitchFamily="34" charset="0"/>
                 <a:ea typeface="Calibri" pitchFamily="34" charset="-122"/>
                 <a:cs typeface="Calibri" pitchFamily="34" charset="-120"/>
               </a:rPr>
-              <a:t>If the pilot shows it did not work, we would rather know at week twelve than sell you a second year. That is the whole basis of the programme.</a:t>
-            </a:r>
-            <a:endParaRPr lang="en-US" sz="1350" dirty="0"/>
+              <a:t>Contracted, not yet built. Delivered inside the pilot.</a:t>
+            </a:r>
+            <a:endParaRPr lang="en-US" sz="1150" dirty="0"/>
+          </a:p>
+        </p:txBody>
+      </p:sp>
+      <p:sp>
+        <p:nvSpPr>
+          <p:cNvPr id="21" name="Text 19"/>
+          <p:cNvSpPr txBox="1"/>
+          <p:nvPr/>
+        </p:nvSpPr>
+        <p:spPr>
+          <a:xfrm>
+            <a:off x="731520" y="5623560"/>
+            <a:ext cx="10698480" cy="548640"/>
+          </a:xfrm>
+          <a:prstGeom prst="rect">
+            <a:avLst/>
+          </a:prstGeom>
+          <a:noFill/>
+          <a:ln/>
+        </p:spPr>
+        <p:txBody>
+          <a:bodyPr wrap="square" lIns="0" tIns="0" rIns="0" bIns="0" rtlCol="0" anchor="ctr"/>
+          <a:lstStyle/>
+          <a:p>
+            <a:pPr indent="0" marL="0">
+              <a:lnSpc>
+                <a:spcPts val="1900"/>
+              </a:lnSpc>
+              <a:buNone/>
+            </a:pPr>
+            <a:r>
+              <a:rPr lang="en-US" sz="1300" i="1" dirty="0">
+                <a:solidFill>
+                  <a:srgbClr val="00A99D"/>
+                </a:solidFill>
+                <a:latin typeface="Calibri" pitchFamily="34" charset="0"/>
+                <a:ea typeface="Calibri" pitchFamily="34" charset="-122"/>
+                <a:cs typeface="Calibri" pitchFamily="34" charset="-120"/>
+              </a:rPr>
+              <a:t>Design partners are priced at the floor for the first year, in exchange for feedback and a reference once there is something real to reference.</a:t>
+            </a:r>
+            <a:endParaRPr lang="en-US" sz="1300" dirty="0"/>
           </a:p>
         </p:txBody>
       </p:sp>
@@ -2762,6 +2880,751 @@
 <file path=ppt/slides/slide11.xml><?xml version="1.0" encoding="utf-8"?>
 <p:sld xmlns:a="http://schemas.openxmlformats.org/drawingml/2006/main" xmlns:r="http://schemas.openxmlformats.org/officeDocument/2006/relationships" xmlns:p="http://schemas.openxmlformats.org/presentationml/2006/main">
   <p:cSld name="Slide 11">
+    <p:bg>
+      <p:bgPr>
+        <a:solidFill>
+          <a:srgbClr val="FFFFFF"/>
+        </a:solidFill>
+      </p:bgPr>
+    </p:bg>
+    <p:spTree>
+      <p:nvGrpSpPr>
+        <p:cNvPr id="1" name=""/>
+        <p:cNvGrpSpPr/>
+        <p:nvPr/>
+      </p:nvGrpSpPr>
+      <p:grpSpPr>
+        <a:xfrm>
+          <a:off x="0" y="0"/>
+          <a:ext cx="0" cy="0"/>
+          <a:chOff x="0" y="0"/>
+          <a:chExt cx="0" cy="0"/>
+        </a:xfrm>
+      </p:grpSpPr>
+      <p:sp>
+        <p:nvSpPr>
+          <p:cNvPr id="2" name="Shape 0"/>
+          <p:cNvSpPr/>
+          <p:nvPr/>
+        </p:nvSpPr>
+        <p:spPr>
+          <a:xfrm>
+            <a:off x="731520" y="690372"/>
+            <a:ext cx="118872" cy="118872"/>
+          </a:xfrm>
+          <a:prstGeom prst="ellipse">
+            <a:avLst/>
+          </a:prstGeom>
+          <a:solidFill>
+            <a:srgbClr val="00A99D"/>
+          </a:solidFill>
+          <a:ln/>
+        </p:spPr>
+      </p:sp>
+      <p:sp>
+        <p:nvSpPr>
+          <p:cNvPr id="3" name="Text 1"/>
+          <p:cNvSpPr txBox="1"/>
+          <p:nvPr/>
+        </p:nvSpPr>
+        <p:spPr>
+          <a:xfrm>
+            <a:off x="969264" y="640080"/>
+            <a:ext cx="7315200" cy="274320"/>
+          </a:xfrm>
+          <a:prstGeom prst="rect">
+            <a:avLst/>
+          </a:prstGeom>
+          <a:noFill/>
+          <a:ln/>
+        </p:spPr>
+        <p:txBody>
+          <a:bodyPr wrap="square" lIns="0" tIns="0" rIns="0" bIns="0" rtlCol="0" anchor="ctr"/>
+          <a:lstStyle/>
+          <a:p>
+            <a:pPr indent="0" marL="0">
+              <a:buNone/>
+            </a:pPr>
+            <a:r>
+              <a:rPr lang="en-US" sz="1200" b="1" spc="200" kern="0" dirty="0">
+                <a:solidFill>
+                  <a:srgbClr val="00A99D"/>
+                </a:solidFill>
+                <a:latin typeface="Arial" pitchFamily="34" charset="0"/>
+                <a:ea typeface="Arial" pitchFamily="34" charset="-122"/>
+                <a:cs typeface="Arial" pitchFamily="34" charset="-120"/>
+              </a:rPr>
+              <a:t>THE ASK</a:t>
+            </a:r>
+            <a:endParaRPr lang="en-US" sz="1200" dirty="0"/>
+          </a:p>
+        </p:txBody>
+      </p:sp>
+      <p:sp>
+        <p:nvSpPr>
+          <p:cNvPr id="4" name="Text 2"/>
+          <p:cNvSpPr txBox="1"/>
+          <p:nvPr/>
+        </p:nvSpPr>
+        <p:spPr>
+          <a:xfrm>
+            <a:off x="731520" y="1051560"/>
+            <a:ext cx="10698480" cy="1005840"/>
+          </a:xfrm>
+          <a:prstGeom prst="rect">
+            <a:avLst/>
+          </a:prstGeom>
+          <a:noFill/>
+          <a:ln/>
+        </p:spPr>
+        <p:txBody>
+          <a:bodyPr wrap="square" lIns="0" tIns="0" rIns="0" bIns="0" rtlCol="0" anchor="ctr"/>
+          <a:lstStyle/>
+          <a:p>
+            <a:pPr indent="0" marL="0">
+              <a:buNone/>
+            </a:pPr>
+            <a:r>
+              <a:rPr lang="en-US" sz="3400" b="1" dirty="0">
+                <a:solidFill>
+                  <a:srgbClr val="102A43"/>
+                </a:solidFill>
+                <a:latin typeface="Cambria" pitchFamily="34" charset="0"/>
+                <a:ea typeface="Cambria" pitchFamily="34" charset="-122"/>
+                <a:cs typeface="Cambria" pitchFamily="34" charset="-120"/>
+              </a:rPr>
+              <a:t>A twelve-week pilot,</a:t>
+            </a:r>
+            <a:endParaRPr lang="en-US" sz="3400" dirty="0"/>
+          </a:p>
+          <a:p>
+            <a:pPr indent="0" marL="0">
+              <a:buNone/>
+            </a:pPr>
+            <a:r>
+              <a:rPr lang="en-US" sz="3400" b="1" dirty="0">
+                <a:solidFill>
+                  <a:srgbClr val="102A43"/>
+                </a:solidFill>
+                <a:latin typeface="Cambria" pitchFamily="34" charset="0"/>
+                <a:ea typeface="Cambria" pitchFamily="34" charset="-122"/>
+                <a:cs typeface="Cambria" pitchFamily="34" charset="-120"/>
+              </a:rPr>
+              <a:t>one team, no procurement epic.</a:t>
+            </a:r>
+            <a:endParaRPr lang="en-US" sz="3400" dirty="0"/>
+          </a:p>
+        </p:txBody>
+      </p:sp>
+      <p:sp>
+        <p:nvSpPr>
+          <p:cNvPr id="5" name="Shape 3"/>
+          <p:cNvSpPr/>
+          <p:nvPr/>
+        </p:nvSpPr>
+        <p:spPr>
+          <a:xfrm>
+            <a:off x="731520" y="2514600"/>
+            <a:ext cx="3502152" cy="2377440"/>
+          </a:xfrm>
+          <a:prstGeom prst="roundRect">
+            <a:avLst>
+              <a:gd name="adj" fmla="val 3077"/>
+            </a:avLst>
+          </a:prstGeom>
+          <a:solidFill>
+            <a:srgbClr val="F4F7F9"/>
+          </a:solidFill>
+          <a:ln w="12700">
+            <a:solidFill>
+              <a:srgbClr val="F4F7F9"/>
+            </a:solidFill>
+            <a:prstDash val="solid"/>
+          </a:ln>
+          <a:effectLst>
+            <a:outerShdw sx="100000" sy="100000" kx="0" ky="0" algn="bl" rotWithShape="0" blurRad="127000" dist="508" dir="5400000">
+              <a:srgbClr val="9AA8B4">
+                <a:alpha val="25000"/>
+              </a:srgbClr>
+            </a:outerShdw>
+          </a:effectLst>
+        </p:spPr>
+      </p:sp>
+      <p:sp>
+        <p:nvSpPr>
+          <p:cNvPr id="6" name="Shape 4"/>
+          <p:cNvSpPr/>
+          <p:nvPr/>
+        </p:nvSpPr>
+        <p:spPr>
+          <a:xfrm>
+            <a:off x="1051560" y="2743200"/>
+            <a:ext cx="548640" cy="548640"/>
+          </a:xfrm>
+          <a:prstGeom prst="ellipse">
+            <a:avLst/>
+          </a:prstGeom>
+          <a:solidFill>
+            <a:srgbClr val="00A99D"/>
+          </a:solidFill>
+          <a:ln/>
+        </p:spPr>
+      </p:sp>
+      <p:sp>
+        <p:nvSpPr>
+          <p:cNvPr id="7" name="Text 5"/>
+          <p:cNvSpPr txBox="1"/>
+          <p:nvPr/>
+        </p:nvSpPr>
+        <p:spPr>
+          <a:xfrm>
+            <a:off x="1051560" y="2816352"/>
+            <a:ext cx="548640" cy="411480"/>
+          </a:xfrm>
+          <a:prstGeom prst="rect">
+            <a:avLst/>
+          </a:prstGeom>
+          <a:noFill/>
+          <a:ln/>
+        </p:spPr>
+        <p:txBody>
+          <a:bodyPr wrap="square" lIns="0" tIns="0" rIns="0" bIns="0" rtlCol="0" anchor="ctr"/>
+          <a:lstStyle/>
+          <a:p>
+            <a:pPr algn="ctr" indent="0" marL="0">
+              <a:buNone/>
+            </a:pPr>
+            <a:r>
+              <a:rPr lang="en-US" sz="2200" b="1" dirty="0">
+                <a:solidFill>
+                  <a:srgbClr val="FFFFFF"/>
+                </a:solidFill>
+                <a:latin typeface="Cambria" pitchFamily="34" charset="0"/>
+                <a:ea typeface="Cambria" pitchFamily="34" charset="-122"/>
+                <a:cs typeface="Cambria" pitchFamily="34" charset="-120"/>
+              </a:rPr>
+              <a:t>1</a:t>
+            </a:r>
+            <a:endParaRPr lang="en-US" sz="2200" dirty="0"/>
+          </a:p>
+        </p:txBody>
+      </p:sp>
+      <p:sp>
+        <p:nvSpPr>
+          <p:cNvPr id="8" name="Text 6"/>
+          <p:cNvSpPr txBox="1"/>
+          <p:nvPr/>
+        </p:nvSpPr>
+        <p:spPr>
+          <a:xfrm>
+            <a:off x="1051560" y="3456432"/>
+            <a:ext cx="2834640" cy="320040"/>
+          </a:xfrm>
+          <a:prstGeom prst="rect">
+            <a:avLst/>
+          </a:prstGeom>
+          <a:noFill/>
+          <a:ln/>
+        </p:spPr>
+        <p:txBody>
+          <a:bodyPr wrap="square" lIns="0" tIns="0" rIns="0" bIns="0" rtlCol="0" anchor="ctr"/>
+          <a:lstStyle/>
+          <a:p>
+            <a:pPr indent="0" marL="0">
+              <a:buNone/>
+            </a:pPr>
+            <a:r>
+              <a:rPr lang="en-US" sz="1500" b="1" dirty="0">
+                <a:solidFill>
+                  <a:srgbClr val="102A43"/>
+                </a:solidFill>
+                <a:latin typeface="Arial" pitchFamily="34" charset="0"/>
+                <a:ea typeface="Arial" pitchFamily="34" charset="-122"/>
+                <a:cs typeface="Arial" pitchFamily="34" charset="-120"/>
+              </a:rPr>
+              <a:t>Week 0</a:t>
+            </a:r>
+            <a:endParaRPr lang="en-US" sz="1500" dirty="0"/>
+          </a:p>
+        </p:txBody>
+      </p:sp>
+      <p:sp>
+        <p:nvSpPr>
+          <p:cNvPr id="9" name="Text 7"/>
+          <p:cNvSpPr txBox="1"/>
+          <p:nvPr/>
+        </p:nvSpPr>
+        <p:spPr>
+          <a:xfrm>
+            <a:off x="1051560" y="3840480"/>
+            <a:ext cx="2834640" cy="914400"/>
+          </a:xfrm>
+          <a:prstGeom prst="rect">
+            <a:avLst/>
+          </a:prstGeom>
+          <a:noFill/>
+          <a:ln/>
+        </p:spPr>
+        <p:txBody>
+          <a:bodyPr wrap="square" lIns="0" tIns="0" rIns="0" bIns="0" rtlCol="0" anchor="ctr"/>
+          <a:lstStyle/>
+          <a:p>
+            <a:pPr indent="0" marL="0">
+              <a:lnSpc>
+                <a:spcPts val="1800"/>
+              </a:lnSpc>
+              <a:buNone/>
+            </a:pPr>
+            <a:r>
+              <a:rPr lang="en-US" sz="1250" dirty="0">
+                <a:solidFill>
+                  <a:srgbClr val="475663"/>
+                </a:solidFill>
+                <a:latin typeface="Calibri" pitchFamily="34" charset="0"/>
+                <a:ea typeface="Calibri" pitchFamily="34" charset="-122"/>
+                <a:cs typeface="Calibri" pitchFamily="34" charset="-120"/>
+              </a:rPr>
+              <a:t>One team, 10–100 people. Invited by email, and a named sponsor on your side and ours.</a:t>
+            </a:r>
+            <a:endParaRPr lang="en-US" sz="1250" dirty="0"/>
+          </a:p>
+        </p:txBody>
+      </p:sp>
+      <p:sp>
+        <p:nvSpPr>
+          <p:cNvPr id="10" name="Shape 8"/>
+          <p:cNvSpPr/>
+          <p:nvPr/>
+        </p:nvSpPr>
+        <p:spPr>
+          <a:xfrm>
+            <a:off x="4389120" y="2514600"/>
+            <a:ext cx="3502152" cy="2377440"/>
+          </a:xfrm>
+          <a:prstGeom prst="roundRect">
+            <a:avLst>
+              <a:gd name="adj" fmla="val 3077"/>
+            </a:avLst>
+          </a:prstGeom>
+          <a:solidFill>
+            <a:srgbClr val="F4F7F9"/>
+          </a:solidFill>
+          <a:ln w="12700">
+            <a:solidFill>
+              <a:srgbClr val="F4F7F9"/>
+            </a:solidFill>
+            <a:prstDash val="solid"/>
+          </a:ln>
+          <a:effectLst>
+            <a:outerShdw sx="100000" sy="100000" kx="0" ky="0" algn="bl" rotWithShape="0" blurRad="127000" dist="508" dir="5400000">
+              <a:srgbClr val="9AA8B4">
+                <a:alpha val="25000"/>
+              </a:srgbClr>
+            </a:outerShdw>
+          </a:effectLst>
+        </p:spPr>
+      </p:sp>
+      <p:sp>
+        <p:nvSpPr>
+          <p:cNvPr id="11" name="Shape 9"/>
+          <p:cNvSpPr/>
+          <p:nvPr/>
+        </p:nvSpPr>
+        <p:spPr>
+          <a:xfrm>
+            <a:off x="4709160" y="2743200"/>
+            <a:ext cx="548640" cy="548640"/>
+          </a:xfrm>
+          <a:prstGeom prst="ellipse">
+            <a:avLst/>
+          </a:prstGeom>
+          <a:solidFill>
+            <a:srgbClr val="00A99D"/>
+          </a:solidFill>
+          <a:ln/>
+        </p:spPr>
+      </p:sp>
+      <p:sp>
+        <p:nvSpPr>
+          <p:cNvPr id="12" name="Text 10"/>
+          <p:cNvSpPr txBox="1"/>
+          <p:nvPr/>
+        </p:nvSpPr>
+        <p:spPr>
+          <a:xfrm>
+            <a:off x="4709160" y="2816352"/>
+            <a:ext cx="548640" cy="411480"/>
+          </a:xfrm>
+          <a:prstGeom prst="rect">
+            <a:avLst/>
+          </a:prstGeom>
+          <a:noFill/>
+          <a:ln/>
+        </p:spPr>
+        <p:txBody>
+          <a:bodyPr wrap="square" lIns="0" tIns="0" rIns="0" bIns="0" rtlCol="0" anchor="ctr"/>
+          <a:lstStyle/>
+          <a:p>
+            <a:pPr algn="ctr" indent="0" marL="0">
+              <a:buNone/>
+            </a:pPr>
+            <a:r>
+              <a:rPr lang="en-US" sz="2200" b="1" dirty="0">
+                <a:solidFill>
+                  <a:srgbClr val="FFFFFF"/>
+                </a:solidFill>
+                <a:latin typeface="Cambria" pitchFamily="34" charset="0"/>
+                <a:ea typeface="Cambria" pitchFamily="34" charset="-122"/>
+                <a:cs typeface="Cambria" pitchFamily="34" charset="-120"/>
+              </a:rPr>
+              <a:t>2</a:t>
+            </a:r>
+            <a:endParaRPr lang="en-US" sz="2200" dirty="0"/>
+          </a:p>
+        </p:txBody>
+      </p:sp>
+      <p:sp>
+        <p:nvSpPr>
+          <p:cNvPr id="13" name="Text 11"/>
+          <p:cNvSpPr txBox="1"/>
+          <p:nvPr/>
+        </p:nvSpPr>
+        <p:spPr>
+          <a:xfrm>
+            <a:off x="4709160" y="3456432"/>
+            <a:ext cx="2834640" cy="320040"/>
+          </a:xfrm>
+          <a:prstGeom prst="rect">
+            <a:avLst/>
+          </a:prstGeom>
+          <a:noFill/>
+          <a:ln/>
+        </p:spPr>
+        <p:txBody>
+          <a:bodyPr wrap="square" lIns="0" tIns="0" rIns="0" bIns="0" rtlCol="0" anchor="ctr"/>
+          <a:lstStyle/>
+          <a:p>
+            <a:pPr indent="0" marL="0">
+              <a:buNone/>
+            </a:pPr>
+            <a:r>
+              <a:rPr lang="en-US" sz="1500" b="1" dirty="0">
+                <a:solidFill>
+                  <a:srgbClr val="102A43"/>
+                </a:solidFill>
+                <a:latin typeface="Arial" pitchFamily="34" charset="0"/>
+                <a:ea typeface="Arial" pitchFamily="34" charset="-122"/>
+                <a:cs typeface="Arial" pitchFamily="34" charset="-120"/>
+              </a:rPr>
+              <a:t>Weeks 1–8</a:t>
+            </a:r>
+            <a:endParaRPr lang="en-US" sz="1500" dirty="0"/>
+          </a:p>
+        </p:txBody>
+      </p:sp>
+      <p:sp>
+        <p:nvSpPr>
+          <p:cNvPr id="14" name="Text 12"/>
+          <p:cNvSpPr txBox="1"/>
+          <p:nvPr/>
+        </p:nvSpPr>
+        <p:spPr>
+          <a:xfrm>
+            <a:off x="4709160" y="3840480"/>
+            <a:ext cx="2834640" cy="914400"/>
+          </a:xfrm>
+          <a:prstGeom prst="rect">
+            <a:avLst/>
+          </a:prstGeom>
+          <a:noFill/>
+          <a:ln/>
+        </p:spPr>
+        <p:txBody>
+          <a:bodyPr wrap="square" lIns="0" tIns="0" rIns="0" bIns="0" rtlCol="0" anchor="ctr"/>
+          <a:lstStyle/>
+          <a:p>
+            <a:pPr indent="0" marL="0">
+              <a:lnSpc>
+                <a:spcPts val="1800"/>
+              </a:lnSpc>
+              <a:buNone/>
+            </a:pPr>
+            <a:r>
+              <a:rPr lang="en-US" sz="1250" dirty="0">
+                <a:solidFill>
+                  <a:srgbClr val="475663"/>
+                </a:solidFill>
+                <a:latin typeface="Calibri" pitchFamily="34" charset="0"/>
+                <a:ea typeface="Calibri" pitchFamily="34" charset="-122"/>
+                <a:cs typeface="Calibri" pitchFamily="34" charset="-120"/>
+              </a:rPr>
+              <a:t>People use it. We watch the held rate and completion, not the vanity numbers.</a:t>
+            </a:r>
+            <a:endParaRPr lang="en-US" sz="1250" dirty="0"/>
+          </a:p>
+        </p:txBody>
+      </p:sp>
+      <p:sp>
+        <p:nvSpPr>
+          <p:cNvPr id="15" name="Shape 13"/>
+          <p:cNvSpPr/>
+          <p:nvPr/>
+        </p:nvSpPr>
+        <p:spPr>
+          <a:xfrm>
+            <a:off x="8046720" y="2514600"/>
+            <a:ext cx="3502152" cy="2377440"/>
+          </a:xfrm>
+          <a:prstGeom prst="roundRect">
+            <a:avLst>
+              <a:gd name="adj" fmla="val 3077"/>
+            </a:avLst>
+          </a:prstGeom>
+          <a:solidFill>
+            <a:srgbClr val="F4F7F9"/>
+          </a:solidFill>
+          <a:ln w="12700">
+            <a:solidFill>
+              <a:srgbClr val="F4F7F9"/>
+            </a:solidFill>
+            <a:prstDash val="solid"/>
+          </a:ln>
+          <a:effectLst>
+            <a:outerShdw sx="100000" sy="100000" kx="0" ky="0" algn="bl" rotWithShape="0" blurRad="127000" dist="508" dir="5400000">
+              <a:srgbClr val="9AA8B4">
+                <a:alpha val="25000"/>
+              </a:srgbClr>
+            </a:outerShdw>
+          </a:effectLst>
+        </p:spPr>
+      </p:sp>
+      <p:sp>
+        <p:nvSpPr>
+          <p:cNvPr id="16" name="Shape 14"/>
+          <p:cNvSpPr/>
+          <p:nvPr/>
+        </p:nvSpPr>
+        <p:spPr>
+          <a:xfrm>
+            <a:off x="8366760" y="2743200"/>
+            <a:ext cx="548640" cy="548640"/>
+          </a:xfrm>
+          <a:prstGeom prst="ellipse">
+            <a:avLst/>
+          </a:prstGeom>
+          <a:solidFill>
+            <a:srgbClr val="00A99D"/>
+          </a:solidFill>
+          <a:ln/>
+        </p:spPr>
+      </p:sp>
+      <p:sp>
+        <p:nvSpPr>
+          <p:cNvPr id="17" name="Text 15"/>
+          <p:cNvSpPr txBox="1"/>
+          <p:nvPr/>
+        </p:nvSpPr>
+        <p:spPr>
+          <a:xfrm>
+            <a:off x="8366760" y="2816352"/>
+            <a:ext cx="548640" cy="411480"/>
+          </a:xfrm>
+          <a:prstGeom prst="rect">
+            <a:avLst/>
+          </a:prstGeom>
+          <a:noFill/>
+          <a:ln/>
+        </p:spPr>
+        <p:txBody>
+          <a:bodyPr wrap="square" lIns="0" tIns="0" rIns="0" bIns="0" rtlCol="0" anchor="ctr"/>
+          <a:lstStyle/>
+          <a:p>
+            <a:pPr algn="ctr" indent="0" marL="0">
+              <a:buNone/>
+            </a:pPr>
+            <a:r>
+              <a:rPr lang="en-US" sz="2200" b="1" dirty="0">
+                <a:solidFill>
+                  <a:srgbClr val="FFFFFF"/>
+                </a:solidFill>
+                <a:latin typeface="Cambria" pitchFamily="34" charset="0"/>
+                <a:ea typeface="Cambria" pitchFamily="34" charset="-122"/>
+                <a:cs typeface="Cambria" pitchFamily="34" charset="-120"/>
+              </a:rPr>
+              <a:t>3</a:t>
+            </a:r>
+            <a:endParaRPr lang="en-US" sz="2200" dirty="0"/>
+          </a:p>
+        </p:txBody>
+      </p:sp>
+      <p:sp>
+        <p:nvSpPr>
+          <p:cNvPr id="18" name="Text 16"/>
+          <p:cNvSpPr txBox="1"/>
+          <p:nvPr/>
+        </p:nvSpPr>
+        <p:spPr>
+          <a:xfrm>
+            <a:off x="8366760" y="3456432"/>
+            <a:ext cx="2834640" cy="320040"/>
+          </a:xfrm>
+          <a:prstGeom prst="rect">
+            <a:avLst/>
+          </a:prstGeom>
+          <a:noFill/>
+          <a:ln/>
+        </p:spPr>
+        <p:txBody>
+          <a:bodyPr wrap="square" lIns="0" tIns="0" rIns="0" bIns="0" rtlCol="0" anchor="ctr"/>
+          <a:lstStyle/>
+          <a:p>
+            <a:pPr indent="0" marL="0">
+              <a:buNone/>
+            </a:pPr>
+            <a:r>
+              <a:rPr lang="en-US" sz="1500" b="1" dirty="0">
+                <a:solidFill>
+                  <a:srgbClr val="102A43"/>
+                </a:solidFill>
+                <a:latin typeface="Arial" pitchFamily="34" charset="0"/>
+                <a:ea typeface="Arial" pitchFamily="34" charset="-122"/>
+                <a:cs typeface="Arial" pitchFamily="34" charset="-120"/>
+              </a:rPr>
+              <a:t>Weeks 9–12</a:t>
+            </a:r>
+            <a:endParaRPr lang="en-US" sz="1500" dirty="0"/>
+          </a:p>
+        </p:txBody>
+      </p:sp>
+      <p:sp>
+        <p:nvSpPr>
+          <p:cNvPr id="19" name="Text 17"/>
+          <p:cNvSpPr txBox="1"/>
+          <p:nvPr/>
+        </p:nvSpPr>
+        <p:spPr>
+          <a:xfrm>
+            <a:off x="8366760" y="3840480"/>
+            <a:ext cx="2834640" cy="914400"/>
+          </a:xfrm>
+          <a:prstGeom prst="rect">
+            <a:avLst/>
+          </a:prstGeom>
+          <a:noFill/>
+          <a:ln/>
+        </p:spPr>
+        <p:txBody>
+          <a:bodyPr wrap="square" lIns="0" tIns="0" rIns="0" bIns="0" rtlCol="0" anchor="ctr"/>
+          <a:lstStyle/>
+          <a:p>
+            <a:pPr indent="0" marL="0">
+              <a:lnSpc>
+                <a:spcPts val="1800"/>
+              </a:lnSpc>
+              <a:buNone/>
+            </a:pPr>
+            <a:r>
+              <a:rPr lang="en-US" sz="1250" dirty="0">
+                <a:solidFill>
+                  <a:srgbClr val="475663"/>
+                </a:solidFill>
+                <a:latin typeface="Calibri" pitchFamily="34" charset="0"/>
+                <a:ea typeface="Calibri" pitchFamily="34" charset="-122"/>
+                <a:cs typeface="Calibri" pitchFamily="34" charset="-120"/>
+              </a:rPr>
+              <a:t>Cohort report against baseline. Honest review — including whether it did nothing.</a:t>
+            </a:r>
+            <a:endParaRPr lang="en-US" sz="1250" dirty="0"/>
+          </a:p>
+        </p:txBody>
+      </p:sp>
+      <p:sp>
+        <p:nvSpPr>
+          <p:cNvPr id="20" name="Shape 18"/>
+          <p:cNvSpPr/>
+          <p:nvPr/>
+        </p:nvSpPr>
+        <p:spPr>
+          <a:xfrm>
+            <a:off x="731520" y="5120640"/>
+            <a:ext cx="10698480" cy="960120"/>
+          </a:xfrm>
+          <a:prstGeom prst="roundRect">
+            <a:avLst>
+              <a:gd name="adj" fmla="val 7619"/>
+            </a:avLst>
+          </a:prstGeom>
+          <a:solidFill>
+            <a:srgbClr val="F4F7F9"/>
+          </a:solidFill>
+          <a:ln w="12700">
+            <a:solidFill>
+              <a:srgbClr val="F4F7F9"/>
+            </a:solidFill>
+            <a:prstDash val="solid"/>
+          </a:ln>
+          <a:effectLst>
+            <a:outerShdw sx="100000" sy="100000" kx="0" ky="0" algn="bl" rotWithShape="0" blurRad="127000" dist="508" dir="5400000">
+              <a:srgbClr val="9AA8B4">
+                <a:alpha val="25000"/>
+              </a:srgbClr>
+            </a:outerShdw>
+          </a:effectLst>
+        </p:spPr>
+      </p:sp>
+      <p:sp>
+        <p:nvSpPr>
+          <p:cNvPr id="21" name="Text 19"/>
+          <p:cNvSpPr txBox="1"/>
+          <p:nvPr/>
+        </p:nvSpPr>
+        <p:spPr>
+          <a:xfrm>
+            <a:off x="1097280" y="5321808"/>
+            <a:ext cx="9966960" cy="594360"/>
+          </a:xfrm>
+          <a:prstGeom prst="rect">
+            <a:avLst/>
+          </a:prstGeom>
+          <a:noFill/>
+          <a:ln/>
+        </p:spPr>
+        <p:txBody>
+          <a:bodyPr wrap="square" lIns="0" tIns="0" rIns="0" bIns="0" rtlCol="0" anchor="ctr"/>
+          <a:lstStyle/>
+          <a:p>
+            <a:pPr indent="0" marL="0">
+              <a:lnSpc>
+                <a:spcPts val="2000"/>
+              </a:lnSpc>
+              <a:buNone/>
+            </a:pPr>
+            <a:r>
+              <a:rPr lang="en-US" sz="1350" i="1" dirty="0">
+                <a:solidFill>
+                  <a:srgbClr val="102A43"/>
+                </a:solidFill>
+                <a:latin typeface="Calibri" pitchFamily="34" charset="0"/>
+                <a:ea typeface="Calibri" pitchFamily="34" charset="-122"/>
+                <a:cs typeface="Calibri" pitchFamily="34" charset="-120"/>
+              </a:rPr>
+              <a:t>If the pilot shows it did not work, we would rather know at week twelve than sell you a second year. That is the whole basis of the programme.</a:t>
+            </a:r>
+            <a:endParaRPr lang="en-US" sz="1350" dirty="0"/>
+          </a:p>
+        </p:txBody>
+      </p:sp>
+    </p:spTree>
+  </p:cSld>
+  <p:clrMapOvr>
+    <a:masterClrMapping/>
+  </p:clrMapOvr>
+</p:sld>
+</file>
+
+<file path=ppt/slides/slide12.xml><?xml version="1.0" encoding="utf-8"?>
+<p:sld xmlns:a="http://schemas.openxmlformats.org/drawingml/2006/main" xmlns:r="http://schemas.openxmlformats.org/officeDocument/2006/relationships" xmlns:p="http://schemas.openxmlformats.org/presentationml/2006/main">
+  <p:cSld name="Slide 12">
     <p:bg>
       <p:bgPr>
         <a:solidFill>
@@ -5852,8 +6715,8 @@
         </p:nvSpPr>
         <p:spPr>
           <a:xfrm>
-            <a:off x="1097280" y="5138928"/>
-            <a:ext cx="9966960" cy="685800"/>
+            <a:off x="1097280" y="5120640"/>
+            <a:ext cx="9966960" cy="731520"/>
           </a:xfrm>
           <a:prstGeom prst="rect">
             <a:avLst/>
@@ -5867,12 +6730,12 @@
           <a:p>
             <a:pPr indent="0" marL="0">
               <a:lnSpc>
-                <a:spcPts val="2000"/>
+                <a:spcPts val="1900"/>
               </a:lnSpc>
               <a:buNone/>
             </a:pPr>
             <a:r>
-              <a:rPr lang="en-US" sz="1350" dirty="0">
+              <a:rPr lang="en-US" sz="1300" dirty="0">
                 <a:solidFill>
                   <a:srgbClr val="FFFFFF"/>
                 </a:solidFill>
@@ -5880,9 +6743,9 @@
                 <a:ea typeface="Calibri" pitchFamily="34" charset="-122"/>
                 <a:cs typeface="Calibri" pitchFamily="34" charset="-120"/>
               </a:rPr>
-              <a:t>Six age modes, ten to a hundred. Mode is derived from a verified age band, not chosen — it governs which mechanics are legal, what data may be collected, and which clinical guardrails apply.</a:t>
-            </a:r>
-            <a:endParaRPr lang="en-US" sz="1350" dirty="0"/>
+              <a:t>Four of the six age bands are working age — 18–39, 40–64 and 65–79, plus apprentices under 18. The band is derived, not chosen, and it changes the mechanics, the daily prompt cap and the clinical guardrails. It is not one programme with the age swapped.</a:t>
+            </a:r>
+            <a:endParaRPr lang="en-US" sz="1300" dirty="0"/>
           </a:p>
         </p:txBody>
       </p:sp>
@@ -7766,7 +8629,7 @@
                 <a:ea typeface="Arial" pitchFamily="34" charset="-122"/>
                 <a:cs typeface="Arial" pitchFamily="34" charset="-120"/>
               </a:rPr>
-              <a:t>COMMERCIALS</a:t>
+              <a:t>YOUR LEGAL, HR AND SECURITY TEAMS</a:t>
             </a:r>
             <a:endParaRPr lang="en-US" sz="1200" dirty="0"/>
           </a:p>
@@ -7797,7 +8660,7 @@
               <a:buNone/>
             </a:pPr>
             <a:r>
-              <a:rPr lang="en-US" sz="3800" b="1" dirty="0">
+              <a:rPr lang="en-US" sz="3600" b="1" dirty="0">
                 <a:solidFill>
                   <a:srgbClr val="102A43"/>
                 </a:solidFill>
@@ -7805,180 +8668,104 @@
                 <a:ea typeface="Cambria" pitchFamily="34" charset="-122"/>
                 <a:cs typeface="Cambria" pitchFamily="34" charset="-120"/>
               </a:rPr>
-              <a:t>From £2 per employee per month.</a:t>
-            </a:r>
-            <a:endParaRPr lang="en-US" sz="3800" dirty="0"/>
-          </a:p>
-        </p:txBody>
-      </p:sp>
-      <p:sp>
-        <p:nvSpPr>
-          <p:cNvPr id="5" name="Shape 3"/>
+              <a:t>Four things enforced. Four things open.</a:t>
+            </a:r>
+            <a:endParaRPr lang="en-US" sz="3600" dirty="0"/>
+          </a:p>
+        </p:txBody>
+      </p:sp>
+      <p:sp>
+        <p:nvSpPr>
+          <p:cNvPr id="5" name="Text 3"/>
+          <p:cNvSpPr txBox="1"/>
+          <p:nvPr/>
+        </p:nvSpPr>
+        <p:spPr>
+          <a:xfrm>
+            <a:off x="731520" y="2148840"/>
+            <a:ext cx="5166360" cy="274320"/>
+          </a:xfrm>
+          <a:prstGeom prst="rect">
+            <a:avLst/>
+          </a:prstGeom>
+          <a:noFill/>
+          <a:ln/>
+        </p:spPr>
+        <p:txBody>
+          <a:bodyPr wrap="square" lIns="0" tIns="0" rIns="0" bIns="0" rtlCol="0" anchor="ctr"/>
+          <a:lstStyle/>
+          <a:p>
+            <a:pPr indent="0" marL="0">
+              <a:buNone/>
+            </a:pPr>
+            <a:r>
+              <a:rPr lang="en-US" sz="1200" b="1" spc="200" kern="0" dirty="0">
+                <a:solidFill>
+                  <a:srgbClr val="00A99D"/>
+                </a:solidFill>
+                <a:latin typeface="Arial" pitchFamily="34" charset="0"/>
+                <a:ea typeface="Arial" pitchFamily="34" charset="-122"/>
+                <a:cs typeface="Arial" pitchFamily="34" charset="-120"/>
+              </a:rPr>
+              <a:t>Enforced in code and schema</a:t>
+            </a:r>
+            <a:endParaRPr lang="en-US" sz="1200" dirty="0"/>
+          </a:p>
+        </p:txBody>
+      </p:sp>
+      <p:sp>
+        <p:nvSpPr>
+          <p:cNvPr id="6" name="Text 4"/>
+          <p:cNvSpPr txBox="1"/>
+          <p:nvPr/>
+        </p:nvSpPr>
+        <p:spPr>
+          <a:xfrm>
+            <a:off x="6263640" y="2148840"/>
+            <a:ext cx="5166360" cy="274320"/>
+          </a:xfrm>
+          <a:prstGeom prst="rect">
+            <a:avLst/>
+          </a:prstGeom>
+          <a:noFill/>
+          <a:ln/>
+        </p:spPr>
+        <p:txBody>
+          <a:bodyPr wrap="square" lIns="0" tIns="0" rIns="0" bIns="0" rtlCol="0" anchor="ctr"/>
+          <a:lstStyle/>
+          <a:p>
+            <a:pPr indent="0" marL="0">
+              <a:buNone/>
+            </a:pPr>
+            <a:r>
+              <a:rPr lang="en-US" sz="1200" b="1" spc="200" kern="0" dirty="0">
+                <a:solidFill>
+                  <a:srgbClr val="FF6B5E"/>
+                </a:solidFill>
+                <a:latin typeface="Arial" pitchFamily="34" charset="0"/>
+                <a:ea typeface="Arial" pitchFamily="34" charset="-122"/>
+                <a:cs typeface="Arial" pitchFamily="34" charset="-120"/>
+              </a:rPr>
+              <a:t>Open, and named before you ask</a:t>
+            </a:r>
+            <a:endParaRPr lang="en-US" sz="1200" dirty="0"/>
+          </a:p>
+        </p:txBody>
+      </p:sp>
+      <p:sp>
+        <p:nvSpPr>
+          <p:cNvPr id="7" name="Shape 5"/>
           <p:cNvSpPr/>
           <p:nvPr/>
         </p:nvSpPr>
         <p:spPr>
           <a:xfrm>
-            <a:off x="731520" y="2194560"/>
-            <a:ext cx="5166360" cy="3200400"/>
+            <a:off x="731520" y="2514600"/>
+            <a:ext cx="5166360" cy="2971800"/>
           </a:xfrm>
           <a:prstGeom prst="roundRect">
             <a:avLst>
-              <a:gd name="adj" fmla="val 2286"/>
-            </a:avLst>
-          </a:prstGeom>
-          <a:solidFill>
-            <a:srgbClr val="102A43"/>
-          </a:solidFill>
-          <a:ln w="12700">
-            <a:solidFill>
-              <a:srgbClr val="102A43"/>
-            </a:solidFill>
-            <a:prstDash val="solid"/>
-          </a:ln>
-          <a:effectLst>
-            <a:outerShdw sx="100000" sy="100000" kx="0" ky="0" algn="bl" rotWithShape="0" blurRad="127000" dist="508" dir="5400000">
-              <a:srgbClr val="9AA8B4">
-                <a:alpha val="25000"/>
-              </a:srgbClr>
-            </a:outerShdw>
-          </a:effectLst>
-        </p:spPr>
-      </p:sp>
-      <p:sp>
-        <p:nvSpPr>
-          <p:cNvPr id="6" name="Text 4"/>
-          <p:cNvSpPr txBox="1"/>
-          <p:nvPr/>
-        </p:nvSpPr>
-        <p:spPr>
-          <a:xfrm>
-            <a:off x="1143000" y="2560320"/>
-            <a:ext cx="4114800" cy="914400"/>
-          </a:xfrm>
-          <a:prstGeom prst="rect">
-            <a:avLst/>
-          </a:prstGeom>
-          <a:noFill/>
-          <a:ln/>
-        </p:spPr>
-        <p:txBody>
-          <a:bodyPr wrap="square" lIns="0" tIns="0" rIns="0" bIns="0" rtlCol="0" anchor="ctr"/>
-          <a:lstStyle/>
-          <a:p>
-            <a:pPr indent="0" marL="0">
-              <a:buNone/>
-            </a:pPr>
-            <a:r>
-              <a:rPr lang="en-US" sz="5400" b="1" dirty="0">
-                <a:solidFill>
-                  <a:srgbClr val="B7E436"/>
-                </a:solidFill>
-                <a:latin typeface="Cambria" pitchFamily="34" charset="0"/>
-                <a:ea typeface="Cambria" pitchFamily="34" charset="-122"/>
-                <a:cs typeface="Cambria" pitchFamily="34" charset="-120"/>
-              </a:rPr>
-              <a:t>from £2</a:t>
-            </a:r>
-            <a:endParaRPr lang="en-US" sz="5400" dirty="0"/>
-          </a:p>
-        </p:txBody>
-      </p:sp>
-      <p:sp>
-        <p:nvSpPr>
-          <p:cNvPr id="7" name="Text 5"/>
-          <p:cNvSpPr txBox="1"/>
-          <p:nvPr/>
-        </p:nvSpPr>
-        <p:spPr>
-          <a:xfrm>
-            <a:off x="1143000" y="3520440"/>
-            <a:ext cx="4114800" cy="320040"/>
-          </a:xfrm>
-          <a:prstGeom prst="rect">
-            <a:avLst/>
-          </a:prstGeom>
-          <a:noFill/>
-          <a:ln/>
-        </p:spPr>
-        <p:txBody>
-          <a:bodyPr wrap="square" lIns="0" tIns="0" rIns="0" bIns="0" rtlCol="0" anchor="ctr"/>
-          <a:lstStyle/>
-          <a:p>
-            <a:pPr indent="0" marL="0">
-              <a:buNone/>
-            </a:pPr>
-            <a:r>
-              <a:rPr lang="en-US" sz="1400" dirty="0">
-                <a:solidFill>
-                  <a:srgbClr val="FFFFFF"/>
-                </a:solidFill>
-                <a:latin typeface="Calibri" pitchFamily="34" charset="0"/>
-                <a:ea typeface="Calibri" pitchFamily="34" charset="-122"/>
-                <a:cs typeface="Calibri" pitchFamily="34" charset="-120"/>
-              </a:rPr>
-              <a:t>per seat, per month</a:t>
-            </a:r>
-            <a:endParaRPr lang="en-US" sz="1400" dirty="0"/>
-          </a:p>
-        </p:txBody>
-      </p:sp>
-      <p:sp>
-        <p:nvSpPr>
-          <p:cNvPr id="8" name="Text 6"/>
-          <p:cNvSpPr txBox="1"/>
-          <p:nvPr/>
-        </p:nvSpPr>
-        <p:spPr>
-          <a:xfrm>
-            <a:off x="1143000" y="4023360"/>
-            <a:ext cx="4343400" cy="1097280"/>
-          </a:xfrm>
-          <a:prstGeom prst="rect">
-            <a:avLst/>
-          </a:prstGeom>
-          <a:noFill/>
-          <a:ln/>
-        </p:spPr>
-        <p:txBody>
-          <a:bodyPr wrap="square" lIns="0" tIns="0" rIns="0" bIns="0" rtlCol="0" anchor="ctr"/>
-          <a:lstStyle/>
-          <a:p>
-            <a:pPr indent="0" marL="0">
-              <a:lnSpc>
-                <a:spcPts val="1900"/>
-              </a:lnSpc>
-              <a:buNone/>
-            </a:pPr>
-            <a:r>
-              <a:rPr lang="en-US" sz="1250" dirty="0">
-                <a:solidFill>
-                  <a:srgbClr val="B8C6D1"/>
-                </a:solidFill>
-                <a:latin typeface="Calibri" pitchFamily="34" charset="0"/>
-                <a:ea typeface="Calibri" pitchFamily="34" charset="-122"/>
-                <a:cs typeface="Calibri" pitchFamily="34" charset="-120"/>
-              </a:rPr>
-              <a:t>The floor, not a teaser. Up to £5 depending on sector, seat count and support level. Organisation deals are contracts, so the figure is agreed rather than picked at a checkout.</a:t>
-            </a:r>
-            <a:endParaRPr lang="en-US" sz="1250" dirty="0"/>
-          </a:p>
-        </p:txBody>
-      </p:sp>
-      <p:sp>
-        <p:nvSpPr>
-          <p:cNvPr id="9" name="Shape 7"/>
-          <p:cNvSpPr/>
-          <p:nvPr/>
-        </p:nvSpPr>
-        <p:spPr>
-          <a:xfrm>
-            <a:off x="6263640" y="2194560"/>
-            <a:ext cx="5166360" cy="621792"/>
-          </a:xfrm>
-          <a:prstGeom prst="roundRect">
-            <a:avLst>
-              <a:gd name="adj" fmla="val 11765"/>
+              <a:gd name="adj" fmla="val 2462"/>
             </a:avLst>
           </a:prstGeom>
           <a:solidFill>
@@ -8001,66 +8788,34 @@
       </p:sp>
       <p:sp>
         <p:nvSpPr>
-          <p:cNvPr id="10" name="Text 8"/>
-          <p:cNvSpPr txBox="1"/>
-          <p:nvPr/>
-        </p:nvSpPr>
-        <p:spPr>
-          <a:xfrm>
-            <a:off x="6583680" y="2304288"/>
-            <a:ext cx="4572000" cy="274320"/>
-          </a:xfrm>
-          <a:prstGeom prst="rect">
-            <a:avLst/>
-          </a:prstGeom>
-          <a:noFill/>
-          <a:ln/>
-        </p:spPr>
-        <p:txBody>
-          <a:bodyPr wrap="square" lIns="0" tIns="0" rIns="0" bIns="0" rtlCol="0" anchor="ctr"/>
-          <a:lstStyle/>
-          <a:p>
-            <a:pPr indent="0" marL="0">
-              <a:buNone/>
-            </a:pPr>
-            <a:r>
-              <a:rPr lang="en-US" sz="1300" b="1" dirty="0">
-                <a:solidFill>
-                  <a:srgbClr val="102A43"/>
-                </a:solidFill>
-                <a:latin typeface="Arial" pitchFamily="34" charset="0"/>
-                <a:ea typeface="Arial" pitchFamily="34" charset="-122"/>
-                <a:cs typeface="Arial" pitchFamily="34" charset="-120"/>
-              </a:rPr>
-              <a:t>Minimum 10 seats</a:t>
-            </a:r>
-            <a:endParaRPr lang="en-US" sz="1300" dirty="0"/>
-          </a:p>
-        </p:txBody>
-      </p:sp>
-      <p:sp>
-        <p:nvSpPr>
-          <p:cNvPr id="11" name="Text 9"/>
-          <p:cNvSpPr txBox="1"/>
-          <p:nvPr/>
-        </p:nvSpPr>
-        <p:spPr>
-          <a:xfrm>
-            <a:off x="6583680" y="2578608"/>
-            <a:ext cx="4572000" cy="274320"/>
-          </a:xfrm>
-          <a:prstGeom prst="rect">
-            <a:avLst/>
-          </a:prstGeom>
-          <a:noFill/>
-          <a:ln/>
-        </p:spPr>
-        <p:txBody>
-          <a:bodyPr wrap="square" lIns="0" tIns="0" rIns="0" bIns="0" rtlCol="0" anchor="ctr"/>
-          <a:lstStyle/>
-          <a:p>
-            <a:pPr indent="0" marL="0">
-              <a:buNone/>
+          <p:cNvPr id="8" name="Text 6"/>
+          <p:cNvSpPr txBox="1"/>
+          <p:nvPr/>
+        </p:nvSpPr>
+        <p:spPr>
+          <a:xfrm>
+            <a:off x="1097280" y="2743200"/>
+            <a:ext cx="4434840" cy="2560320"/>
+          </a:xfrm>
+          <a:prstGeom prst="rect">
+            <a:avLst/>
+          </a:prstGeom>
+          <a:noFill/>
+          <a:ln/>
+        </p:spPr>
+        <p:txBody>
+          <a:bodyPr wrap="square" lIns="0" tIns="0" rIns="0" bIns="0" rtlCol="0" anchor="t"/>
+          <a:lstStyle/>
+          <a:p>
+            <a:pPr marL="342900" indent="-342900">
+              <a:lnSpc>
+                <a:spcPts val="1600"/>
+              </a:lnSpc>
+              <a:spcAft>
+                <a:spcPts val="900"/>
+              </a:spcAft>
+              <a:buSzPct val="100000"/>
+              <a:buChar char="•"/>
             </a:pPr>
             <a:r>
               <a:rPr lang="en-US" sz="1150" dirty="0">
@@ -8071,26 +8826,95 @@
                 <a:ea typeface="Calibri" pitchFamily="34" charset="-122"/>
                 <a:cs typeface="Calibri" pitchFamily="34" charset="-120"/>
               </a:rPr>
-              <a:t>And a minimum annual contract.</a:t>
+              <a:t>A declared condition is stored as a catalogue identifier. No severity, no dates, no medication, no free text.</a:t>
             </a:r>
             <a:endParaRPr lang="en-US" sz="1150" dirty="0"/>
           </a:p>
-        </p:txBody>
-      </p:sp>
-      <p:sp>
-        <p:nvSpPr>
-          <p:cNvPr id="12" name="Shape 10"/>
+          <a:p>
+            <a:pPr marL="342900" indent="-342900">
+              <a:lnSpc>
+                <a:spcPts val="1600"/>
+              </a:lnSpc>
+              <a:spcAft>
+                <a:spcPts val="900"/>
+              </a:spcAft>
+              <a:buSzPct val="100000"/>
+              <a:buChar char="•"/>
+            </a:pPr>
+            <a:r>
+              <a:rPr lang="en-US" sz="1150" dirty="0">
+                <a:solidFill>
+                  <a:srgbClr val="475663"/>
+                </a:solidFill>
+                <a:latin typeface="Calibri" pitchFamily="34" charset="0"/>
+                <a:ea typeface="Calibri" pitchFamily="34" charset="-122"/>
+                <a:cs typeface="Calibri" pitchFamily="34" charset="-120"/>
+              </a:rPr>
+              <a:t>Deleting an account cascades in the database from the user row — a guarantee, not a callback somebody has to remember.</a:t>
+            </a:r>
+            <a:endParaRPr lang="en-US" sz="1150" dirty="0"/>
+          </a:p>
+          <a:p>
+            <a:pPr marL="342900" indent="-342900">
+              <a:lnSpc>
+                <a:spcPts val="1600"/>
+              </a:lnSpc>
+              <a:spcAft>
+                <a:spcPts val="900"/>
+              </a:spcAft>
+              <a:buSzPct val="100000"/>
+              <a:buChar char="•"/>
+            </a:pPr>
+            <a:r>
+              <a:rPr lang="en-US" sz="1150" dirty="0">
+                <a:solidFill>
+                  <a:srgbClr val="475663"/>
+                </a:solidFill>
+                <a:latin typeface="Calibri" pitchFamily="34" charset="0"/>
+                <a:ea typeface="Calibri" pitchFamily="34" charset="-122"/>
+                <a:cs typeface="Calibri" pitchFamily="34" charset="-120"/>
+              </a:rPr>
+              <a:t>Health data never reaches an organisation view at any cohort size. A test asserts that no module outside the conditions service touches that table.</a:t>
+            </a:r>
+            <a:endParaRPr lang="en-US" sz="1150" dirty="0"/>
+          </a:p>
+          <a:p>
+            <a:pPr marL="342900" indent="-342900">
+              <a:lnSpc>
+                <a:spcPts val="1600"/>
+              </a:lnSpc>
+              <a:buSzPct val="100000"/>
+              <a:buChar char="•"/>
+            </a:pPr>
+            <a:r>
+              <a:rPr lang="en-US" sz="1150" dirty="0">
+                <a:solidFill>
+                  <a:srgbClr val="475663"/>
+                </a:solidFill>
+                <a:latin typeface="Calibri" pitchFamily="34" charset="0"/>
+                <a:ea typeface="Calibri" pitchFamily="34" charset="-122"/>
+                <a:cs typeface="Calibri" pitchFamily="34" charset="-120"/>
+              </a:rPr>
+              <a:t>Analytics identifiers are hashed on arrival with a salt regenerated daily, and never outlive the request.</a:t>
+            </a:r>
+            <a:endParaRPr lang="en-US" sz="1150" dirty="0"/>
+          </a:p>
+        </p:txBody>
+      </p:sp>
+      <p:sp>
+        <p:nvSpPr>
+          <p:cNvPr id="9" name="Shape 7"/>
           <p:cNvSpPr/>
           <p:nvPr/>
         </p:nvSpPr>
         <p:spPr>
           <a:xfrm>
-            <a:off x="6263640" y="3063240"/>
-            <a:ext cx="5166360" cy="621792"/>
+            <a:off x="6263640" y="2514600"/>
+            <a:ext cx="5166360" cy="2971800"/>
           </a:xfrm>
           <a:prstGeom prst="roundRect">
             <a:avLst>
-              <a:gd name="adj" fmla="val 11765"/>
+              <a:gd name="adj" fmla="val 2462"/>
             </a:avLst>
           </a:prstGeom>
           <a:solidFill>
@@ -8113,66 +8937,34 @@
       </p:sp>
       <p:sp>
         <p:nvSpPr>
-          <p:cNvPr id="13" name="Text 11"/>
-          <p:cNvSpPr txBox="1"/>
-          <p:nvPr/>
-        </p:nvSpPr>
-        <p:spPr>
-          <a:xfrm>
-            <a:off x="6583680" y="3172968"/>
-            <a:ext cx="4572000" cy="274320"/>
-          </a:xfrm>
-          <a:prstGeom prst="rect">
-            <a:avLst/>
-          </a:prstGeom>
-          <a:noFill/>
-          <a:ln/>
-        </p:spPr>
-        <p:txBody>
-          <a:bodyPr wrap="square" lIns="0" tIns="0" rIns="0" bIns="0" rtlCol="0" anchor="ctr"/>
-          <a:lstStyle/>
-          <a:p>
-            <a:pPr indent="0" marL="0">
-              <a:buNone/>
-            </a:pPr>
-            <a:r>
-              <a:rPr lang="en-US" sz="1300" b="1" dirty="0">
-                <a:solidFill>
-                  <a:srgbClr val="102A43"/>
-                </a:solidFill>
-                <a:latin typeface="Arial" pitchFamily="34" charset="0"/>
-                <a:ea typeface="Arial" pitchFamily="34" charset="-122"/>
-                <a:cs typeface="Arial" pitchFamily="34" charset="-120"/>
-              </a:rPr>
-              <a:t>Challenge builder and campaigns</a:t>
-            </a:r>
-            <a:endParaRPr lang="en-US" sz="1300" dirty="0"/>
-          </a:p>
-        </p:txBody>
-      </p:sp>
-      <p:sp>
-        <p:nvSpPr>
-          <p:cNvPr id="14" name="Text 12"/>
-          <p:cNvSpPr txBox="1"/>
-          <p:nvPr/>
-        </p:nvSpPr>
-        <p:spPr>
-          <a:xfrm>
-            <a:off x="6583680" y="3447288"/>
-            <a:ext cx="4572000" cy="274320"/>
-          </a:xfrm>
-          <a:prstGeom prst="rect">
-            <a:avLst/>
-          </a:prstGeom>
-          <a:noFill/>
-          <a:ln/>
-        </p:spPr>
-        <p:txBody>
-          <a:bodyPr wrap="square" lIns="0" tIns="0" rIns="0" bIns="0" rtlCol="0" anchor="ctr"/>
-          <a:lstStyle/>
-          <a:p>
-            <a:pPr indent="0" marL="0">
-              <a:buNone/>
+          <p:cNvPr id="10" name="Text 8"/>
+          <p:cNvSpPr txBox="1"/>
+          <p:nvPr/>
+        </p:nvSpPr>
+        <p:spPr>
+          <a:xfrm>
+            <a:off x="6629400" y="2743200"/>
+            <a:ext cx="4434840" cy="2560320"/>
+          </a:xfrm>
+          <a:prstGeom prst="rect">
+            <a:avLst/>
+          </a:prstGeom>
+          <a:noFill/>
+          <a:ln/>
+        </p:spPr>
+        <p:txBody>
+          <a:bodyPr wrap="square" lIns="0" tIns="0" rIns="0" bIns="0" rtlCol="0" anchor="t"/>
+          <a:lstStyle/>
+          <a:p>
+            <a:pPr marL="342900" indent="-342900">
+              <a:lnSpc>
+                <a:spcPts val="1600"/>
+              </a:lnSpc>
+              <a:spcAft>
+                <a:spcPts val="900"/>
+              </a:spcAft>
+              <a:buSzPct val="100000"/>
+              <a:buChar char="•"/>
             </a:pPr>
             <a:r>
               <a:rPr lang="en-US" sz="1150" dirty="0">
@@ -8183,108 +8975,20 @@
                 <a:ea typeface="Calibri" pitchFamily="34" charset="-122"/>
                 <a:cs typeface="Calibri" pitchFamily="34" charset="-120"/>
               </a:rPr>
-              <a:t>Branded to your organisation.</a:t>
+              <a:t>No external WCAG 2.2 AA audit and no VPAT. Accessibility is designed for and tested in places, not certified.</a:t>
             </a:r>
             <a:endParaRPr lang="en-US" sz="1150" dirty="0"/>
           </a:p>
-        </p:txBody>
-      </p:sp>
-      <p:sp>
-        <p:nvSpPr>
-          <p:cNvPr id="15" name="Shape 13"/>
-          <p:cNvSpPr/>
-          <p:nvPr/>
-        </p:nvSpPr>
-        <p:spPr>
-          <a:xfrm>
-            <a:off x="6263640" y="3931920"/>
-            <a:ext cx="5166360" cy="621792"/>
-          </a:xfrm>
-          <a:prstGeom prst="roundRect">
-            <a:avLst>
-              <a:gd name="adj" fmla="val 11765"/>
-            </a:avLst>
-          </a:prstGeom>
-          <a:solidFill>
-            <a:srgbClr val="F4F7F9"/>
-          </a:solidFill>
-          <a:ln w="12700">
-            <a:solidFill>
-              <a:srgbClr val="F4F7F9"/>
-            </a:solidFill>
-            <a:prstDash val="solid"/>
-          </a:ln>
-          <a:effectLst>
-            <a:outerShdw sx="100000" sy="100000" kx="0" ky="0" algn="bl" rotWithShape="0" blurRad="127000" dist="508" dir="5400000">
-              <a:srgbClr val="9AA8B4">
-                <a:alpha val="25000"/>
-              </a:srgbClr>
-            </a:outerShdw>
-          </a:effectLst>
-        </p:spPr>
-      </p:sp>
-      <p:sp>
-        <p:nvSpPr>
-          <p:cNvPr id="16" name="Text 14"/>
-          <p:cNvSpPr txBox="1"/>
-          <p:nvPr/>
-        </p:nvSpPr>
-        <p:spPr>
-          <a:xfrm>
-            <a:off x="6583680" y="4041648"/>
-            <a:ext cx="4572000" cy="274320"/>
-          </a:xfrm>
-          <a:prstGeom prst="rect">
-            <a:avLst/>
-          </a:prstGeom>
-          <a:noFill/>
-          <a:ln/>
-        </p:spPr>
-        <p:txBody>
-          <a:bodyPr wrap="square" lIns="0" tIns="0" rIns="0" bIns="0" rtlCol="0" anchor="ctr"/>
-          <a:lstStyle/>
-          <a:p>
-            <a:pPr indent="0" marL="0">
-              <a:buNone/>
-            </a:pPr>
-            <a:r>
-              <a:rPr lang="en-US" sz="1300" b="1" dirty="0">
-                <a:solidFill>
-                  <a:srgbClr val="102A43"/>
-                </a:solidFill>
-                <a:latin typeface="Arial" pitchFamily="34" charset="0"/>
-                <a:ea typeface="Arial" pitchFamily="34" charset="-122"/>
-                <a:cs typeface="Arial" pitchFamily="34" charset="-120"/>
-              </a:rPr>
-              <a:t>Setup and integration support</a:t>
-            </a:r>
-            <a:endParaRPr lang="en-US" sz="1300" dirty="0"/>
-          </a:p>
-        </p:txBody>
-      </p:sp>
-      <p:sp>
-        <p:nvSpPr>
-          <p:cNvPr id="17" name="Text 15"/>
-          <p:cNvSpPr txBox="1"/>
-          <p:nvPr/>
-        </p:nvSpPr>
-        <p:spPr>
-          <a:xfrm>
-            <a:off x="6583680" y="4315968"/>
-            <a:ext cx="4572000" cy="274320"/>
-          </a:xfrm>
-          <a:prstGeom prst="rect">
-            <a:avLst/>
-          </a:prstGeom>
-          <a:noFill/>
-          <a:ln/>
-        </p:spPr>
-        <p:txBody>
-          <a:bodyPr wrap="square" lIns="0" tIns="0" rIns="0" bIns="0" rtlCol="0" anchor="ctr"/>
-          <a:lstStyle/>
-          <a:p>
-            <a:pPr indent="0" marL="0">
-              <a:buNone/>
+          <a:p>
+            <a:pPr marL="342900" indent="-342900">
+              <a:lnSpc>
+                <a:spcPts val="1600"/>
+              </a:lnSpc>
+              <a:spcAft>
+                <a:spcPts val="900"/>
+              </a:spcAft>
+              <a:buSzPct val="100000"/>
+              <a:buChar char="•"/>
             </a:pPr>
             <a:r>
               <a:rPr lang="en-US" sz="1150" dirty="0">
@@ -8295,108 +8999,20 @@
                 <a:ea typeface="Calibri" pitchFamily="34" charset="-122"/>
                 <a:cs typeface="Calibri" pitchFamily="34" charset="-120"/>
               </a:rPr>
-              <a:t>Included in every contract.</a:t>
+              <a:t>Age is self-declared. Ofcom’s position is that self-declaration is not highly effective age assurance.</a:t>
             </a:r>
             <a:endParaRPr lang="en-US" sz="1150" dirty="0"/>
           </a:p>
-        </p:txBody>
-      </p:sp>
-      <p:sp>
-        <p:nvSpPr>
-          <p:cNvPr id="18" name="Shape 16"/>
-          <p:cNvSpPr/>
-          <p:nvPr/>
-        </p:nvSpPr>
-        <p:spPr>
-          <a:xfrm>
-            <a:off x="6263640" y="4800600"/>
-            <a:ext cx="5166360" cy="621792"/>
-          </a:xfrm>
-          <a:prstGeom prst="roundRect">
-            <a:avLst>
-              <a:gd name="adj" fmla="val 11765"/>
-            </a:avLst>
-          </a:prstGeom>
-          <a:solidFill>
-            <a:srgbClr val="F4F7F9"/>
-          </a:solidFill>
-          <a:ln w="12700">
-            <a:solidFill>
-              <a:srgbClr val="F4F7F9"/>
-            </a:solidFill>
-            <a:prstDash val="solid"/>
-          </a:ln>
-          <a:effectLst>
-            <a:outerShdw sx="100000" sy="100000" kx="0" ky="0" algn="bl" rotWithShape="0" blurRad="127000" dist="508" dir="5400000">
-              <a:srgbClr val="9AA8B4">
-                <a:alpha val="25000"/>
-              </a:srgbClr>
-            </a:outerShdw>
-          </a:effectLst>
-        </p:spPr>
-      </p:sp>
-      <p:sp>
-        <p:nvSpPr>
-          <p:cNvPr id="19" name="Text 17"/>
-          <p:cNvSpPr txBox="1"/>
-          <p:nvPr/>
-        </p:nvSpPr>
-        <p:spPr>
-          <a:xfrm>
-            <a:off x="6583680" y="4910328"/>
-            <a:ext cx="4572000" cy="274320"/>
-          </a:xfrm>
-          <a:prstGeom prst="rect">
-            <a:avLst/>
-          </a:prstGeom>
-          <a:noFill/>
-          <a:ln/>
-        </p:spPr>
-        <p:txBody>
-          <a:bodyPr wrap="square" lIns="0" tIns="0" rIns="0" bIns="0" rtlCol="0" anchor="ctr"/>
-          <a:lstStyle/>
-          <a:p>
-            <a:pPr indent="0" marL="0">
-              <a:buNone/>
-            </a:pPr>
-            <a:r>
-              <a:rPr lang="en-US" sz="1300" b="1" dirty="0">
-                <a:solidFill>
-                  <a:srgbClr val="102A43"/>
-                </a:solidFill>
-                <a:latin typeface="Arial" pitchFamily="34" charset="0"/>
-                <a:ea typeface="Arial" pitchFamily="34" charset="-122"/>
-                <a:cs typeface="Arial" pitchFamily="34" charset="-120"/>
-              </a:rPr>
-              <a:t>Single sign-on and directory sync</a:t>
-            </a:r>
-            <a:endParaRPr lang="en-US" sz="1300" dirty="0"/>
-          </a:p>
-        </p:txBody>
-      </p:sp>
-      <p:sp>
-        <p:nvSpPr>
-          <p:cNvPr id="20" name="Text 18"/>
-          <p:cNvSpPr txBox="1"/>
-          <p:nvPr/>
-        </p:nvSpPr>
-        <p:spPr>
-          <a:xfrm>
-            <a:off x="6583680" y="5184648"/>
-            <a:ext cx="4572000" cy="274320"/>
-          </a:xfrm>
-          <a:prstGeom prst="rect">
-            <a:avLst/>
-          </a:prstGeom>
-          <a:noFill/>
-          <a:ln/>
-        </p:spPr>
-        <p:txBody>
-          <a:bodyPr wrap="square" lIns="0" tIns="0" rIns="0" bIns="0" rtlCol="0" anchor="ctr"/>
-          <a:lstStyle/>
-          <a:p>
-            <a:pPr indent="0" marL="0">
-              <a:buNone/>
+          <a:p>
+            <a:pPr marL="342900" indent="-342900">
+              <a:lnSpc>
+                <a:spcPts val="1600"/>
+              </a:lnSpc>
+              <a:spcAft>
+                <a:spcPts val="900"/>
+              </a:spcAft>
+              <a:buSzPct val="100000"/>
+              <a:buChar char="•"/>
             </a:pPr>
             <a:r>
               <a:rPr lang="en-US" sz="1150" dirty="0">
@@ -8407,51 +9023,72 @@
                 <a:ea typeface="Calibri" pitchFamily="34" charset="-122"/>
                 <a:cs typeface="Calibri" pitchFamily="34" charset="-120"/>
               </a:rPr>
-              <a:t>Contracted, not yet built. Delivered inside the pilot.</a:t>
+              <a:t>A member can read their whole record through their own endpoints, but there is no one-click export archive yet.</a:t>
             </a:r>
             <a:endParaRPr lang="en-US" sz="1150" dirty="0"/>
           </a:p>
-        </p:txBody>
-      </p:sp>
-      <p:sp>
-        <p:nvSpPr>
-          <p:cNvPr id="21" name="Text 19"/>
-          <p:cNvSpPr txBox="1"/>
-          <p:nvPr/>
-        </p:nvSpPr>
-        <p:spPr>
-          <a:xfrm>
-            <a:off x="731520" y="5623560"/>
-            <a:ext cx="10698480" cy="548640"/>
-          </a:xfrm>
-          <a:prstGeom prst="rect">
-            <a:avLst/>
-          </a:prstGeom>
-          <a:noFill/>
-          <a:ln/>
-        </p:spPr>
-        <p:txBody>
-          <a:bodyPr wrap="square" lIns="0" tIns="0" rIns="0" bIns="0" rtlCol="0" anchor="ctr"/>
-          <a:lstStyle/>
-          <a:p>
-            <a:pPr indent="0" marL="0">
+          <a:p>
+            <a:pPr marL="342900" indent="-342900">
               <a:lnSpc>
-                <a:spcPts val="1900"/>
+                <a:spcPts val="1600"/>
               </a:lnSpc>
-              <a:buNone/>
-            </a:pPr>
-            <a:r>
-              <a:rPr lang="en-US" sz="1300" i="1" dirty="0">
-                <a:solidFill>
-                  <a:srgbClr val="00A99D"/>
+              <a:buSzPct val="100000"/>
+              <a:buChar char="•"/>
+            </a:pPr>
+            <a:r>
+              <a:rPr lang="en-US" sz="1150" dirty="0">
+                <a:solidFill>
+                  <a:srgbClr val="475663"/>
                 </a:solidFill>
                 <a:latin typeface="Calibri" pitchFamily="34" charset="0"/>
                 <a:ea typeface="Calibri" pitchFamily="34" charset="-122"/>
                 <a:cs typeface="Calibri" pitchFamily="34" charset="-120"/>
               </a:rPr>
-              <a:t>Design partners are priced at the floor for the first year, in exchange for feedback and a reference once there is something real to reference.</a:t>
-            </a:r>
-            <a:endParaRPr lang="en-US" sz="1300" dirty="0"/>
+              <a:t>The Clinical Safety Officer appointment record is incomplete against DCB0129, and the hazard log says so itself.</a:t>
+            </a:r>
+            <a:endParaRPr lang="en-US" sz="1150" dirty="0"/>
+          </a:p>
+        </p:txBody>
+      </p:sp>
+      <p:sp>
+        <p:nvSpPr>
+          <p:cNvPr id="11" name="Text 9"/>
+          <p:cNvSpPr txBox="1"/>
+          <p:nvPr/>
+        </p:nvSpPr>
+        <p:spPr>
+          <a:xfrm>
+            <a:off x="731520" y="5715000"/>
+            <a:ext cx="10698480" cy="640080"/>
+          </a:xfrm>
+          <a:prstGeom prst="rect">
+            <a:avLst/>
+          </a:prstGeom>
+          <a:noFill/>
+          <a:ln/>
+        </p:spPr>
+        <p:txBody>
+          <a:bodyPr wrap="square" lIns="0" tIns="0" rIns="0" bIns="0" rtlCol="0" anchor="ctr"/>
+          <a:lstStyle/>
+          <a:p>
+            <a:pPr indent="0" marL="0">
+              <a:lnSpc>
+                <a:spcPts val="1800"/>
+              </a:lnSpc>
+              <a:buNone/>
+            </a:pPr>
+            <a:r>
+              <a:rPr lang="en-US" sz="1250" i="1" dirty="0">
+                <a:solidFill>
+                  <a:srgbClr val="475663"/>
+                </a:solidFill>
+                <a:latin typeface="Calibri" pitchFamily="34" charset="0"/>
+                <a:ea typeface="Calibri" pitchFamily="34" charset="-122"/>
+                <a:cs typeface="Calibri" pitchFamily="34" charset="-120"/>
+              </a:rPr>
+              <a:t>The right-hand column is not a list we were pushed into. It is what GET /api/assurance returns when anybody calls it, with the gaps lifted to the top of the response rather than left to be found area by area.</a:t>
+            </a:r>
+            <a:endParaRPr lang="en-US" sz="1250" dirty="0"/>
           </a:p>
         </p:txBody>
       </p:sp>

--- a/docs/sales/JESS-MOVE-for-organisations.pptx
+++ b/docs/sales/JESS-MOVE-for-organisations.pptx
@@ -513,7 +513,7 @@
           <a:p>
             <a:r>
               <a:rPr lang="en-US" dirty="0"/>
-              <a:t>Open by naming the status honestly: we are pre-launch and choosing a small number of design partners. That is the offer, not a weakness to hide.</a:t>
+              <a:t>Three constraints, not three features. Say them in order and stop — the next slide proves the first one. Do not open by explaining that we are pre-launch; that lands on slide nine as the terms of a deal, not as an apology.</a:t>
             </a:r>
             <a:endParaRPr lang="en-US" dirty="0"/>
           </a:p>
@@ -601,7 +601,7 @@
           <a:p>
             <a:r>
               <a:rPr lang="en-US" dirty="0"/>
-              <a:t>The design-partner discount buys feedback and a future reference. Do not promise a testimonial before there is a result to describe.</a:t>
+              <a:t>At ten seats this is a £20 invoice, which is why the ten-seat minimum exists rather than being a sales preference. If they push on price, push back with the twelve-week exit instead of discounting.</a:t>
             </a:r>
             <a:endParaRPr lang="en-US" dirty="0"/>
           </a:p>
@@ -689,7 +689,7 @@
           <a:p>
             <a:r>
               <a:rPr lang="en-US" dirty="0"/>
-              <a:t>Twelve weeks is short enough to approve without a procurement cycle and long enough to see whether behaviour changed.</a:t>
+              <a:t>Twelve weeks is short enough to approve without a procurement cycle and long enough to see whether behaviour changed. The exit clause is what makes it a small decision — lead with it if they hesitate.</a:t>
             </a:r>
             <a:endParaRPr lang="en-US" dirty="0"/>
           </a:p>
@@ -777,7 +777,7 @@
           <a:p>
             <a:r>
               <a:rPr lang="en-US" dirty="0"/>
-              <a:t>Close on the clinical boundary. It signals seriousness to a health-adjacent buyer rather than reading as a disclaimer.</a:t>
+              <a:t>Close on the ask, not on the product. The clinical boundary stays on the slide because it signals seriousness to a health-adjacent buyer rather than reading as a disclaimer.</a:t>
             </a:r>
             <a:endParaRPr lang="en-US" dirty="0"/>
           </a:p>
@@ -865,7 +865,7 @@
           <a:p>
             <a:r>
               <a:rPr lang="en-US" dirty="0"/>
-              <a:t>Lead with this. A buyer who discovers later that you have no customers stops trusting everything else you said.</a:t>
+              <a:t>This slide wins or loses the room. Every competitor answers this question with a policy; we answer it with a missing field. Offer to let their engineers verify it live before you move on.</a:t>
             </a:r>
             <a:endParaRPr lang="en-US" dirty="0"/>
           </a:p>
@@ -953,7 +953,7 @@
           <a:p>
             <a:r>
               <a:rPr lang="en-US" dirty="0"/>
-              <a:t>No borrowed statistics. Every number in this deck is from our own system; the problem is stated as something the buyer already recognises.</a:t>
+              <a:t>Let them recognise their own last purchase in one of these three cards, then make the architecture point. No borrowed industry statistics — every number in this deck is ours.</a:t>
             </a:r>
             <a:endParaRPr lang="en-US" dirty="0"/>
           </a:p>
@@ -1041,7 +1041,7 @@
           <a:p>
             <a:r>
               <a:rPr lang="en-US" dirty="0"/>
-              <a:t>This is the slide that wins or loses the security review. Offer to let their engineers verify it against the public API in the meeting.</a:t>
+              <a:t>Calendar titles carry client names, medical appointments and disciplinary meetings. This is the slide for the works council, the union and anybody who has been burned by a badge-and-app rollout.</a:t>
             </a:r>
             <a:endParaRPr lang="en-US" dirty="0"/>
           </a:p>
@@ -1129,7 +1129,7 @@
           <a:p>
             <a:r>
               <a:rPr lang="en-US" dirty="0"/>
-              <a:t>For a workforce that spans apprentices to people working past 65, this is usually the differentiator that matters most. Most step-count programmes are designed for the 18-39 band; 40-64 is where sedentary risk actually bites and it is usually a large part of the payroll.</a:t>
+              <a:t>For a workforce spanning apprentices to people working past 65, this is usually the differentiator that decides it. Most step-count programmes are designed for the 18-39 band; 40-64 is where sedentary risk actually bites and it is usually a large part of the payroll.</a:t>
             </a:r>
             <a:endParaRPr lang="en-US" dirty="0"/>
           </a:p>
@@ -1217,7 +1217,7 @@
           <a:p>
             <a:r>
               <a:rPr lang="en-US" dirty="0"/>
-              <a:t>Titles contain client names, medical appointments and disciplinary meetings. This is the slide for the works council or the union.</a:t>
+              <a:t>Never let the right-hand column be heard as shipped. Say the words: these four are not built, and a design partner decides the order. Then say the small-organisation limitation out loud — a buyer who finds it after signing feels sold to.</a:t>
             </a:r>
             <a:endParaRPr lang="en-US" dirty="0"/>
           </a:p>
@@ -1305,7 +1305,7 @@
           <a:p>
             <a:r>
               <a:rPr lang="en-US" dirty="0"/>
-              <a:t>Do not let the right-hand column be read as shipped. Say the words: these four are not built, and a design partner decides which comes first. Also say the small-organisation limitation out loud — a buyer who finds it after signing feels sold to.</a:t>
+              <a:t>Offer to run these live, on their laptop, in the meeting. It turns a trust conversation into a demonstration and almost no vendor in this category can do it. GET /api/system is a fifth if they want the platform invariants in one response.</a:t>
             </a:r>
             <a:endParaRPr lang="en-US" dirty="0"/>
           </a:p>
@@ -1393,7 +1393,7 @@
           <a:p>
             <a:r>
               <a:rPr lang="en-US" dirty="0"/>
-              <a:t>Offer to run these live. It converts a trust conversation into a demonstration, and very few vendors can do it. GET /api/system is a fifth if they want the platform invariants — age modes, delivery tiers, required variants — in one response.</a:t>
+              <a:t>Hand this to their security lead early rather than defending it late. Closest gap to closing is the export archive — the data is already readable through the member endpoints and needs an archive wrapped around them. On the age gap: it bites a school far harder than an employer, and it is listed rather than argued away for exactly that reason.</a:t>
             </a:r>
             <a:endParaRPr lang="en-US" dirty="0"/>
           </a:p>
@@ -1481,7 +1481,7 @@
           <a:p>
             <a:r>
               <a:rPr lang="en-US" dirty="0"/>
-              <a:t>Hand this slide to their security lead early rather than defending it late. If they ask which gap is closest to closing, the export archive — the data is already readable through the member endpoints, it needs an archive endpoint around them. If they ask about the age gap, say it bites a school far harder than an employer, and that it is listed rather than argued away for that reason.</a:t>
+              <a:t>This is the close, eight slides early. Do not promise a testimonial before there is a result to describe — the exchange is feedback now and a reference later, and only if it worked. The week-twelve exit is the line that gets this approved without a procurement cycle.</a:t>
             </a:r>
             <a:endParaRPr lang="en-US" dirty="0"/>
           </a:p>
@@ -1862,7 +1862,7 @@
         </p:nvSpPr>
         <p:spPr>
           <a:xfrm>
-            <a:off x="731520" y="1691640"/>
+            <a:off x="731520" y="1234440"/>
             <a:ext cx="201168" cy="201168"/>
           </a:xfrm>
           <a:prstGeom prst="ellipse">
@@ -1882,7 +1882,7 @@
         </p:nvSpPr>
         <p:spPr>
           <a:xfrm>
-            <a:off x="1078992" y="1627632"/>
+            <a:off x="1078992" y="1170432"/>
             <a:ext cx="7315200" cy="365760"/>
           </a:xfrm>
           <a:prstGeom prst="rect">
@@ -1921,8 +1921,8 @@
         </p:nvSpPr>
         <p:spPr>
           <a:xfrm>
-            <a:off x="731520" y="2194560"/>
-            <a:ext cx="8778240" cy="2011680"/>
+            <a:off x="731520" y="1783080"/>
+            <a:ext cx="8778240" cy="2834640"/>
           </a:xfrm>
           <a:prstGeom prst="rect">
             <a:avLst/>
@@ -1936,12 +1936,12 @@
           <a:p>
             <a:pPr indent="0" marL="0">
               <a:lnSpc>
-                <a:spcPts val="5600"/>
+                <a:spcPts val="6000"/>
               </a:lnSpc>
               <a:buNone/>
             </a:pPr>
             <a:r>
-              <a:rPr lang="en-US" sz="5200" b="1" dirty="0">
+              <a:rPr lang="en-US" sz="5400" b="1" dirty="0">
                 <a:solidFill>
                   <a:srgbClr val="FFFFFF"/>
                 </a:solidFill>
@@ -1949,19 +1949,19 @@
                 <a:ea typeface="Cambria" pitchFamily="34" charset="-122"/>
                 <a:cs typeface="Cambria" pitchFamily="34" charset="-120"/>
               </a:rPr>
-              <a:t>Movement that fits</a:t>
-            </a:r>
-            <a:endParaRPr lang="en-US" sz="5200" dirty="0"/>
+              <a:t>Can’t spy.</a:t>
+            </a:r>
+            <a:endParaRPr lang="en-US" sz="5400" dirty="0"/>
           </a:p>
           <a:p>
             <a:pPr indent="0" marL="0">
               <a:lnSpc>
-                <a:spcPts val="5600"/>
+                <a:spcPts val="6000"/>
               </a:lnSpc>
               <a:buNone/>
             </a:pPr>
             <a:r>
-              <a:rPr lang="en-US" sz="5200" b="1" dirty="0">
+              <a:rPr lang="en-US" sz="5400" b="1" dirty="0">
                 <a:solidFill>
                   <a:srgbClr val="FFFFFF"/>
                 </a:solidFill>
@@ -1969,9 +1969,29 @@
                 <a:ea typeface="Cambria" pitchFamily="34" charset="-122"/>
                 <a:cs typeface="Cambria" pitchFamily="34" charset="-120"/>
               </a:rPr>
-              <a:t>the working day.</a:t>
-            </a:r>
-            <a:endParaRPr lang="en-US" sz="5200" dirty="0"/>
+              <a:t>Can’t nag.</a:t>
+            </a:r>
+            <a:endParaRPr lang="en-US" sz="5400" dirty="0"/>
+          </a:p>
+          <a:p>
+            <a:pPr indent="0" marL="0">
+              <a:lnSpc>
+                <a:spcPts val="6000"/>
+              </a:lnSpc>
+              <a:buNone/>
+            </a:pPr>
+            <a:r>
+              <a:rPr lang="en-US" sz="5400" b="1" dirty="0">
+                <a:solidFill>
+                  <a:srgbClr val="FFFFFF"/>
+                </a:solidFill>
+                <a:latin typeface="Cambria" pitchFamily="34" charset="0"/>
+                <a:ea typeface="Cambria" pitchFamily="34" charset="-122"/>
+                <a:cs typeface="Cambria" pitchFamily="34" charset="-120"/>
+              </a:rPr>
+              <a:t>Can’t exclude.</a:t>
+            </a:r>
+            <a:endParaRPr lang="en-US" sz="5400" dirty="0"/>
           </a:p>
         </p:txBody>
       </p:sp>
@@ -1983,7 +2003,7 @@
         </p:nvSpPr>
         <p:spPr>
           <a:xfrm>
-            <a:off x="731520" y="4297680"/>
+            <a:off x="731520" y="4754880"/>
             <a:ext cx="7315200" cy="365760"/>
           </a:xfrm>
           <a:prstGeom prst="rect">
@@ -2022,8 +2042,8 @@
         </p:nvSpPr>
         <p:spPr>
           <a:xfrm>
-            <a:off x="731520" y="4892040"/>
-            <a:ext cx="9326880" cy="822960"/>
+            <a:off x="731520" y="5303520"/>
+            <a:ext cx="9509760" cy="822960"/>
           </a:xfrm>
           <a:prstGeom prst="rect">
             <a:avLst/>
@@ -2050,7 +2070,7 @@
                 <a:ea typeface="Calibri" pitchFamily="34" charset="-122"/>
                 <a:cs typeface="Calibri" pitchFamily="34" charset="-120"/>
               </a:rPr>
-              <a:t>A movement and food-intelligence platform for your workforce — built so an employer can run a programme without ever seeing one employee.</a:t>
+              <a:t>A movement and food-intelligence platform for your workforce. Those three are in the code, not the contract — and your engineers can check all three before you sign anything.</a:t>
             </a:r>
             <a:endParaRPr lang="en-US" sz="1400" dirty="0"/>
           </a:p>
@@ -2064,7 +2084,7 @@
         </p:nvSpPr>
         <p:spPr>
           <a:xfrm>
-            <a:off x="731520" y="5989320"/>
+            <a:off x="731520" y="6263640"/>
             <a:ext cx="7315200" cy="274320"/>
           </a:xfrm>
           <a:prstGeom prst="rect">
@@ -2485,7 +2505,7 @@
                 <a:ea typeface="Calibri" pitchFamily="34" charset="-122"/>
                 <a:cs typeface="Calibri" pitchFamily="34" charset="-120"/>
               </a:rPr>
-              <a:t>And a minimum annual contract.</a:t>
+              <a:t>Annual term once a pilot converts, not before.</a:t>
             </a:r>
             <a:endParaRPr lang="en-US" sz="1150" dirty="0"/>
           </a:p>
@@ -2863,7 +2883,7 @@
                 <a:ea typeface="Calibri" pitchFamily="34" charset="-122"/>
                 <a:cs typeface="Calibri" pitchFamily="34" charset="-120"/>
               </a:rPr>
-              <a:t>Design partners are priced at the floor for the first year, in exchange for feedback and a reference once there is something real to reference.</a:t>
+              <a:t>One invoice, one contract, one line in the benefits budget. No per-feature upsell and no device to buy.</a:t>
             </a:r>
             <a:endParaRPr lang="en-US" sz="1300" dirty="0"/>
           </a:p>
@@ -2993,7 +3013,7 @@
                 <a:ea typeface="Cambria" pitchFamily="34" charset="-122"/>
                 <a:cs typeface="Cambria" pitchFamily="34" charset="-120"/>
               </a:rPr>
-              <a:t>A twelve-week pilot,</a:t>
+              <a:t>One team. Twelve weeks.</a:t>
             </a:r>
             <a:endParaRPr lang="en-US" sz="3400" dirty="0"/>
           </a:p>
@@ -3010,7 +3030,7 @@
                 <a:ea typeface="Cambria" pitchFamily="34" charset="-122"/>
                 <a:cs typeface="Cambria" pitchFamily="34" charset="-120"/>
               </a:rPr>
-              <a:t>one team, no procurement epic.</a:t>
+              <a:t>No procurement epic.</a:t>
             </a:r>
             <a:endParaRPr lang="en-US" sz="3400" dirty="0"/>
           </a:p>
@@ -3608,7 +3628,7 @@
                 <a:ea typeface="Calibri" pitchFamily="34" charset="-122"/>
                 <a:cs typeface="Calibri" pitchFamily="34" charset="-120"/>
               </a:rPr>
-              <a:t>If the pilot shows it did not work, we would rather know at week twelve than sell you a second year. That is the whole basis of the programme.</a:t>
+              <a:t>If it did not work, we would rather you knew at week twelve than bought a year. The annual term starts only if you choose to convert.</a:t>
             </a:r>
             <a:endParaRPr lang="en-US" sz="1350" dirty="0"/>
           </a:p>
@@ -3714,7 +3734,7 @@
         <p:spPr>
           <a:xfrm>
             <a:off x="731520" y="2468880"/>
-            <a:ext cx="8229600" cy="1737360"/>
+            <a:ext cx="7315200" cy="1737360"/>
           </a:xfrm>
           <a:prstGeom prst="rect">
             <a:avLst/>
@@ -3733,7 +3753,7 @@
               <a:buNone/>
             </a:pPr>
             <a:r>
-              <a:rPr lang="en-US" sz="5000" b="1" dirty="0">
+              <a:rPr lang="en-US" sz="4800" b="1" dirty="0">
                 <a:solidFill>
                   <a:srgbClr val="FFFFFF"/>
                 </a:solidFill>
@@ -3741,9 +3761,9 @@
                 <a:ea typeface="Cambria" pitchFamily="34" charset="-122"/>
                 <a:cs typeface="Cambria" pitchFamily="34" charset="-120"/>
               </a:rPr>
-              <a:t>Two minutes is</a:t>
-            </a:r>
-            <a:endParaRPr lang="en-US" sz="5000" dirty="0"/>
+              <a:t>Give us one team</a:t>
+            </a:r>
+            <a:endParaRPr lang="en-US" sz="4800" dirty="0"/>
           </a:p>
           <a:p>
             <a:pPr indent="0" marL="0">
@@ -3753,7 +3773,7 @@
               <a:buNone/>
             </a:pPr>
             <a:r>
-              <a:rPr lang="en-US" sz="5000" b="1" dirty="0">
+              <a:rPr lang="en-US" sz="4800" b="1" dirty="0">
                 <a:solidFill>
                   <a:srgbClr val="FFFFFF"/>
                 </a:solidFill>
@@ -3761,9 +3781,9 @@
                 <a:ea typeface="Cambria" pitchFamily="34" charset="-122"/>
                 <a:cs typeface="Cambria" pitchFamily="34" charset="-120"/>
               </a:rPr>
-              <a:t>the whole ask.</a:t>
-            </a:r>
-            <a:endParaRPr lang="en-US" sz="5000" dirty="0"/>
+              <a:t>and twelve weeks.</a:t>
+            </a:r>
+            <a:endParaRPr lang="en-US" sz="4800" dirty="0"/>
           </a:p>
         </p:txBody>
       </p:sp>
@@ -3795,7 +3815,7 @@
               <a:buNone/>
             </a:pPr>
             <a:r>
-              <a:rPr lang="en-US" sz="1500" dirty="0">
+              <a:rPr lang="en-US" sz="1600" dirty="0">
                 <a:solidFill>
                   <a:srgbClr val="B8C6D1"/>
                 </a:solidFill>
@@ -3803,9 +3823,9 @@
                 <a:ea typeface="Calibri" pitchFamily="34" charset="-122"/>
                 <a:cs typeface="Calibri" pitchFamily="34" charset="-120"/>
               </a:rPr>
-              <a:t>Of an employee’s day, and of yours to decide whether a twelve-week pilot is worth running.</a:t>
-            </a:r>
-            <a:endParaRPr lang="en-US" sz="1500" dirty="0"/>
+              <a:t>Two minutes of an employee’s day. Thirty of yours to decide.</a:t>
+            </a:r>
+            <a:endParaRPr lang="en-US" sz="1600" dirty="0"/>
           </a:p>
         </p:txBody>
       </p:sp>
@@ -3957,7 +3977,7 @@
                 <a:ea typeface="Calibri" pitchFamily="34" charset="-122"/>
                 <a:cs typeface="Calibri" pitchFamily="34" charset="-120"/>
               </a:rPr>
-              <a:t>A thirty-minute call, and we will run the verification endpoints live if your security team wants to watch.</a:t>
+              <a:t>Bring your security lead. We will run the endpoints live while they watch.</a:t>
             </a:r>
             <a:endParaRPr lang="en-US" sz="1200" dirty="0"/>
           </a:p>
@@ -4016,7 +4036,7 @@
     <p:bg>
       <p:bgPr>
         <a:solidFill>
-          <a:srgbClr val="FFFFFF"/>
+          <a:srgbClr val="102A43"/>
         </a:solidFill>
       </p:bgPr>
     </p:bg>
@@ -4049,7 +4069,7 @@
             <a:avLst/>
           </a:prstGeom>
           <a:solidFill>
-            <a:srgbClr val="00A99D"/>
+            <a:srgbClr val="B7E436"/>
           </a:solidFill>
           <a:ln/>
         </p:spPr>
@@ -4081,13 +4101,13 @@
             <a:r>
               <a:rPr lang="en-US" sz="1200" b="1" spc="200" kern="0" dirty="0">
                 <a:solidFill>
-                  <a:srgbClr val="00A99D"/>
+                  <a:srgbClr val="B7E436"/>
                 </a:solidFill>
                 <a:latin typeface="Arial" pitchFamily="34" charset="0"/>
                 <a:ea typeface="Arial" pitchFamily="34" charset="-122"/>
                 <a:cs typeface="Arial" pitchFamily="34" charset="-120"/>
               </a:rPr>
-              <a:t>WHERE WE ACTUALLY ARE</a:t>
+              <a:t>THE QUESTION YOUR PEOPLE WILL ASK</a:t>
             </a:r>
             <a:endParaRPr lang="en-US" sz="1200" dirty="0"/>
           </a:p>
@@ -4120,16 +4140,33 @@
             <a:r>
               <a:rPr lang="en-US" sz="3800" b="1" dirty="0">
                 <a:solidFill>
-                  <a:srgbClr val="102A43"/>
+                  <a:srgbClr val="FFFFFF"/>
                 </a:solidFill>
                 <a:latin typeface="Cambria" pitchFamily="34" charset="0"/>
                 <a:ea typeface="Cambria" pitchFamily="34" charset="-122"/>
                 <a:cs typeface="Cambria" pitchFamily="34" charset="-120"/>
               </a:rPr>
-              <a:t>No customers yet. That is the offer.</a:t>
+              <a:t>Can my employer see</a:t>
             </a:r>
             <a:endParaRPr lang="en-US" sz="3800" dirty="0"/>
           </a:p>
+          <a:p>
+            <a:pPr indent="0" marL="0">
+              <a:buNone/>
+            </a:pPr>
+            <a:r>
+              <a:rPr lang="en-US" sz="3800" b="1" dirty="0">
+                <a:solidFill>
+                  <a:srgbClr val="FFFFFF"/>
+                </a:solidFill>
+                <a:latin typeface="Cambria" pitchFamily="34" charset="0"/>
+                <a:ea typeface="Cambria" pitchFamily="34" charset="-122"/>
+                <a:cs typeface="Cambria" pitchFamily="34" charset="-120"/>
+              </a:rPr>
+              <a:t>what I did today?</a:t>
+            </a:r>
+            <a:endParaRPr lang="en-US" sz="3800" dirty="0"/>
+          </a:p>
         </p:txBody>
       </p:sp>
       <p:sp>
@@ -4140,8 +4177,47 @@
         </p:nvSpPr>
         <p:spPr>
           <a:xfrm>
-            <a:off x="731520" y="2103120"/>
-            <a:ext cx="5760720" cy="1371600"/>
+            <a:off x="731520" y="2697480"/>
+            <a:ext cx="2743200" cy="1188720"/>
+          </a:xfrm>
+          <a:prstGeom prst="rect">
+            <a:avLst/>
+          </a:prstGeom>
+          <a:noFill/>
+          <a:ln/>
+        </p:spPr>
+        <p:txBody>
+          <a:bodyPr wrap="square" lIns="0" tIns="0" rIns="0" bIns="0" rtlCol="0" anchor="ctr"/>
+          <a:lstStyle/>
+          <a:p>
+            <a:pPr indent="0" marL="0">
+              <a:buNone/>
+            </a:pPr>
+            <a:r>
+              <a:rPr lang="en-US" sz="9200" b="1" dirty="0">
+                <a:solidFill>
+                  <a:srgbClr val="B7E436"/>
+                </a:solidFill>
+                <a:latin typeface="Cambria" pitchFamily="34" charset="0"/>
+                <a:ea typeface="Cambria" pitchFamily="34" charset="-122"/>
+                <a:cs typeface="Cambria" pitchFamily="34" charset="-120"/>
+              </a:rPr>
+              <a:t>No.</a:t>
+            </a:r>
+            <a:endParaRPr lang="en-US" sz="9200" dirty="0"/>
+          </a:p>
+        </p:txBody>
+      </p:sp>
+      <p:sp>
+        <p:nvSpPr>
+          <p:cNvPr id="6" name="Text 4"/>
+          <p:cNvSpPr txBox="1"/>
+          <p:nvPr/>
+        </p:nvSpPr>
+        <p:spPr>
+          <a:xfrm>
+            <a:off x="731520" y="3886200"/>
+            <a:ext cx="4754880" cy="731520"/>
           </a:xfrm>
           <a:prstGeom prst="rect">
             <a:avLst/>
@@ -4155,20 +4231,20 @@
           <a:p>
             <a:pPr indent="0" marL="0">
               <a:lnSpc>
-                <a:spcPts val="2500"/>
+                <a:spcPts val="2200"/>
               </a:lnSpc>
               <a:buNone/>
             </a:pPr>
             <a:r>
               <a:rPr lang="en-US" sz="1500" dirty="0">
                 <a:solidFill>
-                  <a:srgbClr val="475663"/>
+                  <a:srgbClr val="FFFFFF"/>
                 </a:solidFill>
                 <a:latin typeface="Calibri" pitchFamily="34" charset="0"/>
                 <a:ea typeface="Calibri" pitchFamily="34" charset="-122"/>
                 <a:cs typeface="Calibri" pitchFamily="34" charset="-120"/>
               </a:rPr>
-              <a:t>Most vendors you meet will show you logos and a case study. We have neither, and saying so is the point — you are not buying a finished programme, you are shaping one. What exists is the platform, built and tested; what does not exist is a track record.</a:t>
+              <a:t>Not restricted. Not audited. Not switchable by a super-admin. Absent.</a:t>
             </a:r>
             <a:endParaRPr lang="en-US" sz="1500" dirty="0"/>
           </a:p>
@@ -4176,53 +4252,53 @@
       </p:sp>
       <p:sp>
         <p:nvSpPr>
-          <p:cNvPr id="6" name="Text 4"/>
-          <p:cNvSpPr txBox="1"/>
-          <p:nvPr/>
-        </p:nvSpPr>
-        <p:spPr>
-          <a:xfrm>
-            <a:off x="731520" y="3749040"/>
-            <a:ext cx="1828800" cy="685800"/>
-          </a:xfrm>
-          <a:prstGeom prst="rect">
-            <a:avLst/>
-          </a:prstGeom>
-          <a:noFill/>
-          <a:ln/>
-        </p:spPr>
-        <p:txBody>
-          <a:bodyPr wrap="square" lIns="0" tIns="0" rIns="0" bIns="0" rtlCol="0" anchor="ctr"/>
-          <a:lstStyle/>
-          <a:p>
-            <a:pPr indent="0" marL="0">
-              <a:buNone/>
-            </a:pPr>
-            <a:r>
-              <a:rPr lang="en-US" sz="4000" b="1" dirty="0">
-                <a:solidFill>
-                  <a:srgbClr val="00A99D"/>
-                </a:solidFill>
-                <a:latin typeface="Cambria" pitchFamily="34" charset="0"/>
-                <a:ea typeface="Cambria" pitchFamily="34" charset="-122"/>
-                <a:cs typeface="Cambria" pitchFamily="34" charset="-120"/>
-              </a:rPr>
-              <a:t>942</a:t>
-            </a:r>
-            <a:endParaRPr lang="en-US" sz="4000" dirty="0"/>
-          </a:p>
-        </p:txBody>
-      </p:sp>
-      <p:sp>
-        <p:nvSpPr>
           <p:cNvPr id="7" name="Text 5"/>
           <p:cNvSpPr txBox="1"/>
           <p:nvPr/>
         </p:nvSpPr>
         <p:spPr>
           <a:xfrm>
-            <a:off x="731520" y="4498848"/>
-            <a:ext cx="1828800" cy="640080"/>
+            <a:off x="731520" y="4892040"/>
+            <a:ext cx="4206240" cy="274320"/>
+          </a:xfrm>
+          <a:prstGeom prst="rect">
+            <a:avLst/>
+          </a:prstGeom>
+          <a:noFill/>
+          <a:ln/>
+        </p:spPr>
+        <p:txBody>
+          <a:bodyPr wrap="square" lIns="0" tIns="0" rIns="0" bIns="0" rtlCol="0" anchor="ctr"/>
+          <a:lstStyle/>
+          <a:p>
+            <a:pPr indent="0" marL="0">
+              <a:buNone/>
+            </a:pPr>
+            <a:r>
+              <a:rPr lang="en-US" sz="1300" b="1" dirty="0">
+                <a:solidFill>
+                  <a:srgbClr val="B7E436"/>
+                </a:solidFill>
+                <a:latin typeface="Courier New" pitchFamily="34" charset="0"/>
+                <a:ea typeface="Courier New" pitchFamily="34" charset="-122"/>
+                <a:cs typeface="Courier New" pitchFamily="34" charset="-120"/>
+              </a:rPr>
+              <a:t>OrganisationReport</a:t>
+            </a:r>
+            <a:endParaRPr lang="en-US" sz="1300" dirty="0"/>
+          </a:p>
+        </p:txBody>
+      </p:sp>
+      <p:sp>
+        <p:nvSpPr>
+          <p:cNvPr id="8" name="Text 6"/>
+          <p:cNvSpPr txBox="1"/>
+          <p:nvPr/>
+        </p:nvSpPr>
+        <p:spPr>
+          <a:xfrm>
+            <a:off x="731520" y="5230368"/>
+            <a:ext cx="4754880" cy="548640"/>
           </a:xfrm>
           <a:prstGeom prst="rect">
             <a:avLst/>
@@ -4236,269 +4312,67 @@
           <a:p>
             <a:pPr indent="0" marL="0">
               <a:lnSpc>
-                <a:spcPts val="1500"/>
+                <a:spcPts val="1800"/>
               </a:lnSpc>
               <a:buNone/>
             </a:pPr>
             <a:r>
-              <a:rPr lang="en-US" sz="1100" dirty="0">
-                <a:solidFill>
-                  <a:srgbClr val="475663"/>
+              <a:rPr lang="en-US" sz="1200" dirty="0">
+                <a:solidFill>
+                  <a:srgbClr val="B8C6D1"/>
                 </a:solidFill>
                 <a:latin typeface="Calibri" pitchFamily="34" charset="0"/>
                 <a:ea typeface="Calibri" pitchFamily="34" charset="-122"/>
                 <a:cs typeface="Calibri" pitchFamily="34" charset="-120"/>
               </a:rPr>
-              <a:t>automated tests in</a:t>
-            </a:r>
-            <a:endParaRPr lang="en-US" sz="1100" dirty="0"/>
+              <a:t>apps/backend/src/groups/groups.logic.ts — the type your</a:t>
+            </a:r>
+            <a:endParaRPr lang="en-US" sz="1200" dirty="0"/>
           </a:p>
           <a:p>
             <a:pPr indent="0" marL="0">
               <a:lnSpc>
-                <a:spcPts val="1500"/>
+                <a:spcPts val="1800"/>
               </a:lnSpc>
               <a:buNone/>
             </a:pPr>
             <a:r>
-              <a:rPr lang="en-US" sz="1100" dirty="0">
-                <a:solidFill>
-                  <a:srgbClr val="475663"/>
+              <a:rPr lang="en-US" sz="1200" dirty="0">
+                <a:solidFill>
+                  <a:srgbClr val="B8C6D1"/>
                 </a:solidFill>
                 <a:latin typeface="Calibri" pitchFamily="34" charset="0"/>
                 <a:ea typeface="Calibri" pitchFamily="34" charset="-122"/>
                 <a:cs typeface="Calibri" pitchFamily="34" charset="-120"/>
               </a:rPr>
-              <a:t>the repository today</a:t>
-            </a:r>
-            <a:endParaRPr lang="en-US" sz="1100" dirty="0"/>
-          </a:p>
-        </p:txBody>
-      </p:sp>
-      <p:sp>
-        <p:nvSpPr>
-          <p:cNvPr id="8" name="Text 6"/>
-          <p:cNvSpPr txBox="1"/>
-          <p:nvPr/>
-        </p:nvSpPr>
-        <p:spPr>
-          <a:xfrm>
-            <a:off x="2697480" y="3749040"/>
-            <a:ext cx="1828800" cy="685800"/>
-          </a:xfrm>
-          <a:prstGeom prst="rect">
-            <a:avLst/>
-          </a:prstGeom>
-          <a:noFill/>
-          <a:ln/>
-        </p:spPr>
-        <p:txBody>
-          <a:bodyPr wrap="square" lIns="0" tIns="0" rIns="0" bIns="0" rtlCol="0" anchor="ctr"/>
-          <a:lstStyle/>
-          <a:p>
-            <a:pPr indent="0" marL="0">
-              <a:buNone/>
-            </a:pPr>
-            <a:r>
-              <a:rPr lang="en-US" sz="4000" b="1" dirty="0">
-                <a:solidFill>
-                  <a:srgbClr val="00A99D"/>
-                </a:solidFill>
-                <a:latin typeface="Cambria" pitchFamily="34" charset="0"/>
-                <a:ea typeface="Cambria" pitchFamily="34" charset="-122"/>
-                <a:cs typeface="Cambria" pitchFamily="34" charset="-120"/>
-              </a:rPr>
-              <a:t>8</a:t>
-            </a:r>
-            <a:endParaRPr lang="en-US" sz="4000" dirty="0"/>
-          </a:p>
-        </p:txBody>
-      </p:sp>
-      <p:sp>
-        <p:nvSpPr>
-          <p:cNvPr id="9" name="Text 7"/>
-          <p:cNvSpPr txBox="1"/>
-          <p:nvPr/>
-        </p:nvSpPr>
-        <p:spPr>
-          <a:xfrm>
-            <a:off x="2697480" y="4498848"/>
-            <a:ext cx="1828800" cy="640080"/>
-          </a:xfrm>
-          <a:prstGeom prst="rect">
-            <a:avLst/>
-          </a:prstGeom>
-          <a:noFill/>
-          <a:ln/>
-        </p:spPr>
-        <p:txBody>
-          <a:bodyPr wrap="square" lIns="0" tIns="0" rIns="0" bIns="0" rtlCol="0" anchor="ctr"/>
-          <a:lstStyle/>
-          <a:p>
-            <a:pPr indent="0" marL="0">
-              <a:lnSpc>
-                <a:spcPts val="1500"/>
-              </a:lnSpc>
-              <a:buNone/>
-            </a:pPr>
-            <a:r>
-              <a:rPr lang="en-US" sz="1100" dirty="0">
-                <a:solidFill>
-                  <a:srgbClr val="475663"/>
-                </a:solidFill>
-                <a:latin typeface="Calibri" pitchFamily="34" charset="0"/>
-                <a:ea typeface="Calibri" pitchFamily="34" charset="-122"/>
-                <a:cs typeface="Calibri" pitchFamily="34" charset="-120"/>
-              </a:rPr>
-              <a:t>people needed before</a:t>
-            </a:r>
-            <a:endParaRPr lang="en-US" sz="1100" dirty="0"/>
-          </a:p>
-          <a:p>
-            <a:pPr indent="0" marL="0">
-              <a:lnSpc>
-                <a:spcPts val="1500"/>
-              </a:lnSpc>
-              <a:buNone/>
-            </a:pPr>
-            <a:r>
-              <a:rPr lang="en-US" sz="1100" dirty="0">
-                <a:solidFill>
-                  <a:srgbClr val="475663"/>
-                </a:solidFill>
-                <a:latin typeface="Calibri" pitchFamily="34" charset="0"/>
-                <a:ea typeface="Calibri" pitchFamily="34" charset="-122"/>
-                <a:cs typeface="Calibri" pitchFamily="34" charset="-120"/>
-              </a:rPr>
-              <a:t>a figure is reported</a:t>
-            </a:r>
-            <a:endParaRPr lang="en-US" sz="1100" dirty="0"/>
-          </a:p>
-        </p:txBody>
-      </p:sp>
-      <p:sp>
-        <p:nvSpPr>
-          <p:cNvPr id="10" name="Text 8"/>
-          <p:cNvSpPr txBox="1"/>
-          <p:nvPr/>
-        </p:nvSpPr>
-        <p:spPr>
-          <a:xfrm>
-            <a:off x="4663440" y="3749040"/>
-            <a:ext cx="1828800" cy="685800"/>
-          </a:xfrm>
-          <a:prstGeom prst="rect">
-            <a:avLst/>
-          </a:prstGeom>
-          <a:noFill/>
-          <a:ln/>
-        </p:spPr>
-        <p:txBody>
-          <a:bodyPr wrap="square" lIns="0" tIns="0" rIns="0" bIns="0" rtlCol="0" anchor="ctr"/>
-          <a:lstStyle/>
-          <a:p>
-            <a:pPr indent="0" marL="0">
-              <a:buNone/>
-            </a:pPr>
-            <a:r>
-              <a:rPr lang="en-US" sz="4000" b="1" dirty="0">
-                <a:solidFill>
-                  <a:srgbClr val="00A99D"/>
-                </a:solidFill>
-                <a:latin typeface="Cambria" pitchFamily="34" charset="0"/>
-                <a:ea typeface="Cambria" pitchFamily="34" charset="-122"/>
-                <a:cs typeface="Cambria" pitchFamily="34" charset="-120"/>
-              </a:rPr>
-              <a:t>0</a:t>
-            </a:r>
-            <a:endParaRPr lang="en-US" sz="4000" dirty="0"/>
-          </a:p>
-        </p:txBody>
-      </p:sp>
-      <p:sp>
-        <p:nvSpPr>
-          <p:cNvPr id="11" name="Text 9"/>
-          <p:cNvSpPr txBox="1"/>
-          <p:nvPr/>
-        </p:nvSpPr>
-        <p:spPr>
-          <a:xfrm>
-            <a:off x="4663440" y="4498848"/>
-            <a:ext cx="1828800" cy="640080"/>
-          </a:xfrm>
-          <a:prstGeom prst="rect">
-            <a:avLst/>
-          </a:prstGeom>
-          <a:noFill/>
-          <a:ln/>
-        </p:spPr>
-        <p:txBody>
-          <a:bodyPr wrap="square" lIns="0" tIns="0" rIns="0" bIns="0" rtlCol="0" anchor="ctr"/>
-          <a:lstStyle/>
-          <a:p>
-            <a:pPr indent="0" marL="0">
-              <a:lnSpc>
-                <a:spcPts val="1500"/>
-              </a:lnSpc>
-              <a:buNone/>
-            </a:pPr>
-            <a:r>
-              <a:rPr lang="en-US" sz="1100" dirty="0">
-                <a:solidFill>
-                  <a:srgbClr val="475663"/>
-                </a:solidFill>
-                <a:latin typeface="Calibri" pitchFamily="34" charset="0"/>
-                <a:ea typeface="Calibri" pitchFamily="34" charset="-122"/>
-                <a:cs typeface="Calibri" pitchFamily="34" charset="-120"/>
-              </a:rPr>
-              <a:t>organisations that have</a:t>
-            </a:r>
-            <a:endParaRPr lang="en-US" sz="1100" dirty="0"/>
-          </a:p>
-          <a:p>
-            <a:pPr indent="0" marL="0">
-              <a:lnSpc>
-                <a:spcPts val="1500"/>
-              </a:lnSpc>
-              <a:buNone/>
-            </a:pPr>
-            <a:r>
-              <a:rPr lang="en-US" sz="1100" dirty="0">
-                <a:solidFill>
-                  <a:srgbClr val="475663"/>
-                </a:solidFill>
-                <a:latin typeface="Calibri" pitchFamily="34" charset="0"/>
-                <a:ea typeface="Calibri" pitchFamily="34" charset="-122"/>
-                <a:cs typeface="Calibri" pitchFamily="34" charset="-120"/>
-              </a:rPr>
-              <a:t>run a cohort so far</a:t>
-            </a:r>
-            <a:endParaRPr lang="en-US" sz="1100" dirty="0"/>
-          </a:p>
-        </p:txBody>
-      </p:sp>
-      <p:sp>
-        <p:nvSpPr>
-          <p:cNvPr id="12" name="Shape 10"/>
+              <a:t>engineers can read in five minutes.</a:t>
+            </a:r>
+            <a:endParaRPr lang="en-US" sz="1200" dirty="0"/>
+          </a:p>
+        </p:txBody>
+      </p:sp>
+      <p:sp>
+        <p:nvSpPr>
+          <p:cNvPr id="9" name="Shape 7"/>
           <p:cNvSpPr/>
           <p:nvPr/>
         </p:nvSpPr>
         <p:spPr>
           <a:xfrm>
-            <a:off x="6720840" y="2103120"/>
-            <a:ext cx="4709160" cy="1207008"/>
+            <a:off x="5760720" y="2377440"/>
+            <a:ext cx="5669280" cy="3566160"/>
           </a:xfrm>
           <a:prstGeom prst="roundRect">
             <a:avLst>
-              <a:gd name="adj" fmla="val 6061"/>
+              <a:gd name="adj" fmla="val 2051"/>
             </a:avLst>
           </a:prstGeom>
           <a:solidFill>
-            <a:srgbClr val="F4F7F9"/>
+            <a:srgbClr val="1B3A54"/>
           </a:solidFill>
           <a:ln w="12700">
             <a:solidFill>
-              <a:srgbClr val="F4F7F9"/>
+              <a:srgbClr val="1B3A54"/>
             </a:solidFill>
             <a:prstDash val="solid"/>
           </a:ln>
@@ -4513,372 +4387,131 @@
       </p:sp>
       <p:sp>
         <p:nvSpPr>
-          <p:cNvPr id="13" name="Shape 11"/>
-          <p:cNvSpPr/>
-          <p:nvPr/>
-        </p:nvSpPr>
-        <p:spPr>
-          <a:xfrm>
-            <a:off x="6949440" y="2359152"/>
-            <a:ext cx="274320" cy="274320"/>
-          </a:xfrm>
-          <a:prstGeom prst="ellipse">
-            <a:avLst/>
-          </a:prstGeom>
-          <a:solidFill>
-            <a:srgbClr val="00A99D"/>
-          </a:solidFill>
-          <a:ln/>
-        </p:spPr>
-      </p:sp>
-      <p:sp>
-        <p:nvSpPr>
-          <p:cNvPr id="14" name="Text 12"/>
-          <p:cNvSpPr txBox="1"/>
-          <p:nvPr/>
-        </p:nvSpPr>
-        <p:spPr>
-          <a:xfrm>
-            <a:off x="7360920" y="2304288"/>
-            <a:ext cx="3931920" cy="320040"/>
-          </a:xfrm>
-          <a:prstGeom prst="rect">
-            <a:avLst/>
-          </a:prstGeom>
-          <a:noFill/>
-          <a:ln/>
-        </p:spPr>
-        <p:txBody>
-          <a:bodyPr wrap="square" lIns="0" tIns="0" rIns="0" bIns="0" rtlCol="0" anchor="ctr"/>
-          <a:lstStyle/>
-          <a:p>
-            <a:pPr indent="0" marL="0">
-              <a:buNone/>
-            </a:pPr>
-            <a:r>
-              <a:rPr lang="en-US" sz="1400" b="1" dirty="0">
-                <a:solidFill>
-                  <a:srgbClr val="102A43"/>
+          <p:cNvPr id="10" name="Text 8"/>
+          <p:cNvSpPr txBox="1"/>
+          <p:nvPr/>
+        </p:nvSpPr>
+        <p:spPr>
+          <a:xfrm>
+            <a:off x="6172200" y="2651760"/>
+            <a:ext cx="4846320" cy="320040"/>
+          </a:xfrm>
+          <a:prstGeom prst="rect">
+            <a:avLst/>
+          </a:prstGeom>
+          <a:noFill/>
+          <a:ln/>
+        </p:spPr>
+        <p:txBody>
+          <a:bodyPr wrap="square" lIns="0" tIns="0" rIns="0" bIns="0" rtlCol="0" anchor="ctr"/>
+          <a:lstStyle/>
+          <a:p>
+            <a:pPr indent="0" marL="0">
+              <a:buNone/>
+            </a:pPr>
+            <a:r>
+              <a:rPr lang="en-US" sz="1500" b="1" dirty="0">
+                <a:solidFill>
+                  <a:srgbClr val="B7E436"/>
                 </a:solidFill>
                 <a:latin typeface="Arial" pitchFamily="34" charset="0"/>
                 <a:ea typeface="Arial" pitchFamily="34" charset="-122"/>
                 <a:cs typeface="Arial" pitchFamily="34" charset="-120"/>
               </a:rPr>
-              <a:t>Built and tested</a:t>
-            </a:r>
-            <a:endParaRPr lang="en-US" sz="1400" dirty="0"/>
-          </a:p>
-        </p:txBody>
-      </p:sp>
-      <p:sp>
-        <p:nvSpPr>
-          <p:cNvPr id="15" name="Text 13"/>
-          <p:cNvSpPr txBox="1"/>
-          <p:nvPr/>
-        </p:nvSpPr>
-        <p:spPr>
-          <a:xfrm>
-            <a:off x="7360920" y="2651760"/>
-            <a:ext cx="3886200" cy="566928"/>
-          </a:xfrm>
-          <a:prstGeom prst="rect">
-            <a:avLst/>
-          </a:prstGeom>
-          <a:noFill/>
-          <a:ln/>
-        </p:spPr>
-        <p:txBody>
-          <a:bodyPr wrap="square" lIns="0" tIns="0" rIns="0" bIns="0" rtlCol="0" anchor="ctr"/>
-          <a:lstStyle/>
-          <a:p>
-            <a:pPr indent="0" marL="0">
+              <a:t>Why that answer holds</a:t>
+            </a:r>
+            <a:endParaRPr lang="en-US" sz="1500" dirty="0"/>
+          </a:p>
+        </p:txBody>
+      </p:sp>
+      <p:sp>
+        <p:nvSpPr>
+          <p:cNvPr id="11" name="Text 9"/>
+          <p:cNvSpPr txBox="1"/>
+          <p:nvPr/>
+        </p:nvSpPr>
+        <p:spPr>
+          <a:xfrm>
+            <a:off x="6217920" y="3154680"/>
+            <a:ext cx="4754880" cy="2560320"/>
+          </a:xfrm>
+          <a:prstGeom prst="rect">
+            <a:avLst/>
+          </a:prstGeom>
+          <a:noFill/>
+          <a:ln/>
+        </p:spPr>
+        <p:txBody>
+          <a:bodyPr wrap="square" lIns="0" tIns="0" rIns="0" bIns="0" rtlCol="0" anchor="t"/>
+          <a:lstStyle/>
+          <a:p>
+            <a:pPr marL="342900" indent="-342900">
               <a:lnSpc>
-                <a:spcPts val="1600"/>
+                <a:spcPts val="1700"/>
               </a:lnSpc>
-              <a:buNone/>
-            </a:pPr>
-            <a:r>
-              <a:rPr lang="en-US" sz="1150" dirty="0">
-                <a:solidFill>
-                  <a:srgbClr val="475663"/>
+              <a:spcAft>
+                <a:spcPts val="1200"/>
+              </a:spcAft>
+              <a:buSzPct val="100000"/>
+              <a:buChar char="•"/>
+            </a:pPr>
+            <a:r>
+              <a:rPr lang="en-US" sz="1200" dirty="0">
+                <a:solidFill>
+                  <a:srgbClr val="D6E2EA"/>
                 </a:solidFill>
                 <a:latin typeface="Calibri" pitchFamily="34" charset="0"/>
                 <a:ea typeface="Calibri" pitchFamily="34" charset="-122"/>
                 <a:cs typeface="Calibri" pitchFamily="34" charset="-120"/>
               </a:rPr>
-              <a:t>Safeguarding and privacy rules enforced in the database, not the interface.</a:t>
-            </a:r>
-            <a:endParaRPr lang="en-US" sz="1150" dirty="0"/>
-          </a:p>
-        </p:txBody>
-      </p:sp>
-      <p:sp>
-        <p:nvSpPr>
-          <p:cNvPr id="16" name="Shape 14"/>
-          <p:cNvSpPr/>
-          <p:nvPr/>
-        </p:nvSpPr>
-        <p:spPr>
-          <a:xfrm>
-            <a:off x="6720840" y="3474720"/>
-            <a:ext cx="4709160" cy="1207008"/>
-          </a:xfrm>
-          <a:prstGeom prst="roundRect">
-            <a:avLst>
-              <a:gd name="adj" fmla="val 6061"/>
-            </a:avLst>
-          </a:prstGeom>
-          <a:solidFill>
-            <a:srgbClr val="F4F7F9"/>
-          </a:solidFill>
-          <a:ln w="12700">
-            <a:solidFill>
-              <a:srgbClr val="F4F7F9"/>
-            </a:solidFill>
-            <a:prstDash val="solid"/>
-          </a:ln>
-          <a:effectLst>
-            <a:outerShdw sx="100000" sy="100000" kx="0" ky="0" algn="bl" rotWithShape="0" blurRad="127000" dist="508" dir="5400000">
-              <a:srgbClr val="9AA8B4">
-                <a:alpha val="25000"/>
-              </a:srgbClr>
-            </a:outerShdw>
-          </a:effectLst>
-        </p:spPr>
-      </p:sp>
-      <p:sp>
-        <p:nvSpPr>
-          <p:cNvPr id="17" name="Shape 15"/>
-          <p:cNvSpPr/>
-          <p:nvPr/>
-        </p:nvSpPr>
-        <p:spPr>
-          <a:xfrm>
-            <a:off x="6949440" y="3730752"/>
-            <a:ext cx="274320" cy="274320"/>
-          </a:xfrm>
-          <a:prstGeom prst="ellipse">
-            <a:avLst/>
-          </a:prstGeom>
-          <a:solidFill>
-            <a:srgbClr val="FF6B5E"/>
-          </a:solidFill>
-          <a:ln/>
-        </p:spPr>
-      </p:sp>
-      <p:sp>
-        <p:nvSpPr>
-          <p:cNvPr id="18" name="Text 16"/>
-          <p:cNvSpPr txBox="1"/>
-          <p:nvPr/>
-        </p:nvSpPr>
-        <p:spPr>
-          <a:xfrm>
-            <a:off x="7360920" y="3675888"/>
-            <a:ext cx="3931920" cy="320040"/>
-          </a:xfrm>
-          <a:prstGeom prst="rect">
-            <a:avLst/>
-          </a:prstGeom>
-          <a:noFill/>
-          <a:ln/>
-        </p:spPr>
-        <p:txBody>
-          <a:bodyPr wrap="square" lIns="0" tIns="0" rIns="0" bIns="0" rtlCol="0" anchor="ctr"/>
-          <a:lstStyle/>
-          <a:p>
-            <a:pPr indent="0" marL="0">
-              <a:buNone/>
-            </a:pPr>
-            <a:r>
-              <a:rPr lang="en-US" sz="1400" b="1" dirty="0">
-                <a:solidFill>
-                  <a:srgbClr val="102A43"/>
-                </a:solidFill>
-                <a:latin typeface="Arial" pitchFamily="34" charset="0"/>
-                <a:ea typeface="Arial" pitchFamily="34" charset="-122"/>
-                <a:cs typeface="Arial" pitchFamily="34" charset="-120"/>
-              </a:rPr>
-              <a:t>Not yet proven in production</a:t>
-            </a:r>
-            <a:endParaRPr lang="en-US" sz="1400" dirty="0"/>
-          </a:p>
-        </p:txBody>
-      </p:sp>
-      <p:sp>
-        <p:nvSpPr>
-          <p:cNvPr id="19" name="Text 17"/>
-          <p:cNvSpPr txBox="1"/>
-          <p:nvPr/>
-        </p:nvSpPr>
-        <p:spPr>
-          <a:xfrm>
-            <a:off x="7360920" y="4023360"/>
-            <a:ext cx="3886200" cy="566928"/>
-          </a:xfrm>
-          <a:prstGeom prst="rect">
-            <a:avLst/>
-          </a:prstGeom>
-          <a:noFill/>
-          <a:ln/>
-        </p:spPr>
-        <p:txBody>
-          <a:bodyPr wrap="square" lIns="0" tIns="0" rIns="0" bIns="0" rtlCol="0" anchor="ctr"/>
-          <a:lstStyle/>
-          <a:p>
-            <a:pPr indent="0" marL="0">
+              <a:t>The report type has no field for a person. Size, participation, active count, median, suppression flag. A client asking for a name does not compile.</a:t>
+            </a:r>
+            <a:endParaRPr lang="en-US" sz="1200" dirty="0"/>
+          </a:p>
+          <a:p>
+            <a:pPr marL="342900" indent="-342900">
               <a:lnSpc>
-                <a:spcPts val="1600"/>
+                <a:spcPts val="1700"/>
               </a:lnSpc>
-              <a:buNone/>
-            </a:pPr>
-            <a:r>
-              <a:rPr lang="en-US" sz="1150" dirty="0">
-                <a:solidFill>
-                  <a:srgbClr val="475663"/>
+              <a:spcAft>
+                <a:spcPts val="1200"/>
+              </a:spcAft>
+              <a:buSzPct val="100000"/>
+              <a:buChar char="•"/>
+            </a:pPr>
+            <a:r>
+              <a:rPr lang="en-US" sz="1200" dirty="0">
+                <a:solidFill>
+                  <a:srgbClr val="D6E2EA"/>
                 </a:solidFill>
                 <a:latin typeface="Calibri" pitchFamily="34" charset="0"/>
                 <a:ea typeface="Calibri" pitchFamily="34" charset="-122"/>
                 <a:cs typeface="Calibri" pitchFamily="34" charset="-120"/>
               </a:rPr>
-              <a:t>No organisation has run a cohort. Any figure we showed you would be invented.</a:t>
-            </a:r>
-            <a:endParaRPr lang="en-US" sz="1150" dirty="0"/>
-          </a:p>
-        </p:txBody>
-      </p:sp>
-      <p:sp>
-        <p:nvSpPr>
-          <p:cNvPr id="20" name="Shape 18"/>
-          <p:cNvSpPr/>
-          <p:nvPr/>
-        </p:nvSpPr>
-        <p:spPr>
-          <a:xfrm>
-            <a:off x="6720840" y="4846320"/>
-            <a:ext cx="4709160" cy="1207008"/>
-          </a:xfrm>
-          <a:prstGeom prst="roundRect">
-            <a:avLst>
-              <a:gd name="adj" fmla="val 6061"/>
-            </a:avLst>
-          </a:prstGeom>
-          <a:solidFill>
-            <a:srgbClr val="F4F7F9"/>
-          </a:solidFill>
-          <a:ln w="12700">
-            <a:solidFill>
-              <a:srgbClr val="F4F7F9"/>
-            </a:solidFill>
-            <a:prstDash val="solid"/>
-          </a:ln>
-          <a:effectLst>
-            <a:outerShdw sx="100000" sy="100000" kx="0" ky="0" algn="bl" rotWithShape="0" blurRad="127000" dist="508" dir="5400000">
-              <a:srgbClr val="9AA8B4">
-                <a:alpha val="25000"/>
-              </a:srgbClr>
-            </a:outerShdw>
-          </a:effectLst>
-        </p:spPr>
-      </p:sp>
-      <p:sp>
-        <p:nvSpPr>
-          <p:cNvPr id="21" name="Shape 19"/>
-          <p:cNvSpPr/>
-          <p:nvPr/>
-        </p:nvSpPr>
-        <p:spPr>
-          <a:xfrm>
-            <a:off x="6949440" y="5102352"/>
-            <a:ext cx="274320" cy="274320"/>
-          </a:xfrm>
-          <a:prstGeom prst="ellipse">
-            <a:avLst/>
-          </a:prstGeom>
-          <a:solidFill>
-            <a:srgbClr val="B7E436"/>
-          </a:solidFill>
-          <a:ln/>
-        </p:spPr>
-      </p:sp>
-      <p:sp>
-        <p:nvSpPr>
-          <p:cNvPr id="22" name="Text 20"/>
-          <p:cNvSpPr txBox="1"/>
-          <p:nvPr/>
-        </p:nvSpPr>
-        <p:spPr>
-          <a:xfrm>
-            <a:off x="7360920" y="5047488"/>
-            <a:ext cx="3931920" cy="320040"/>
-          </a:xfrm>
-          <a:prstGeom prst="rect">
-            <a:avLst/>
-          </a:prstGeom>
-          <a:noFill/>
-          <a:ln/>
-        </p:spPr>
-        <p:txBody>
-          <a:bodyPr wrap="square" lIns="0" tIns="0" rIns="0" bIns="0" rtlCol="0" anchor="ctr"/>
-          <a:lstStyle/>
-          <a:p>
-            <a:pPr indent="0" marL="0">
-              <a:buNone/>
-            </a:pPr>
-            <a:r>
-              <a:rPr lang="en-US" sz="1400" b="1" dirty="0">
-                <a:solidFill>
-                  <a:srgbClr val="102A43"/>
-                </a:solidFill>
-                <a:latin typeface="Arial" pitchFamily="34" charset="0"/>
-                <a:ea typeface="Arial" pitchFamily="34" charset="-122"/>
-                <a:cs typeface="Arial" pitchFamily="34" charset="-120"/>
-              </a:rPr>
-              <a:t>What we want</a:t>
-            </a:r>
-            <a:endParaRPr lang="en-US" sz="1400" dirty="0"/>
-          </a:p>
-        </p:txBody>
-      </p:sp>
-      <p:sp>
-        <p:nvSpPr>
-          <p:cNvPr id="23" name="Text 21"/>
-          <p:cNvSpPr txBox="1"/>
-          <p:nvPr/>
-        </p:nvSpPr>
-        <p:spPr>
-          <a:xfrm>
-            <a:off x="7360920" y="5394960"/>
-            <a:ext cx="3886200" cy="566928"/>
-          </a:xfrm>
-          <a:prstGeom prst="rect">
-            <a:avLst/>
-          </a:prstGeom>
-          <a:noFill/>
-          <a:ln/>
-        </p:spPr>
-        <p:txBody>
-          <a:bodyPr wrap="square" lIns="0" tIns="0" rIns="0" bIns="0" rtlCol="0" anchor="ctr"/>
-          <a:lstStyle/>
-          <a:p>
-            <a:pPr indent="0" marL="0">
+              <a:t>Permissions get granted when somebody senior asks. There is no permission to grant. Adding one means a schema change, a migration and a code review.</a:t>
+            </a:r>
+            <a:endParaRPr lang="en-US" sz="1200" dirty="0"/>
+          </a:p>
+          <a:p>
+            <a:pPr marL="342900" indent="-342900">
               <a:lnSpc>
-                <a:spcPts val="1600"/>
+                <a:spcPts val="1700"/>
               </a:lnSpc>
-              <a:buNone/>
-            </a:pPr>
-            <a:r>
-              <a:rPr lang="en-US" sz="1150" dirty="0">
-                <a:solidFill>
-                  <a:srgbClr val="475663"/>
+              <a:buSzPct val="100000"/>
+              <a:buChar char="•"/>
+            </a:pPr>
+            <a:r>
+              <a:rPr lang="en-US" sz="1200" dirty="0">
+                <a:solidFill>
+                  <a:srgbClr val="D6E2EA"/>
                 </a:solidFill>
                 <a:latin typeface="Calibri" pitchFamily="34" charset="0"/>
                 <a:ea typeface="Calibri" pitchFamily="34" charset="-122"/>
                 <a:cs typeface="Calibri" pitchFamily="34" charset="-120"/>
               </a:rPr>
-              <a:t>Three to five design partners. Real employees, real calendars, real feedback.</a:t>
-            </a:r>
-            <a:endParaRPr lang="en-US" sz="1150" dirty="0"/>
+              <a:t>A cohort figure needs 8 contributing people. Below that it is null — not rounded, not estimated, not "approximately".</a:t>
+            </a:r>
+            <a:endParaRPr lang="en-US" sz="1200" dirty="0"/>
           </a:p>
         </p:txBody>
       </p:sp>
@@ -4967,7 +4600,7 @@
                 <a:ea typeface="Arial" pitchFamily="34" charset="-122"/>
                 <a:cs typeface="Arial" pitchFamily="34" charset="-120"/>
               </a:rPr>
-              <a:t>THE PROBLEM YOU ALREADY HAVE</a:t>
+              <a:t>WHY THE LAST ONE FAILED</a:t>
             </a:r>
             <a:endParaRPr lang="en-US" sz="1200" dirty="0"/>
           </a:p>
@@ -5006,24 +4639,7 @@
                 <a:ea typeface="Cambria" pitchFamily="34" charset="-122"/>
                 <a:cs typeface="Cambria" pitchFamily="34" charset="-120"/>
               </a:rPr>
-              <a:t>Your people sit down at nine</a:t>
-            </a:r>
-            <a:endParaRPr lang="en-US" sz="3800" dirty="0"/>
-          </a:p>
-          <a:p>
-            <a:pPr indent="0" marL="0">
-              <a:buNone/>
-            </a:pPr>
-            <a:r>
-              <a:rPr lang="en-US" sz="3800" b="1" dirty="0">
-                <a:solidFill>
-                  <a:srgbClr val="102A43"/>
-                </a:solidFill>
-                <a:latin typeface="Cambria" pitchFamily="34" charset="0"/>
-                <a:ea typeface="Cambria" pitchFamily="34" charset="-122"/>
-                <a:cs typeface="Cambria" pitchFamily="34" charset="-120"/>
-              </a:rPr>
-              <a:t>and stand up at five.</a:t>
+              <a:t>You have bought this before.</a:t>
             </a:r>
             <a:endParaRPr lang="en-US" sz="3800" dirty="0"/>
           </a:p>
@@ -5037,12 +4653,12 @@
         </p:nvSpPr>
         <p:spPr>
           <a:xfrm>
-            <a:off x="731520" y="2651760"/>
-            <a:ext cx="3502152" cy="2514600"/>
+            <a:off x="731520" y="2377440"/>
+            <a:ext cx="3502152" cy="2377440"/>
           </a:xfrm>
           <a:prstGeom prst="roundRect">
             <a:avLst>
-              <a:gd name="adj" fmla="val 2909"/>
+              <a:gd name="adj" fmla="val 3077"/>
             </a:avLst>
           </a:prstGeom>
           <a:solidFill>
@@ -5071,24 +4687,24 @@
         </p:nvSpPr>
         <p:spPr>
           <a:xfrm>
-            <a:off x="1051560" y="2926080"/>
-            <a:ext cx="2880360" cy="731520"/>
-          </a:xfrm>
-          <a:prstGeom prst="rect">
-            <a:avLst/>
-          </a:prstGeom>
-          <a:noFill/>
-          <a:ln/>
-        </p:spPr>
-        <p:txBody>
-          <a:bodyPr wrap="square" lIns="0" tIns="0" rIns="0" bIns="0" rtlCol="0" anchor="ctr"/>
-          <a:lstStyle/>
-          <a:p>
-            <a:pPr indent="0" marL="0">
-              <a:buNone/>
-            </a:pPr>
-            <a:r>
-              <a:rPr lang="en-US" sz="1600" b="1" dirty="0">
+            <a:off x="1051560" y="2651760"/>
+            <a:ext cx="2880360" cy="411480"/>
+          </a:xfrm>
+          <a:prstGeom prst="rect">
+            <a:avLst/>
+          </a:prstGeom>
+          <a:noFill/>
+          <a:ln/>
+        </p:spPr>
+        <p:txBody>
+          <a:bodyPr wrap="square" lIns="0" tIns="0" rIns="0" bIns="0" rtlCol="0" anchor="ctr"/>
+          <a:lstStyle/>
+          <a:p>
+            <a:pPr indent="0" marL="0">
+              <a:buNone/>
+            </a:pPr>
+            <a:r>
+              <a:rPr lang="en-US" sz="1800" b="1" dirty="0">
                 <a:solidFill>
                   <a:srgbClr val="102A43"/>
                 </a:solidFill>
@@ -5096,9 +4712,9 @@
                 <a:ea typeface="Cambria" pitchFamily="34" charset="-122"/>
                 <a:cs typeface="Cambria" pitchFamily="34" charset="-120"/>
               </a:rPr>
-              <a:t>The programme nobody opens</a:t>
-            </a:r>
-            <a:endParaRPr lang="en-US" sz="1600" dirty="0"/>
+              <a:t>Nobody opened it</a:t>
+            </a:r>
+            <a:endParaRPr lang="en-US" sz="1800" dirty="0"/>
           </a:p>
         </p:txBody>
       </p:sp>
@@ -5110,8 +4726,8 @@
         </p:nvSpPr>
         <p:spPr>
           <a:xfrm>
-            <a:off x="1051560" y="3703320"/>
-            <a:ext cx="2880360" cy="1280160"/>
+            <a:off x="1051560" y="3200400"/>
+            <a:ext cx="2880360" cy="1371600"/>
           </a:xfrm>
           <a:prstGeom prst="rect">
             <a:avLst/>
@@ -5138,7 +4754,7 @@
                 <a:ea typeface="Calibri" pitchFamily="34" charset="-122"/>
                 <a:cs typeface="Calibri" pitchFamily="34" charset="-120"/>
               </a:rPr>
-              <a:t>A wellbeing app is bought, announced, used enthusiastically for two weeks, and then quietly abandoned. Renewal becomes a conversation about why.</a:t>
+              <a:t>Bought, announced, used enthusiastically for a fortnight, quietly abandoned. Renewal becomes a conversation about why.</a:t>
             </a:r>
             <a:endParaRPr lang="en-US" sz="1250" dirty="0"/>
           </a:p>
@@ -5152,12 +4768,12 @@
         </p:nvSpPr>
         <p:spPr>
           <a:xfrm>
-            <a:off x="4389120" y="2651760"/>
-            <a:ext cx="3502152" cy="2514600"/>
+            <a:off x="4389120" y="2377440"/>
+            <a:ext cx="3502152" cy="2377440"/>
           </a:xfrm>
           <a:prstGeom prst="roundRect">
             <a:avLst>
-              <a:gd name="adj" fmla="val 2909"/>
+              <a:gd name="adj" fmla="val 3077"/>
             </a:avLst>
           </a:prstGeom>
           <a:solidFill>
@@ -5186,24 +4802,24 @@
         </p:nvSpPr>
         <p:spPr>
           <a:xfrm>
-            <a:off x="4709160" y="2926080"/>
-            <a:ext cx="2880360" cy="731520"/>
-          </a:xfrm>
-          <a:prstGeom prst="rect">
-            <a:avLst/>
-          </a:prstGeom>
-          <a:noFill/>
-          <a:ln/>
-        </p:spPr>
-        <p:txBody>
-          <a:bodyPr wrap="square" lIns="0" tIns="0" rIns="0" bIns="0" rtlCol="0" anchor="ctr"/>
-          <a:lstStyle/>
-          <a:p>
-            <a:pPr indent="0" marL="0">
-              <a:buNone/>
-            </a:pPr>
-            <a:r>
-              <a:rPr lang="en-US" sz="1600" b="1" dirty="0">
+            <a:off x="4709160" y="2651760"/>
+            <a:ext cx="2880360" cy="411480"/>
+          </a:xfrm>
+          <a:prstGeom prst="rect">
+            <a:avLst/>
+          </a:prstGeom>
+          <a:noFill/>
+          <a:ln/>
+        </p:spPr>
+        <p:txBody>
+          <a:bodyPr wrap="square" lIns="0" tIns="0" rIns="0" bIns="0" rtlCol="0" anchor="ctr"/>
+          <a:lstStyle/>
+          <a:p>
+            <a:pPr indent="0" marL="0">
+              <a:buNone/>
+            </a:pPr>
+            <a:r>
+              <a:rPr lang="en-US" sz="1800" b="1" dirty="0">
                 <a:solidFill>
                   <a:srgbClr val="102A43"/>
                 </a:solidFill>
@@ -5211,9 +4827,9 @@
                 <a:ea typeface="Cambria" pitchFamily="34" charset="-122"/>
                 <a:cs typeface="Cambria" pitchFamily="34" charset="-120"/>
               </a:rPr>
-              <a:t>The programme nobody trusts</a:t>
-            </a:r>
-            <a:endParaRPr lang="en-US" sz="1600" dirty="0"/>
+              <a:t>Nobody trusted it</a:t>
+            </a:r>
+            <a:endParaRPr lang="en-US" sz="1800" dirty="0"/>
           </a:p>
         </p:txBody>
       </p:sp>
@@ -5225,8 +4841,8 @@
         </p:nvSpPr>
         <p:spPr>
           <a:xfrm>
-            <a:off x="4709160" y="3703320"/>
-            <a:ext cx="2880360" cy="1280160"/>
+            <a:off x="4709160" y="3200400"/>
+            <a:ext cx="2880360" cy="1371600"/>
           </a:xfrm>
           <a:prstGeom prst="rect">
             <a:avLst/>
@@ -5253,7 +4869,7 @@
                 <a:ea typeface="Calibri" pitchFamily="34" charset="-122"/>
                 <a:cs typeface="Calibri" pitchFamily="34" charset="-120"/>
               </a:rPr>
-              <a:t>Anything that can show an individual’s activity to their employer will eventually be asked to. Your people know that, and behave accordingly.</a:t>
+              <a:t>Anything that can show an employer one person’s activity eventually will. Your people assume that, and behave accordingly.</a:t>
             </a:r>
             <a:endParaRPr lang="en-US" sz="1250" dirty="0"/>
           </a:p>
@@ -5267,12 +4883,12 @@
         </p:nvSpPr>
         <p:spPr>
           <a:xfrm>
-            <a:off x="8046720" y="2651760"/>
-            <a:ext cx="3502152" cy="2514600"/>
+            <a:off x="8046720" y="2377440"/>
+            <a:ext cx="3502152" cy="2377440"/>
           </a:xfrm>
           <a:prstGeom prst="roundRect">
             <a:avLst>
-              <a:gd name="adj" fmla="val 2909"/>
+              <a:gd name="adj" fmla="val 3077"/>
             </a:avLst>
           </a:prstGeom>
           <a:solidFill>
@@ -5301,24 +4917,24 @@
         </p:nvSpPr>
         <p:spPr>
           <a:xfrm>
-            <a:off x="8366760" y="2926080"/>
-            <a:ext cx="2880360" cy="731520"/>
-          </a:xfrm>
-          <a:prstGeom prst="rect">
-            <a:avLst/>
-          </a:prstGeom>
-          <a:noFill/>
-          <a:ln/>
-        </p:spPr>
-        <p:txBody>
-          <a:bodyPr wrap="square" lIns="0" tIns="0" rIns="0" bIns="0" rtlCol="0" anchor="ctr"/>
-          <a:lstStyle/>
-          <a:p>
-            <a:pPr indent="0" marL="0">
-              <a:buNone/>
-            </a:pPr>
-            <a:r>
-              <a:rPr lang="en-US" sz="1600" b="1" dirty="0">
+            <a:off x="8366760" y="2651760"/>
+            <a:ext cx="2880360" cy="411480"/>
+          </a:xfrm>
+          <a:prstGeom prst="rect">
+            <a:avLst/>
+          </a:prstGeom>
+          <a:noFill/>
+          <a:ln/>
+        </p:spPr>
+        <p:txBody>
+          <a:bodyPr wrap="square" lIns="0" tIns="0" rIns="0" bIns="0" rtlCol="0" anchor="ctr"/>
+          <a:lstStyle/>
+          <a:p>
+            <a:pPr indent="0" marL="0">
+              <a:buNone/>
+            </a:pPr>
+            <a:r>
+              <a:rPr lang="en-US" sz="1800" b="1" dirty="0">
                 <a:solidFill>
                   <a:srgbClr val="102A43"/>
                 </a:solidFill>
@@ -5326,9 +4942,9 @@
                 <a:ea typeface="Cambria" pitchFamily="34" charset="-122"/>
                 <a:cs typeface="Cambria" pitchFamily="34" charset="-120"/>
               </a:rPr>
-              <a:t>The programme that excludes</a:t>
-            </a:r>
-            <a:endParaRPr lang="en-US" sz="1600" dirty="0"/>
+              <a:t>It paid the already-fit</a:t>
+            </a:r>
+            <a:endParaRPr lang="en-US" sz="1800" dirty="0"/>
           </a:p>
         </p:txBody>
       </p:sp>
@@ -5340,8 +4956,8 @@
         </p:nvSpPr>
         <p:spPr>
           <a:xfrm>
-            <a:off x="8366760" y="3703320"/>
-            <a:ext cx="2880360" cy="1280160"/>
+            <a:off x="8366760" y="3200400"/>
+            <a:ext cx="2880360" cy="1371600"/>
           </a:xfrm>
           <a:prstGeom prst="rect">
             <a:avLst/>
@@ -5368,7 +4984,7 @@
                 <a:ea typeface="Calibri" pitchFamily="34" charset="-122"/>
                 <a:cs typeface="Calibri" pitchFamily="34" charset="-120"/>
               </a:rPr>
-              <a:t>Step challenges reward the people who were already fit. The employee who most needs it is the one who cannot take part.</a:t>
+              <a:t>Step challenges reward the people who needed them least. The employee who needed it most could not take part.</a:t>
             </a:r>
             <a:endParaRPr lang="en-US" sz="1250" dirty="0"/>
           </a:p>
@@ -5376,40 +4992,77 @@
       </p:sp>
       <p:sp>
         <p:nvSpPr>
-          <p:cNvPr id="14" name="Text 12"/>
-          <p:cNvSpPr txBox="1"/>
-          <p:nvPr/>
-        </p:nvSpPr>
-        <p:spPr>
-          <a:xfrm>
-            <a:off x="731520" y="5532120"/>
-            <a:ext cx="10698480" cy="457200"/>
-          </a:xfrm>
-          <a:prstGeom prst="rect">
-            <a:avLst/>
-          </a:prstGeom>
-          <a:noFill/>
-          <a:ln/>
-        </p:spPr>
-        <p:txBody>
-          <a:bodyPr wrap="square" lIns="0" tIns="0" rIns="0" bIns="0" rtlCol="0" anchor="ctr"/>
-          <a:lstStyle/>
-          <a:p>
-            <a:pPr indent="0" marL="0">
-              <a:buNone/>
-            </a:pPr>
-            <a:r>
-              <a:rPr lang="en-US" sz="1300" i="1" dirty="0">
-                <a:solidFill>
-                  <a:srgbClr val="475663"/>
+          <p:cNvPr id="14" name="Shape 12"/>
+          <p:cNvSpPr/>
+          <p:nvPr/>
+        </p:nvSpPr>
+        <p:spPr>
+          <a:xfrm>
+            <a:off x="731520" y="5029200"/>
+            <a:ext cx="10698480" cy="1005840"/>
+          </a:xfrm>
+          <a:prstGeom prst="roundRect">
+            <a:avLst>
+              <a:gd name="adj" fmla="val 7273"/>
+            </a:avLst>
+          </a:prstGeom>
+          <a:solidFill>
+            <a:srgbClr val="102A43"/>
+          </a:solidFill>
+          <a:ln w="12700">
+            <a:solidFill>
+              <a:srgbClr val="102A43"/>
+            </a:solidFill>
+            <a:prstDash val="solid"/>
+          </a:ln>
+          <a:effectLst>
+            <a:outerShdw sx="100000" sy="100000" kx="0" ky="0" algn="bl" rotWithShape="0" blurRad="127000" dist="508" dir="5400000">
+              <a:srgbClr val="9AA8B4">
+                <a:alpha val="25000"/>
+              </a:srgbClr>
+            </a:outerShdw>
+          </a:effectLst>
+        </p:spPr>
+      </p:sp>
+      <p:sp>
+        <p:nvSpPr>
+          <p:cNvPr id="15" name="Text 13"/>
+          <p:cNvSpPr txBox="1"/>
+          <p:nvPr/>
+        </p:nvSpPr>
+        <p:spPr>
+          <a:xfrm>
+            <a:off x="1097280" y="5285232"/>
+            <a:ext cx="9966960" cy="548640"/>
+          </a:xfrm>
+          <a:prstGeom prst="rect">
+            <a:avLst/>
+          </a:prstGeom>
+          <a:noFill/>
+          <a:ln/>
+        </p:spPr>
+        <p:txBody>
+          <a:bodyPr wrap="square" lIns="0" tIns="0" rIns="0" bIns="0" rtlCol="0" anchor="ctr"/>
+          <a:lstStyle/>
+          <a:p>
+            <a:pPr indent="0" marL="0">
+              <a:lnSpc>
+                <a:spcPts val="2000"/>
+              </a:lnSpc>
+              <a:buNone/>
+            </a:pPr>
+            <a:r>
+              <a:rPr lang="en-US" sz="1400" dirty="0">
+                <a:solidFill>
+                  <a:srgbClr val="FFFFFF"/>
                 </a:solidFill>
                 <a:latin typeface="Calibri" pitchFamily="34" charset="0"/>
                 <a:ea typeface="Calibri" pitchFamily="34" charset="-122"/>
                 <a:cs typeface="Calibri" pitchFamily="34" charset="-120"/>
               </a:rPr>
-              <a:t>We have built for the second and third of these deliberately, because they are the ones a platform can actually decide.</a:t>
-            </a:r>
-            <a:endParaRPr lang="en-US" sz="1300" dirty="0"/>
+              <a:t>The second and third are architecture, not effort. No amount of internal comms fixes either one, and both were decided before a line of interface was written.</a:t>
+            </a:r>
+            <a:endParaRPr lang="en-US" sz="1400" dirty="0"/>
           </a:p>
         </p:txBody>
       </p:sp>
@@ -5427,7 +5080,7 @@
     <p:bg>
       <p:bgPr>
         <a:solidFill>
-          <a:srgbClr val="102A43"/>
+          <a:srgbClr val="FFFFFF"/>
         </a:solidFill>
       </p:bgPr>
     </p:bg>
@@ -5460,7 +5113,7 @@
             <a:avLst/>
           </a:prstGeom>
           <a:solidFill>
-            <a:srgbClr val="B7E436"/>
+            <a:srgbClr val="00A99D"/>
           </a:solidFill>
           <a:ln/>
         </p:spPr>
@@ -5492,13 +5145,13 @@
             <a:r>
               <a:rPr lang="en-US" sz="1200" b="1" spc="200" kern="0" dirty="0">
                 <a:solidFill>
-                  <a:srgbClr val="B7E436"/>
+                  <a:srgbClr val="00A99D"/>
                 </a:solidFill>
                 <a:latin typeface="Arial" pitchFamily="34" charset="0"/>
                 <a:ea typeface="Arial" pitchFamily="34" charset="-122"/>
                 <a:cs typeface="Arial" pitchFamily="34" charset="-120"/>
               </a:rPr>
-              <a:t>THE PROCUREMENT QUESTION</a:t>
+              <a:t>WHY ENGAGEMENT DOES NOT DECAY</a:t>
             </a:r>
             <a:endParaRPr lang="en-US" sz="1200" dirty="0"/>
           </a:p>
@@ -5531,33 +5184,16 @@
             <a:r>
               <a:rPr lang="en-US" sz="3800" b="1" dirty="0">
                 <a:solidFill>
-                  <a:srgbClr val="FFFFFF"/>
+                  <a:srgbClr val="102A43"/>
                 </a:solidFill>
                 <a:latin typeface="Cambria" pitchFamily="34" charset="0"/>
                 <a:ea typeface="Cambria" pitchFamily="34" charset="-122"/>
                 <a:cs typeface="Cambria" pitchFamily="34" charset="-120"/>
               </a:rPr>
-              <a:t>Can an employer see one</a:t>
+              <a:t>It knows when to say nothing.</a:t>
             </a:r>
             <a:endParaRPr lang="en-US" sz="3800" dirty="0"/>
           </a:p>
-          <a:p>
-            <a:pPr indent="0" marL="0">
-              <a:buNone/>
-            </a:pPr>
-            <a:r>
-              <a:rPr lang="en-US" sz="3800" b="1" dirty="0">
-                <a:solidFill>
-                  <a:srgbClr val="FFFFFF"/>
-                </a:solidFill>
-                <a:latin typeface="Cambria" pitchFamily="34" charset="0"/>
-                <a:ea typeface="Cambria" pitchFamily="34" charset="-122"/>
-                <a:cs typeface="Cambria" pitchFamily="34" charset="-120"/>
-              </a:rPr>
-              <a:t>named person’s activity?</a:t>
-            </a:r>
-            <a:endParaRPr lang="en-US" sz="3800" dirty="0"/>
-          </a:p>
         </p:txBody>
       </p:sp>
       <p:sp>
@@ -5568,47 +5204,8 @@
         </p:nvSpPr>
         <p:spPr>
           <a:xfrm>
-            <a:off x="731520" y="2697480"/>
-            <a:ext cx="2743200" cy="1188720"/>
-          </a:xfrm>
-          <a:prstGeom prst="rect">
-            <a:avLst/>
-          </a:prstGeom>
-          <a:noFill/>
-          <a:ln/>
-        </p:spPr>
-        <p:txBody>
-          <a:bodyPr wrap="square" lIns="0" tIns="0" rIns="0" bIns="0" rtlCol="0" anchor="ctr"/>
-          <a:lstStyle/>
-          <a:p>
-            <a:pPr indent="0" marL="0">
-              <a:buNone/>
-            </a:pPr>
-            <a:r>
-              <a:rPr lang="en-US" sz="9200" b="1" dirty="0">
-                <a:solidFill>
-                  <a:srgbClr val="B7E436"/>
-                </a:solidFill>
-                <a:latin typeface="Cambria" pitchFamily="34" charset="0"/>
-                <a:ea typeface="Cambria" pitchFamily="34" charset="-122"/>
-                <a:cs typeface="Cambria" pitchFamily="34" charset="-120"/>
-              </a:rPr>
-              <a:t>No.</a:t>
-            </a:r>
-            <a:endParaRPr lang="en-US" sz="9200" dirty="0"/>
-          </a:p>
-        </p:txBody>
-      </p:sp>
-      <p:sp>
-        <p:nvSpPr>
-          <p:cNvPr id="6" name="Text 4"/>
-          <p:cNvSpPr txBox="1"/>
-          <p:nvPr/>
-        </p:nvSpPr>
-        <p:spPr>
-          <a:xfrm>
-            <a:off x="731520" y="3886200"/>
-            <a:ext cx="4754880" cy="731520"/>
+            <a:off x="731520" y="2103120"/>
+            <a:ext cx="5669280" cy="1371600"/>
           </a:xfrm>
           <a:prstGeom prst="rect">
             <a:avLst/>
@@ -5622,20 +5219,59 @@
           <a:p>
             <a:pPr indent="0" marL="0">
               <a:lnSpc>
-                <a:spcPts val="2200"/>
+                <a:spcPts val="2300"/>
               </a:lnSpc>
               <a:buNone/>
             </a:pPr>
             <a:r>
-              <a:rPr lang="en-US" sz="1500" dirty="0">
-                <a:solidFill>
-                  <a:srgbClr val="FFFFFF"/>
+              <a:rPr lang="en-US" sz="1450" dirty="0">
+                <a:solidFill>
+                  <a:srgbClr val="475663"/>
                 </a:solidFill>
                 <a:latin typeface="Calibri" pitchFamily="34" charset="0"/>
                 <a:ea typeface="Calibri" pitchFamily="34" charset="-122"/>
                 <a:cs typeface="Calibri" pitchFamily="34" charset="-120"/>
               </a:rPr>
-              <a:t>Not restricted. Not audited. Not available to a super-admin.</a:t>
+              <a:t>A prompt delivered while somebody is driving costs attention, then trust, then the notification switch. After that the programme is over however good the advice was. So a block counts here as a success, not a failed delivery.</a:t>
+            </a:r>
+            <a:endParaRPr lang="en-US" sz="1450" dirty="0"/>
+          </a:p>
+        </p:txBody>
+      </p:sp>
+      <p:sp>
+        <p:nvSpPr>
+          <p:cNvPr id="6" name="Text 4"/>
+          <p:cNvSpPr txBox="1"/>
+          <p:nvPr/>
+        </p:nvSpPr>
+        <p:spPr>
+          <a:xfrm>
+            <a:off x="731520" y="3657600"/>
+            <a:ext cx="5486400" cy="365760"/>
+          </a:xfrm>
+          <a:prstGeom prst="rect">
+            <a:avLst/>
+          </a:prstGeom>
+          <a:noFill/>
+          <a:ln/>
+        </p:spPr>
+        <p:txBody>
+          <a:bodyPr wrap="square" lIns="0" tIns="0" rIns="0" bIns="0" rtlCol="0" anchor="ctr"/>
+          <a:lstStyle/>
+          <a:p>
+            <a:pPr indent="0" marL="0">
+              <a:buNone/>
+            </a:pPr>
+            <a:r>
+              <a:rPr lang="en-US" sz="1500" b="1" dirty="0">
+                <a:solidFill>
+                  <a:srgbClr val="102A43"/>
+                </a:solidFill>
+                <a:latin typeface="Arial" pitchFamily="34" charset="0"/>
+                <a:ea typeface="Arial" pitchFamily="34" charset="-122"/>
+                <a:cs typeface="Arial" pitchFamily="34" charset="-120"/>
+              </a:rPr>
+              <a:t>What silences a prompt</a:t>
             </a:r>
             <a:endParaRPr lang="en-US" sz="1500" dirty="0"/>
           </a:p>
@@ -5649,121 +5285,144 @@
         </p:nvSpPr>
         <p:spPr>
           <a:xfrm>
-            <a:off x="731520" y="4892040"/>
-            <a:ext cx="4206240" cy="274320"/>
-          </a:xfrm>
-          <a:prstGeom prst="rect">
-            <a:avLst/>
-          </a:prstGeom>
-          <a:noFill/>
-          <a:ln/>
-        </p:spPr>
-        <p:txBody>
-          <a:bodyPr wrap="square" lIns="0" tIns="0" rIns="0" bIns="0" rtlCol="0" anchor="ctr"/>
-          <a:lstStyle/>
-          <a:p>
-            <a:pPr indent="0" marL="0">
-              <a:buNone/>
-            </a:pPr>
-            <a:r>
-              <a:rPr lang="en-US" sz="1300" b="1" dirty="0">
-                <a:solidFill>
-                  <a:srgbClr val="B7E436"/>
-                </a:solidFill>
-                <a:latin typeface="Courier New" pitchFamily="34" charset="0"/>
-                <a:ea typeface="Courier New" pitchFamily="34" charset="-122"/>
-                <a:cs typeface="Courier New" pitchFamily="34" charset="-120"/>
-              </a:rPr>
-              <a:t>OrganisationReport</a:t>
-            </a:r>
-            <a:endParaRPr lang="en-US" sz="1300" dirty="0"/>
-          </a:p>
-        </p:txBody>
-      </p:sp>
-      <p:sp>
-        <p:nvSpPr>
-          <p:cNvPr id="8" name="Text 6"/>
-          <p:cNvSpPr txBox="1"/>
-          <p:nvPr/>
-        </p:nvSpPr>
-        <p:spPr>
-          <a:xfrm>
-            <a:off x="731520" y="5230368"/>
-            <a:ext cx="4754880" cy="548640"/>
-          </a:xfrm>
-          <a:prstGeom prst="rect">
-            <a:avLst/>
-          </a:prstGeom>
-          <a:noFill/>
-          <a:ln/>
-        </p:spPr>
-        <p:txBody>
-          <a:bodyPr wrap="square" lIns="0" tIns="0" rIns="0" bIns="0" rtlCol="0" anchor="ctr"/>
-          <a:lstStyle/>
-          <a:p>
-            <a:pPr indent="0" marL="0">
-              <a:lnSpc>
-                <a:spcPts val="1800"/>
-              </a:lnSpc>
-              <a:buNone/>
-            </a:pPr>
-            <a:r>
-              <a:rPr lang="en-US" sz="1200" dirty="0">
-                <a:solidFill>
-                  <a:srgbClr val="B8C6D1"/>
+            <a:off x="731520" y="4069080"/>
+            <a:ext cx="5577840" cy="1783080"/>
+          </a:xfrm>
+          <a:prstGeom prst="rect">
+            <a:avLst/>
+          </a:prstGeom>
+          <a:noFill/>
+          <a:ln/>
+        </p:spPr>
+        <p:txBody>
+          <a:bodyPr wrap="square" lIns="0" tIns="0" rIns="0" bIns="0" rtlCol="0" anchor="t"/>
+          <a:lstStyle/>
+          <a:p>
+            <a:pPr marL="342900" indent="-342900">
+              <a:spcAft>
+                <a:spcPts val="600"/>
+              </a:spcAft>
+              <a:buSzPct val="100000"/>
+              <a:buChar char="•"/>
+            </a:pPr>
+            <a:r>
+              <a:rPr lang="en-US" sz="1300" dirty="0">
+                <a:solidFill>
+                  <a:srgbClr val="475663"/>
                 </a:solidFill>
                 <a:latin typeface="Calibri" pitchFamily="34" charset="0"/>
                 <a:ea typeface="Calibri" pitchFamily="34" charset="-122"/>
                 <a:cs typeface="Calibri" pitchFamily="34" charset="-120"/>
               </a:rPr>
-              <a:t>apps/backend/src/groups/groups.logic.ts — the type your</a:t>
-            </a:r>
-            <a:endParaRPr lang="en-US" sz="1200" dirty="0"/>
-          </a:p>
-          <a:p>
-            <a:pPr indent="0" marL="0">
-              <a:lnSpc>
-                <a:spcPts val="1800"/>
-              </a:lnSpc>
-              <a:buNone/>
-            </a:pPr>
-            <a:r>
-              <a:rPr lang="en-US" sz="1200" dirty="0">
-                <a:solidFill>
-                  <a:srgbClr val="B8C6D1"/>
+              <a:t>Driving, from motion state rather than location</a:t>
+            </a:r>
+            <a:endParaRPr lang="en-US" sz="1300" dirty="0"/>
+          </a:p>
+          <a:p>
+            <a:pPr marL="342900" indent="-342900">
+              <a:spcAft>
+                <a:spcPts val="600"/>
+              </a:spcAft>
+              <a:buSzPct val="100000"/>
+              <a:buChar char="•"/>
+            </a:pPr>
+            <a:r>
+              <a:rPr lang="en-US" sz="1300" dirty="0">
+                <a:solidFill>
+                  <a:srgbClr val="475663"/>
                 </a:solidFill>
                 <a:latin typeface="Calibri" pitchFamily="34" charset="0"/>
                 <a:ea typeface="Calibri" pitchFamily="34" charset="-122"/>
                 <a:cs typeface="Calibri" pitchFamily="34" charset="-120"/>
               </a:rPr>
-              <a:t>engineers can read in five minutes.</a:t>
-            </a:r>
-            <a:endParaRPr lang="en-US" sz="1200" dirty="0"/>
-          </a:p>
-        </p:txBody>
-      </p:sp>
-      <p:sp>
-        <p:nvSpPr>
-          <p:cNvPr id="9" name="Shape 7"/>
+              <a:t>On a call, in a lesson, or notifications turned off</a:t>
+            </a:r>
+            <a:endParaRPr lang="en-US" sz="1300" dirty="0"/>
+          </a:p>
+          <a:p>
+            <a:pPr marL="342900" indent="-342900">
+              <a:spcAft>
+                <a:spcPts val="600"/>
+              </a:spcAft>
+              <a:buSzPct val="100000"/>
+              <a:buChar char="•"/>
+            </a:pPr>
+            <a:r>
+              <a:rPr lang="en-US" sz="1300" dirty="0">
+                <a:solidFill>
+                  <a:srgbClr val="475663"/>
+                </a:solidFill>
+                <a:latin typeface="Calibri" pitchFamily="34" charset="0"/>
+                <a:ea typeface="Calibri" pitchFamily="34" charset="-122"/>
+                <a:cs typeface="Calibri" pitchFamily="34" charset="-120"/>
+              </a:rPr>
+              <a:t>The daily cap, which differs by age band</a:t>
+            </a:r>
+            <a:endParaRPr lang="en-US" sz="1300" dirty="0"/>
+          </a:p>
+          <a:p>
+            <a:pPr marL="342900" indent="-342900">
+              <a:spcAft>
+                <a:spcPts val="600"/>
+              </a:spcAft>
+              <a:buSzPct val="100000"/>
+              <a:buChar char="•"/>
+            </a:pPr>
+            <a:r>
+              <a:rPr lang="en-US" sz="1300" dirty="0">
+                <a:solidFill>
+                  <a:srgbClr val="475663"/>
+                </a:solidFill>
+                <a:latin typeface="Calibri" pitchFamily="34" charset="0"/>
+                <a:ea typeface="Calibri" pitchFamily="34" charset="-122"/>
+                <a:cs typeface="Calibri" pitchFamily="34" charset="-120"/>
+              </a:rPr>
+              <a:t>Quiet hours, the sleep window, or an active cooldown</a:t>
+            </a:r>
+            <a:endParaRPr lang="en-US" sz="1300" dirty="0"/>
+          </a:p>
+          <a:p>
+            <a:pPr marL="342900" indent="-342900">
+              <a:buSzPct val="100000"/>
+              <a:buChar char="•"/>
+            </a:pPr>
+            <a:r>
+              <a:rPr lang="en-US" sz="1300" dirty="0">
+                <a:solidFill>
+                  <a:srgbClr val="475663"/>
+                </a:solidFill>
+                <a:latin typeface="Calibri" pitchFamily="34" charset="0"/>
+                <a:ea typeface="Calibri" pitchFamily="34" charset="-122"/>
+                <a:cs typeface="Calibri" pitchFamily="34" charset="-120"/>
+              </a:rPr>
+              <a:t>A clinical rest flag, a safeguarding hold or a bereavement hold</a:t>
+            </a:r>
+            <a:endParaRPr lang="en-US" sz="1300" dirty="0"/>
+          </a:p>
+        </p:txBody>
+      </p:sp>
+      <p:sp>
+        <p:nvSpPr>
+          <p:cNvPr id="8" name="Shape 6"/>
           <p:cNvSpPr/>
           <p:nvPr/>
         </p:nvSpPr>
         <p:spPr>
           <a:xfrm>
-            <a:off x="5760720" y="2377440"/>
-            <a:ext cx="5669280" cy="3566160"/>
+            <a:off x="6675120" y="2103120"/>
+            <a:ext cx="4754880" cy="3749040"/>
           </a:xfrm>
           <a:prstGeom prst="roundRect">
             <a:avLst>
-              <a:gd name="adj" fmla="val 2051"/>
+              <a:gd name="adj" fmla="val 1951"/>
             </a:avLst>
           </a:prstGeom>
           <a:solidFill>
-            <a:srgbClr val="1B3A54"/>
+            <a:srgbClr val="102A43"/>
           </a:solidFill>
           <a:ln w="12700">
             <a:solidFill>
-              <a:srgbClr val="1B3A54"/>
+              <a:srgbClr val="102A43"/>
             </a:solidFill>
             <a:prstDash val="solid"/>
           </a:ln>
@@ -5778,76 +5437,95 @@
       </p:sp>
       <p:sp>
         <p:nvSpPr>
+          <p:cNvPr id="9" name="Text 7"/>
+          <p:cNvSpPr txBox="1"/>
+          <p:nvPr/>
+        </p:nvSpPr>
+        <p:spPr>
+          <a:xfrm>
+            <a:off x="7040880" y="2423160"/>
+            <a:ext cx="4114800" cy="822960"/>
+          </a:xfrm>
+          <a:prstGeom prst="rect">
+            <a:avLst/>
+          </a:prstGeom>
+          <a:noFill/>
+          <a:ln/>
+        </p:spPr>
+        <p:txBody>
+          <a:bodyPr wrap="square" lIns="0" tIns="0" rIns="0" bIns="0" rtlCol="0" anchor="ctr"/>
+          <a:lstStyle/>
+          <a:p>
+            <a:pPr indent="0" marL="0">
+              <a:lnSpc>
+                <a:spcPts val="2600"/>
+              </a:lnSpc>
+              <a:buNone/>
+            </a:pPr>
+            <a:r>
+              <a:rPr lang="en-US" sz="2000" b="1" dirty="0">
+                <a:solidFill>
+                  <a:srgbClr val="FFFFFF"/>
+                </a:solidFill>
+                <a:latin typeface="Cambria" pitchFamily="34" charset="0"/>
+                <a:ea typeface="Cambria" pitchFamily="34" charset="-122"/>
+                <a:cs typeface="Cambria" pitchFamily="34" charset="-120"/>
+              </a:rPr>
+              <a:t>We read the calendar</a:t>
+            </a:r>
+            <a:endParaRPr lang="en-US" sz="2000" dirty="0"/>
+          </a:p>
+          <a:p>
+            <a:pPr indent="0" marL="0">
+              <a:lnSpc>
+                <a:spcPts val="2600"/>
+              </a:lnSpc>
+              <a:buNone/>
+            </a:pPr>
+            <a:r>
+              <a:rPr lang="en-US" sz="2000" b="1" dirty="0">
+                <a:solidFill>
+                  <a:srgbClr val="FFFFFF"/>
+                </a:solidFill>
+                <a:latin typeface="Cambria" pitchFamily="34" charset="0"/>
+                <a:ea typeface="Cambria" pitchFamily="34" charset="-122"/>
+                <a:cs typeface="Cambria" pitchFamily="34" charset="-120"/>
+              </a:rPr>
+              <a:t>without reading it</a:t>
+            </a:r>
+            <a:endParaRPr lang="en-US" sz="2000" dirty="0"/>
+          </a:p>
+        </p:txBody>
+      </p:sp>
+      <p:sp>
+        <p:nvSpPr>
           <p:cNvPr id="10" name="Text 8"/>
           <p:cNvSpPr txBox="1"/>
           <p:nvPr/>
         </p:nvSpPr>
         <p:spPr>
           <a:xfrm>
-            <a:off x="6172200" y="2651760"/>
-            <a:ext cx="4846320" cy="320040"/>
-          </a:xfrm>
-          <a:prstGeom prst="rect">
-            <a:avLst/>
-          </a:prstGeom>
-          <a:noFill/>
-          <a:ln/>
-        </p:spPr>
-        <p:txBody>
-          <a:bodyPr wrap="square" lIns="0" tIns="0" rIns="0" bIns="0" rtlCol="0" anchor="ctr"/>
-          <a:lstStyle/>
-          <a:p>
-            <a:pPr indent="0" marL="0">
-              <a:buNone/>
-            </a:pPr>
-            <a:r>
-              <a:rPr lang="en-US" sz="1500" b="1" dirty="0">
-                <a:solidFill>
-                  <a:srgbClr val="B7E436"/>
-                </a:solidFill>
-                <a:latin typeface="Arial" pitchFamily="34" charset="0"/>
-                <a:ea typeface="Arial" pitchFamily="34" charset="-122"/>
-                <a:cs typeface="Arial" pitchFamily="34" charset="-120"/>
-              </a:rPr>
-              <a:t>Why that answer holds</a:t>
-            </a:r>
-            <a:endParaRPr lang="en-US" sz="1500" dirty="0"/>
-          </a:p>
-        </p:txBody>
-      </p:sp>
-      <p:sp>
-        <p:nvSpPr>
-          <p:cNvPr id="11" name="Text 9"/>
-          <p:cNvSpPr txBox="1"/>
-          <p:nvPr/>
-        </p:nvSpPr>
-        <p:spPr>
-          <a:xfrm>
-            <a:off x="6217920" y="3154680"/>
-            <a:ext cx="4754880" cy="2560320"/>
-          </a:xfrm>
-          <a:prstGeom prst="rect">
-            <a:avLst/>
-          </a:prstGeom>
-          <a:noFill/>
-          <a:ln/>
-        </p:spPr>
-        <p:txBody>
-          <a:bodyPr wrap="square" lIns="0" tIns="0" rIns="0" bIns="0" rtlCol="0" anchor="t"/>
-          <a:lstStyle/>
-          <a:p>
-            <a:pPr marL="342900" indent="-342900">
+            <a:off x="7040880" y="3383280"/>
+            <a:ext cx="4023360" cy="731520"/>
+          </a:xfrm>
+          <a:prstGeom prst="rect">
+            <a:avLst/>
+          </a:prstGeom>
+          <a:noFill/>
+          <a:ln/>
+        </p:spPr>
+        <p:txBody>
+          <a:bodyPr wrap="square" lIns="0" tIns="0" rIns="0" bIns="0" rtlCol="0" anchor="ctr"/>
+          <a:lstStyle/>
+          <a:p>
+            <a:pPr indent="0" marL="0">
               <a:lnSpc>
-                <a:spcPts val="1700"/>
+                <a:spcPts val="1900"/>
               </a:lnSpc>
-              <a:spcAft>
-                <a:spcPts val="1200"/>
-              </a:spcAft>
-              <a:buSzPct val="100000"/>
-              <a:buChar char="•"/>
-            </a:pPr>
-            <a:r>
-              <a:rPr lang="en-US" sz="1200" dirty="0">
+              <a:buNone/>
+            </a:pPr>
+            <a:r>
+              <a:rPr lang="en-US" sz="1300" dirty="0">
                 <a:solidFill>
                   <a:srgbClr val="D6E2EA"/>
                 </a:solidFill>
@@ -5855,54 +5533,51 @@
                 <a:ea typeface="Calibri" pitchFamily="34" charset="-122"/>
                 <a:cs typeface="Calibri" pitchFamily="34" charset="-120"/>
               </a:rPr>
-              <a:t>The organisation report type has no field for a person. It carries a size, a participation percentage, an active count, a median and a suppression flag — so a client asking for a name does not compile.</a:t>
-            </a:r>
-            <a:endParaRPr lang="en-US" sz="1200" dirty="0"/>
-          </a:p>
-          <a:p>
-            <a:pPr marL="342900" indent="-342900">
+              <a:t>Start time, end time, busy or free, attendee count, whether it recurs. That is the whole list.</a:t>
+            </a:r>
+            <a:endParaRPr lang="en-US" sz="1300" dirty="0"/>
+          </a:p>
+        </p:txBody>
+      </p:sp>
+      <p:sp>
+        <p:nvSpPr>
+          <p:cNvPr id="11" name="Text 9"/>
+          <p:cNvSpPr txBox="1"/>
+          <p:nvPr/>
+        </p:nvSpPr>
+        <p:spPr>
+          <a:xfrm>
+            <a:off x="7040880" y="4251960"/>
+            <a:ext cx="4023360" cy="1371600"/>
+          </a:xfrm>
+          <a:prstGeom prst="rect">
+            <a:avLst/>
+          </a:prstGeom>
+          <a:noFill/>
+          <a:ln/>
+        </p:spPr>
+        <p:txBody>
+          <a:bodyPr wrap="square" lIns="0" tIns="0" rIns="0" bIns="0" rtlCol="0" anchor="ctr"/>
+          <a:lstStyle/>
+          <a:p>
+            <a:pPr indent="0" marL="0">
               <a:lnSpc>
-                <a:spcPts val="1700"/>
+                <a:spcPts val="1900"/>
               </a:lnSpc>
-              <a:spcAft>
-                <a:spcPts val="1200"/>
-              </a:spcAft>
-              <a:buSzPct val="100000"/>
-              <a:buChar char="•"/>
-            </a:pPr>
-            <a:r>
-              <a:rPr lang="en-US" sz="1200" dirty="0">
-                <a:solidFill>
-                  <a:srgbClr val="D6E2EA"/>
+              <a:buNone/>
+            </a:pPr>
+            <a:r>
+              <a:rPr lang="en-US" sz="1250" i="1" dirty="0">
+                <a:solidFill>
+                  <a:srgbClr val="B7E436"/>
                 </a:solidFill>
                 <a:latin typeface="Calibri" pitchFamily="34" charset="0"/>
                 <a:ea typeface="Calibri" pitchFamily="34" charset="-122"/>
                 <a:cs typeface="Calibri" pitchFamily="34" charset="-120"/>
               </a:rPr>
-              <a:t>A permission is a setting, and settings change when somebody senior asks. Because the capability was never built, adding one takes a schema change, a migration and a code review.</a:t>
-            </a:r>
-            <a:endParaRPr lang="en-US" sz="1200" dirty="0"/>
-          </a:p>
-          <a:p>
-            <a:pPr marL="342900" indent="-342900">
-              <a:lnSpc>
-                <a:spcPts val="1700"/>
-              </a:lnSpc>
-              <a:buSzPct val="100000"/>
-              <a:buChar char="•"/>
-            </a:pPr>
-            <a:r>
-              <a:rPr lang="en-US" sz="1200" dirty="0">
-                <a:solidFill>
-                  <a:srgbClr val="D6E2EA"/>
-                </a:solidFill>
-                <a:latin typeface="Calibri" pitchFamily="34" charset="0"/>
-                <a:ea typeface="Calibri" pitchFamily="34" charset="-122"/>
-                <a:cs typeface="Calibri" pitchFamily="34" charset="-120"/>
-              </a:rPr>
-              <a:t>A cohort figure needs at least 8 contributing people. Below that the field is null, not a rounded stand-in.</a:t>
-            </a:r>
-            <a:endParaRPr lang="en-US" sz="1200" dirty="0"/>
+              <a:t>The title is never transmitted, never logged, never sent to a model. It costs us accuracy — a one-to-one and a board review look identical to us — and we take the worse recommendation.</a:t>
+            </a:r>
+            <a:endParaRPr lang="en-US" sz="1250" dirty="0"/>
           </a:p>
         </p:txBody>
       </p:sp>
@@ -6072,7 +5747,7 @@
                 <a:ea typeface="Calibri" pitchFamily="34" charset="-122"/>
                 <a:cs typeface="Calibri" pitchFamily="34" charset="-120"/>
               </a:rPr>
-              <a:t>Every movement in the library exists as five independently authored variants. Not one version with things removed — a good seated movement uses the chair. The publishing gate refuses anything with fewer. There is no force-publish flag and no admin bypass.</a:t>
+              <a:t>Every movement exists as five separately authored variants. Not one version with things taken out — a good seated movement uses the chair. The publishing gate refuses anything less. No force-publish flag, no admin override.</a:t>
             </a:r>
             <a:endParaRPr lang="en-US" sz="1450" dirty="0"/>
           </a:p>
@@ -6834,7 +6509,7 @@
                 <a:ea typeface="Arial" pitchFamily="34" charset="-122"/>
                 <a:cs typeface="Arial" pitchFamily="34" charset="-120"/>
               </a:rPr>
-              <a:t>WHY ENGAGEMENT DOES NOT DECAY</a:t>
+              <a:t>WHAT YOU ACTUALLY RECEIVE</a:t>
             </a:r>
             <a:endParaRPr lang="en-US" sz="1200" dirty="0"/>
           </a:p>
@@ -6865,7 +6540,7 @@
               <a:buNone/>
             </a:pPr>
             <a:r>
-              <a:rPr lang="en-US" sz="3800" b="1" dirty="0">
+              <a:rPr lang="en-US" sz="3400" b="1" dirty="0">
                 <a:solidFill>
                   <a:srgbClr val="102A43"/>
                 </a:solidFill>
@@ -6873,9 +6548,26 @@
                 <a:ea typeface="Cambria" pitchFamily="34" charset="-122"/>
                 <a:cs typeface="Cambria" pitchFamily="34" charset="-120"/>
               </a:rPr>
-              <a:t>It decides when to say nothing.</a:t>
-            </a:r>
-            <a:endParaRPr lang="en-US" sz="3800" dirty="0"/>
+              <a:t>Enough to run a programme.</a:t>
+            </a:r>
+            <a:endParaRPr lang="en-US" sz="3400" dirty="0"/>
+          </a:p>
+          <a:p>
+            <a:pPr indent="0" marL="0">
+              <a:buNone/>
+            </a:pPr>
+            <a:r>
+              <a:rPr lang="en-US" sz="3400" b="1" dirty="0">
+                <a:solidFill>
+                  <a:srgbClr val="102A43"/>
+                </a:solidFill>
+                <a:latin typeface="Cambria" pitchFamily="34" charset="0"/>
+                <a:ea typeface="Cambria" pitchFamily="34" charset="-122"/>
+                <a:cs typeface="Cambria" pitchFamily="34" charset="-120"/>
+              </a:rPr>
+              <a:t>Not enough to manage a person.</a:t>
+            </a:r>
+            <a:endParaRPr lang="en-US" sz="3400" dirty="0"/>
           </a:p>
         </p:txBody>
       </p:sp>
@@ -6887,225 +6579,98 @@
         </p:nvSpPr>
         <p:spPr>
           <a:xfrm>
-            <a:off x="731520" y="2103120"/>
-            <a:ext cx="5669280" cy="1554480"/>
-          </a:xfrm>
-          <a:prstGeom prst="rect">
-            <a:avLst/>
-          </a:prstGeom>
-          <a:noFill/>
-          <a:ln/>
-        </p:spPr>
-        <p:txBody>
-          <a:bodyPr wrap="square" lIns="0" tIns="0" rIns="0" bIns="0" rtlCol="0" anchor="ctr"/>
-          <a:lstStyle/>
-          <a:p>
-            <a:pPr indent="0" marL="0">
-              <a:lnSpc>
-                <a:spcPts val="2300"/>
-              </a:lnSpc>
-              <a:buNone/>
-            </a:pPr>
-            <a:r>
-              <a:rPr lang="en-US" sz="1450" dirty="0">
-                <a:solidFill>
-                  <a:srgbClr val="475663"/>
-                </a:solidFill>
-                <a:latin typeface="Calibri" pitchFamily="34" charset="0"/>
-                <a:ea typeface="Calibri" pitchFamily="34" charset="-122"/>
-                <a:cs typeface="Calibri" pitchFamily="34" charset="-120"/>
-              </a:rPr>
-              <a:t>A reminder delivered while somebody is driving is not a neutral event. It costs attention, then trust, and eventually the notification is switched off — at which point the programme is finished however good the recommendation was. So a block is recorded as a successful decision, not a failed delivery.</a:t>
-            </a:r>
-            <a:endParaRPr lang="en-US" sz="1450" dirty="0"/>
-          </a:p>
-        </p:txBody>
-      </p:sp>
-      <p:sp>
-        <p:nvSpPr>
-          <p:cNvPr id="6" name="Text 4"/>
-          <p:cNvSpPr txBox="1"/>
-          <p:nvPr/>
-        </p:nvSpPr>
-        <p:spPr>
-          <a:xfrm>
-            <a:off x="731520" y="3794760"/>
-            <a:ext cx="5486400" cy="365760"/>
-          </a:xfrm>
-          <a:prstGeom prst="rect">
-            <a:avLst/>
-          </a:prstGeom>
-          <a:noFill/>
-          <a:ln/>
-        </p:spPr>
-        <p:txBody>
-          <a:bodyPr wrap="square" lIns="0" tIns="0" rIns="0" bIns="0" rtlCol="0" anchor="ctr"/>
-          <a:lstStyle/>
-          <a:p>
-            <a:pPr indent="0" marL="0">
-              <a:buNone/>
-            </a:pPr>
-            <a:r>
-              <a:rPr lang="en-US" sz="1500" b="1" dirty="0">
-                <a:solidFill>
-                  <a:srgbClr val="102A43"/>
+            <a:off x="731520" y="2468880"/>
+            <a:ext cx="5166360" cy="274320"/>
+          </a:xfrm>
+          <a:prstGeom prst="rect">
+            <a:avLst/>
+          </a:prstGeom>
+          <a:noFill/>
+          <a:ln/>
+        </p:spPr>
+        <p:txBody>
+          <a:bodyPr wrap="square" lIns="0" tIns="0" rIns="0" bIns="0" rtlCol="0" anchor="ctr"/>
+          <a:lstStyle/>
+          <a:p>
+            <a:pPr indent="0" marL="0">
+              <a:buNone/>
+            </a:pPr>
+            <a:r>
+              <a:rPr lang="en-US" sz="1200" b="1" spc="200" kern="0" dirty="0">
+                <a:solidFill>
+                  <a:srgbClr val="00A99D"/>
                 </a:solidFill>
                 <a:latin typeface="Arial" pitchFamily="34" charset="0"/>
                 <a:ea typeface="Arial" pitchFamily="34" charset="-122"/>
                 <a:cs typeface="Arial" pitchFamily="34" charset="-120"/>
               </a:rPr>
-              <a:t>What silences a prompt</a:t>
-            </a:r>
-            <a:endParaRPr lang="en-US" sz="1500" dirty="0"/>
-          </a:p>
-        </p:txBody>
-      </p:sp>
-      <p:sp>
-        <p:nvSpPr>
-          <p:cNvPr id="7" name="Text 5"/>
-          <p:cNvSpPr txBox="1"/>
-          <p:nvPr/>
-        </p:nvSpPr>
-        <p:spPr>
-          <a:xfrm>
-            <a:off x="731520" y="4206240"/>
-            <a:ext cx="5577840" cy="1783080"/>
-          </a:xfrm>
-          <a:prstGeom prst="rect">
-            <a:avLst/>
-          </a:prstGeom>
-          <a:noFill/>
-          <a:ln/>
-        </p:spPr>
-        <p:txBody>
-          <a:bodyPr wrap="square" lIns="0" tIns="0" rIns="0" bIns="0" rtlCol="0" anchor="t"/>
-          <a:lstStyle/>
-          <a:p>
-            <a:pPr marL="342900" indent="-342900">
-              <a:spcAft>
-                <a:spcPts val="600"/>
-              </a:spcAft>
-              <a:buSzPct val="100000"/>
-              <a:buChar char="•"/>
-            </a:pPr>
-            <a:r>
-              <a:rPr lang="en-US" sz="1300" dirty="0">
-                <a:solidFill>
-                  <a:srgbClr val="475663"/>
-                </a:solidFill>
-                <a:latin typeface="Calibri" pitchFamily="34" charset="0"/>
-                <a:ea typeface="Calibri" pitchFamily="34" charset="-122"/>
-                <a:cs typeface="Calibri" pitchFamily="34" charset="-120"/>
-              </a:rPr>
-              <a:t>Driving, from motion state rather than location</a:t>
-            </a:r>
-            <a:endParaRPr lang="en-US" sz="1300" dirty="0"/>
-          </a:p>
-          <a:p>
-            <a:pPr marL="342900" indent="-342900">
-              <a:spcAft>
-                <a:spcPts val="600"/>
-              </a:spcAft>
-              <a:buSzPct val="100000"/>
-              <a:buChar char="•"/>
-            </a:pPr>
-            <a:r>
-              <a:rPr lang="en-US" sz="1300" dirty="0">
-                <a:solidFill>
-                  <a:srgbClr val="475663"/>
-                </a:solidFill>
-                <a:latin typeface="Calibri" pitchFamily="34" charset="0"/>
-                <a:ea typeface="Calibri" pitchFamily="34" charset="-122"/>
-                <a:cs typeface="Calibri" pitchFamily="34" charset="-120"/>
-              </a:rPr>
-              <a:t>On a call, in a lesson, or notifications turned off</a:t>
-            </a:r>
-            <a:endParaRPr lang="en-US" sz="1300" dirty="0"/>
-          </a:p>
-          <a:p>
-            <a:pPr marL="342900" indent="-342900">
-              <a:spcAft>
-                <a:spcPts val="600"/>
-              </a:spcAft>
-              <a:buSzPct val="100000"/>
-              <a:buChar char="•"/>
-            </a:pPr>
-            <a:r>
-              <a:rPr lang="en-US" sz="1300" dirty="0">
-                <a:solidFill>
-                  <a:srgbClr val="475663"/>
-                </a:solidFill>
-                <a:latin typeface="Calibri" pitchFamily="34" charset="0"/>
-                <a:ea typeface="Calibri" pitchFamily="34" charset="-122"/>
-                <a:cs typeface="Calibri" pitchFamily="34" charset="-120"/>
-              </a:rPr>
-              <a:t>The daily cap, which differs by age mode</a:t>
-            </a:r>
-            <a:endParaRPr lang="en-US" sz="1300" dirty="0"/>
-          </a:p>
-          <a:p>
-            <a:pPr marL="342900" indent="-342900">
-              <a:spcAft>
-                <a:spcPts val="600"/>
-              </a:spcAft>
-              <a:buSzPct val="100000"/>
-              <a:buChar char="•"/>
-            </a:pPr>
-            <a:r>
-              <a:rPr lang="en-US" sz="1300" dirty="0">
-                <a:solidFill>
-                  <a:srgbClr val="475663"/>
-                </a:solidFill>
-                <a:latin typeface="Calibri" pitchFamily="34" charset="0"/>
-                <a:ea typeface="Calibri" pitchFamily="34" charset="-122"/>
-                <a:cs typeface="Calibri" pitchFamily="34" charset="-120"/>
-              </a:rPr>
-              <a:t>Quiet hours, the sleep window, or an active cooldown</a:t>
-            </a:r>
-            <a:endParaRPr lang="en-US" sz="1300" dirty="0"/>
-          </a:p>
-          <a:p>
-            <a:pPr marL="342900" indent="-342900">
-              <a:buSzPct val="100000"/>
-              <a:buChar char="•"/>
-            </a:pPr>
-            <a:r>
-              <a:rPr lang="en-US" sz="1300" dirty="0">
-                <a:solidFill>
-                  <a:srgbClr val="475663"/>
-                </a:solidFill>
-                <a:latin typeface="Calibri" pitchFamily="34" charset="0"/>
-                <a:ea typeface="Calibri" pitchFamily="34" charset="-122"/>
-                <a:cs typeface="Calibri" pitchFamily="34" charset="-120"/>
-              </a:rPr>
-              <a:t>A clinical rest flag, a safeguarding hold or a bereavement hold</a:t>
-            </a:r>
-            <a:endParaRPr lang="en-US" sz="1300" dirty="0"/>
-          </a:p>
-        </p:txBody>
-      </p:sp>
-      <p:sp>
-        <p:nvSpPr>
-          <p:cNvPr id="8" name="Shape 6"/>
+              <a:t>Today</a:t>
+            </a:r>
+            <a:endParaRPr lang="en-US" sz="1200" dirty="0"/>
+          </a:p>
+        </p:txBody>
+      </p:sp>
+      <p:sp>
+        <p:nvSpPr>
+          <p:cNvPr id="6" name="Text 4"/>
+          <p:cNvSpPr txBox="1"/>
+          <p:nvPr/>
+        </p:nvSpPr>
+        <p:spPr>
+          <a:xfrm>
+            <a:off x="6263640" y="2468880"/>
+            <a:ext cx="5166360" cy="274320"/>
+          </a:xfrm>
+          <a:prstGeom prst="rect">
+            <a:avLst/>
+          </a:prstGeom>
+          <a:noFill/>
+          <a:ln/>
+        </p:spPr>
+        <p:txBody>
+          <a:bodyPr wrap="square" lIns="0" tIns="0" rIns="0" bIns="0" rtlCol="0" anchor="ctr"/>
+          <a:lstStyle/>
+          <a:p>
+            <a:pPr indent="0" marL="0">
+              <a:buNone/>
+            </a:pPr>
+            <a:r>
+              <a:rPr lang="en-US" sz="1200" b="1" spc="200" kern="0" dirty="0">
+                <a:solidFill>
+                  <a:srgbClr val="FF6B5E"/>
+                </a:solidFill>
+                <a:latin typeface="Arial" pitchFamily="34" charset="0"/>
+                <a:ea typeface="Arial" pitchFamily="34" charset="-122"/>
+                <a:cs typeface="Arial" pitchFamily="34" charset="-120"/>
+              </a:rPr>
+              <a:t>Not built yet</a:t>
+            </a:r>
+            <a:endParaRPr lang="en-US" sz="1200" dirty="0"/>
+          </a:p>
+        </p:txBody>
+      </p:sp>
+      <p:sp>
+        <p:nvSpPr>
+          <p:cNvPr id="7" name="Shape 5"/>
           <p:cNvSpPr/>
           <p:nvPr/>
         </p:nvSpPr>
         <p:spPr>
           <a:xfrm>
-            <a:off x="6675120" y="2103120"/>
-            <a:ext cx="4754880" cy="3657600"/>
+            <a:off x="731520" y="2834640"/>
+            <a:ext cx="5166360" cy="1965960"/>
           </a:xfrm>
           <a:prstGeom prst="roundRect">
             <a:avLst>
-              <a:gd name="adj" fmla="val 2000"/>
+              <a:gd name="adj" fmla="val 3721"/>
             </a:avLst>
           </a:prstGeom>
           <a:solidFill>
-            <a:srgbClr val="102A43"/>
+            <a:srgbClr val="F4F7F9"/>
           </a:solidFill>
           <a:ln w="12700">
             <a:solidFill>
-              <a:srgbClr val="102A43"/>
+              <a:srgbClr val="F4F7F9"/>
             </a:solidFill>
             <a:prstDash val="solid"/>
           </a:ln>
@@ -7120,145 +6685,383 @@
       </p:sp>
       <p:sp>
         <p:nvSpPr>
+          <p:cNvPr id="8" name="Text 6"/>
+          <p:cNvSpPr txBox="1"/>
+          <p:nvPr/>
+        </p:nvSpPr>
+        <p:spPr>
+          <a:xfrm>
+            <a:off x="1097280" y="3063240"/>
+            <a:ext cx="4480560" cy="274320"/>
+          </a:xfrm>
+          <a:prstGeom prst="rect">
+            <a:avLst/>
+          </a:prstGeom>
+          <a:noFill/>
+          <a:ln/>
+        </p:spPr>
+        <p:txBody>
+          <a:bodyPr wrap="square" lIns="0" tIns="0" rIns="0" bIns="0" rtlCol="0" anchor="ctr"/>
+          <a:lstStyle/>
+          <a:p>
+            <a:pPr indent="0" marL="0">
+              <a:buNone/>
+            </a:pPr>
+            <a:r>
+              <a:rPr lang="en-US" sz="1350" b="1" dirty="0">
+                <a:solidFill>
+                  <a:srgbClr val="102A43"/>
+                </a:solidFill>
+                <a:latin typeface="Arial" pitchFamily="34" charset="0"/>
+                <a:ea typeface="Arial" pitchFamily="34" charset="-122"/>
+                <a:cs typeface="Arial" pitchFamily="34" charset="-120"/>
+              </a:rPr>
+              <a:t>The cohort report returns</a:t>
+            </a:r>
+            <a:endParaRPr lang="en-US" sz="1350" dirty="0"/>
+          </a:p>
+        </p:txBody>
+      </p:sp>
+      <p:sp>
+        <p:nvSpPr>
           <p:cNvPr id="9" name="Text 7"/>
           <p:cNvSpPr txBox="1"/>
           <p:nvPr/>
         </p:nvSpPr>
         <p:spPr>
           <a:xfrm>
-            <a:off x="7040880" y="2423160"/>
-            <a:ext cx="4114800" cy="822960"/>
-          </a:xfrm>
-          <a:prstGeom prst="rect">
-            <a:avLst/>
-          </a:prstGeom>
-          <a:noFill/>
-          <a:ln/>
-        </p:spPr>
-        <p:txBody>
-          <a:bodyPr wrap="square" lIns="0" tIns="0" rIns="0" bIns="0" rtlCol="0" anchor="ctr"/>
-          <a:lstStyle/>
-          <a:p>
-            <a:pPr indent="0" marL="0">
+            <a:off x="1097280" y="3474720"/>
+            <a:ext cx="4434840" cy="1737360"/>
+          </a:xfrm>
+          <a:prstGeom prst="rect">
+            <a:avLst/>
+          </a:prstGeom>
+          <a:noFill/>
+          <a:ln/>
+        </p:spPr>
+        <p:txBody>
+          <a:bodyPr wrap="square" lIns="0" tIns="0" rIns="0" bIns="0" rtlCol="0" anchor="t"/>
+          <a:lstStyle/>
+          <a:p>
+            <a:pPr marL="342900" indent="-342900">
               <a:lnSpc>
-                <a:spcPts val="2600"/>
+                <a:spcPts val="1700"/>
               </a:lnSpc>
-              <a:buNone/>
-            </a:pPr>
-            <a:r>
-              <a:rPr lang="en-US" sz="2000" b="1" dirty="0">
-                <a:solidFill>
-                  <a:srgbClr val="FFFFFF"/>
-                </a:solidFill>
-                <a:latin typeface="Cambria" pitchFamily="34" charset="0"/>
-                <a:ea typeface="Cambria" pitchFamily="34" charset="-122"/>
-                <a:cs typeface="Cambria" pitchFamily="34" charset="-120"/>
-              </a:rPr>
-              <a:t>The calendar, read</a:t>
-            </a:r>
-            <a:endParaRPr lang="en-US" sz="2000" dirty="0"/>
-          </a:p>
-          <a:p>
-            <a:pPr indent="0" marL="0">
-              <a:lnSpc>
-                <a:spcPts val="2600"/>
-              </a:lnSpc>
-              <a:buNone/>
-            </a:pPr>
-            <a:r>
-              <a:rPr lang="en-US" sz="2000" b="1" dirty="0">
-                <a:solidFill>
-                  <a:srgbClr val="FFFFFF"/>
-                </a:solidFill>
-                <a:latin typeface="Cambria" pitchFamily="34" charset="0"/>
-                <a:ea typeface="Cambria" pitchFamily="34" charset="-122"/>
-                <a:cs typeface="Cambria" pitchFamily="34" charset="-120"/>
-              </a:rPr>
-              <a:t>without being read</a:t>
-            </a:r>
-            <a:endParaRPr lang="en-US" sz="2000" dirty="0"/>
-          </a:p>
-        </p:txBody>
-      </p:sp>
-      <p:sp>
-        <p:nvSpPr>
-          <p:cNvPr id="10" name="Text 8"/>
-          <p:cNvSpPr txBox="1"/>
-          <p:nvPr/>
-        </p:nvSpPr>
-        <p:spPr>
-          <a:xfrm>
-            <a:off x="7040880" y="3383280"/>
-            <a:ext cx="4023360" cy="731520"/>
-          </a:xfrm>
-          <a:prstGeom prst="rect">
-            <a:avLst/>
-          </a:prstGeom>
-          <a:noFill/>
-          <a:ln/>
-        </p:spPr>
-        <p:txBody>
-          <a:bodyPr wrap="square" lIns="0" tIns="0" rIns="0" bIns="0" rtlCol="0" anchor="ctr"/>
-          <a:lstStyle/>
-          <a:p>
-            <a:pPr indent="0" marL="0">
-              <a:lnSpc>
-                <a:spcPts val="1900"/>
-              </a:lnSpc>
-              <a:buNone/>
-            </a:pPr>
-            <a:r>
-              <a:rPr lang="en-US" sz="1300" dirty="0">
-                <a:solidFill>
-                  <a:srgbClr val="D6E2EA"/>
+              <a:spcAft>
+                <a:spcPts val="700"/>
+              </a:spcAft>
+              <a:buSzPct val="100000"/>
+              <a:buChar char="•"/>
+            </a:pPr>
+            <a:r>
+              <a:rPr lang="en-US" sz="1200" dirty="0">
+                <a:solidFill>
+                  <a:srgbClr val="475663"/>
                 </a:solidFill>
                 <a:latin typeface="Calibri" pitchFamily="34" charset="0"/>
                 <a:ea typeface="Calibri" pitchFamily="34" charset="-122"/>
                 <a:cs typeface="Calibri" pitchFamily="34" charset="-120"/>
               </a:rPr>
-              <a:t>Start time, end time, busy or free, attendee count, whether it recurs.</a:t>
-            </a:r>
-            <a:endParaRPr lang="en-US" sz="1300" dirty="0"/>
-          </a:p>
-        </p:txBody>
-      </p:sp>
-      <p:sp>
-        <p:nvSpPr>
-          <p:cNvPr id="11" name="Text 9"/>
-          <p:cNvSpPr txBox="1"/>
-          <p:nvPr/>
-        </p:nvSpPr>
-        <p:spPr>
-          <a:xfrm>
-            <a:off x="7040880" y="4160520"/>
-            <a:ext cx="4023360" cy="1371600"/>
-          </a:xfrm>
-          <a:prstGeom prst="rect">
-            <a:avLst/>
-          </a:prstGeom>
-          <a:noFill/>
-          <a:ln/>
-        </p:spPr>
-        <p:txBody>
-          <a:bodyPr wrap="square" lIns="0" tIns="0" rIns="0" bIns="0" rtlCol="0" anchor="ctr"/>
-          <a:lstStyle/>
-          <a:p>
-            <a:pPr indent="0" marL="0">
+              <a:t>Participation rate across the cohort</a:t>
+            </a:r>
+            <a:endParaRPr lang="en-US" sz="1200" dirty="0"/>
+          </a:p>
+          <a:p>
+            <a:pPr marL="342900" indent="-342900">
               <a:lnSpc>
-                <a:spcPts val="1900"/>
+                <a:spcPts val="1700"/>
               </a:lnSpc>
-              <a:buNone/>
-            </a:pPr>
-            <a:r>
-              <a:rPr lang="en-US" sz="1250" i="1" dirty="0">
-                <a:solidFill>
-                  <a:srgbClr val="B7E436"/>
+              <a:spcAft>
+                <a:spcPts val="700"/>
+              </a:spcAft>
+              <a:buSzPct val="100000"/>
+              <a:buChar char="•"/>
+            </a:pPr>
+            <a:r>
+              <a:rPr lang="en-US" sz="1200" dirty="0">
+                <a:solidFill>
+                  <a:srgbClr val="475663"/>
                 </a:solidFill>
                 <a:latin typeface="Calibri" pitchFamily="34" charset="0"/>
                 <a:ea typeface="Calibri" pitchFamily="34" charset="-122"/>
                 <a:cs typeface="Calibri" pitchFamily="34" charset="-120"/>
               </a:rPr>
-              <a:t>The title is never transmitted, never logged and never sent to a model. It costs us accuracy — a one-to-one and a board review look identical to us — and we accept the worse recommendation.</a:t>
+              <a:t>How many people were active</a:t>
+            </a:r>
+            <a:endParaRPr lang="en-US" sz="1200" dirty="0"/>
+          </a:p>
+          <a:p>
+            <a:pPr marL="342900" indent="-342900">
+              <a:lnSpc>
+                <a:spcPts val="1700"/>
+              </a:lnSpc>
+              <a:spcAft>
+                <a:spcPts val="700"/>
+              </a:spcAft>
+              <a:buSzPct val="100000"/>
+              <a:buChar char="•"/>
+            </a:pPr>
+            <a:r>
+              <a:rPr lang="en-US" sz="1200" dirty="0">
+                <a:solidFill>
+                  <a:srgbClr val="475663"/>
+                </a:solidFill>
+                <a:latin typeface="Calibri" pitchFamily="34" charset="0"/>
+                <a:ea typeface="Calibri" pitchFamily="34" charset="-122"/>
+                <a:cs typeface="Calibri" pitchFamily="34" charset="-120"/>
+              </a:rPr>
+              <a:t>Median days moved in the period</a:t>
+            </a:r>
+            <a:endParaRPr lang="en-US" sz="1200" dirty="0"/>
+          </a:p>
+          <a:p>
+            <a:pPr marL="342900" indent="-342900">
+              <a:lnSpc>
+                <a:spcPts val="1700"/>
+              </a:lnSpc>
+              <a:buSzPct val="100000"/>
+              <a:buChar char="•"/>
+            </a:pPr>
+            <a:r>
+              <a:rPr lang="en-US" sz="1200" dirty="0">
+                <a:solidFill>
+                  <a:srgbClr val="475663"/>
+                </a:solidFill>
+                <a:latin typeface="Calibri" pitchFamily="34" charset="0"/>
+                <a:ea typeface="Calibri" pitchFamily="34" charset="-122"/>
+                <a:cs typeface="Calibri" pitchFamily="34" charset="-120"/>
+              </a:rPr>
+              <a:t>Whether the answer was suppressed, and the floor</a:t>
+            </a:r>
+            <a:endParaRPr lang="en-US" sz="1200" dirty="0"/>
+          </a:p>
+        </p:txBody>
+      </p:sp>
+      <p:sp>
+        <p:nvSpPr>
+          <p:cNvPr id="10" name="Shape 8"/>
+          <p:cNvSpPr/>
+          <p:nvPr/>
+        </p:nvSpPr>
+        <p:spPr>
+          <a:xfrm>
+            <a:off x="6263640" y="2834640"/>
+            <a:ext cx="5166360" cy="1965960"/>
+          </a:xfrm>
+          <a:prstGeom prst="roundRect">
+            <a:avLst>
+              <a:gd name="adj" fmla="val 3721"/>
+            </a:avLst>
+          </a:prstGeom>
+          <a:solidFill>
+            <a:srgbClr val="F4F7F9"/>
+          </a:solidFill>
+          <a:ln w="12700">
+            <a:solidFill>
+              <a:srgbClr val="F4F7F9"/>
+            </a:solidFill>
+            <a:prstDash val="solid"/>
+          </a:ln>
+          <a:effectLst>
+            <a:outerShdw sx="100000" sy="100000" kx="0" ky="0" algn="bl" rotWithShape="0" blurRad="127000" dist="508" dir="5400000">
+              <a:srgbClr val="9AA8B4">
+                <a:alpha val="25000"/>
+              </a:srgbClr>
+            </a:outerShdw>
+          </a:effectLst>
+        </p:spPr>
+      </p:sp>
+      <p:sp>
+        <p:nvSpPr>
+          <p:cNvPr id="11" name="Text 9"/>
+          <p:cNvSpPr txBox="1"/>
+          <p:nvPr/>
+        </p:nvSpPr>
+        <p:spPr>
+          <a:xfrm>
+            <a:off x="6629400" y="3063240"/>
+            <a:ext cx="4480560" cy="274320"/>
+          </a:xfrm>
+          <a:prstGeom prst="rect">
+            <a:avLst/>
+          </a:prstGeom>
+          <a:noFill/>
+          <a:ln/>
+        </p:spPr>
+        <p:txBody>
+          <a:bodyPr wrap="square" lIns="0" tIns="0" rIns="0" bIns="0" rtlCol="0" anchor="ctr"/>
+          <a:lstStyle/>
+          <a:p>
+            <a:pPr indent="0" marL="0">
+              <a:buNone/>
+            </a:pPr>
+            <a:r>
+              <a:rPr lang="en-US" sz="1350" b="1" dirty="0">
+                <a:solidFill>
+                  <a:srgbClr val="102A43"/>
+                </a:solidFill>
+                <a:latin typeface="Arial" pitchFamily="34" charset="0"/>
+                <a:ea typeface="Arial" pitchFamily="34" charset="-122"/>
+                <a:cs typeface="Arial" pitchFamily="34" charset="-120"/>
+              </a:rPr>
+              <a:t>Yours to prioritise as a design partner</a:t>
+            </a:r>
+            <a:endParaRPr lang="en-US" sz="1350" dirty="0"/>
+          </a:p>
+        </p:txBody>
+      </p:sp>
+      <p:sp>
+        <p:nvSpPr>
+          <p:cNvPr id="12" name="Text 10"/>
+          <p:cNvSpPr txBox="1"/>
+          <p:nvPr/>
+        </p:nvSpPr>
+        <p:spPr>
+          <a:xfrm>
+            <a:off x="6629400" y="3474720"/>
+            <a:ext cx="4434840" cy="1737360"/>
+          </a:xfrm>
+          <a:prstGeom prst="rect">
+            <a:avLst/>
+          </a:prstGeom>
+          <a:noFill/>
+          <a:ln/>
+        </p:spPr>
+        <p:txBody>
+          <a:bodyPr wrap="square" lIns="0" tIns="0" rIns="0" bIns="0" rtlCol="0" anchor="t"/>
+          <a:lstStyle/>
+          <a:p>
+            <a:pPr marL="342900" indent="-342900">
+              <a:lnSpc>
+                <a:spcPts val="1700"/>
+              </a:lnSpc>
+              <a:spcAft>
+                <a:spcPts val="700"/>
+              </a:spcAft>
+              <a:buSzPct val="100000"/>
+              <a:buChar char="•"/>
+            </a:pPr>
+            <a:r>
+              <a:rPr lang="en-US" sz="1200" dirty="0">
+                <a:solidFill>
+                  <a:srgbClr val="475663"/>
+                </a:solidFill>
+                <a:latin typeface="Calibri" pitchFamily="34" charset="0"/>
+                <a:ea typeface="Calibri" pitchFamily="34" charset="-122"/>
+                <a:cs typeface="Calibri" pitchFamily="34" charset="-120"/>
+              </a:rPr>
+              <a:t>A trend series against a baseline</a:t>
+            </a:r>
+            <a:endParaRPr lang="en-US" sz="1200" dirty="0"/>
+          </a:p>
+          <a:p>
+            <a:pPr marL="342900" indent="-342900">
+              <a:lnSpc>
+                <a:spcPts val="1700"/>
+              </a:lnSpc>
+              <a:spcAft>
+                <a:spcPts val="700"/>
+              </a:spcAft>
+              <a:buSzPct val="100000"/>
+              <a:buChar char="•"/>
+            </a:pPr>
+            <a:r>
+              <a:rPr lang="en-US" sz="1200" dirty="0">
+                <a:solidFill>
+                  <a:srgbClr val="475663"/>
+                </a:solidFill>
+                <a:latin typeface="Calibri" pitchFamily="34" charset="0"/>
+                <a:ea typeface="Calibri" pitchFamily="34" charset="-122"/>
+                <a:cs typeface="Calibri" pitchFamily="34" charset="-120"/>
+              </a:rPr>
+              <a:t>Sedentary-risk distribution by cohort</a:t>
+            </a:r>
+            <a:endParaRPr lang="en-US" sz="1200" dirty="0"/>
+          </a:p>
+          <a:p>
+            <a:pPr marL="342900" indent="-342900">
+              <a:lnSpc>
+                <a:spcPts val="1700"/>
+              </a:lnSpc>
+              <a:spcAft>
+                <a:spcPts val="700"/>
+              </a:spcAft>
+              <a:buSzPct val="100000"/>
+              <a:buChar char="•"/>
+            </a:pPr>
+            <a:r>
+              <a:rPr lang="en-US" sz="1200" dirty="0">
+                <a:solidFill>
+                  <a:srgbClr val="475663"/>
+                </a:solidFill>
+                <a:latin typeface="Calibri" pitchFamily="34" charset="0"/>
+                <a:ea typeface="Calibri" pitchFamily="34" charset="-122"/>
+                <a:cs typeface="Calibri" pitchFamily="34" charset="-120"/>
+              </a:rPr>
+              <a:t>A return-on-investment model, assumptions shown</a:t>
+            </a:r>
+            <a:endParaRPr lang="en-US" sz="1200" dirty="0"/>
+          </a:p>
+          <a:p>
+            <a:pPr marL="342900" indent="-342900">
+              <a:lnSpc>
+                <a:spcPts val="1700"/>
+              </a:lnSpc>
+              <a:buSzPct val="100000"/>
+              <a:buChar char="•"/>
+            </a:pPr>
+            <a:r>
+              <a:rPr lang="en-US" sz="1200" dirty="0">
+                <a:solidFill>
+                  <a:srgbClr val="475663"/>
+                </a:solidFill>
+                <a:latin typeface="Calibri" pitchFamily="34" charset="0"/>
+                <a:ea typeface="Calibri" pitchFamily="34" charset="-122"/>
+                <a:cs typeface="Calibri" pitchFamily="34" charset="-120"/>
+              </a:rPr>
+              <a:t>Single sign-on and directory sync</a:t>
+            </a:r>
+            <a:endParaRPr lang="en-US" sz="1200" dirty="0"/>
+          </a:p>
+        </p:txBody>
+      </p:sp>
+      <p:sp>
+        <p:nvSpPr>
+          <p:cNvPr id="13" name="Text 11"/>
+          <p:cNvSpPr txBox="1"/>
+          <p:nvPr/>
+        </p:nvSpPr>
+        <p:spPr>
+          <a:xfrm>
+            <a:off x="731520" y="5623560"/>
+            <a:ext cx="10698480" cy="640080"/>
+          </a:xfrm>
+          <a:prstGeom prst="rect">
+            <a:avLst/>
+          </a:prstGeom>
+          <a:noFill/>
+          <a:ln/>
+        </p:spPr>
+        <p:txBody>
+          <a:bodyPr wrap="square" lIns="0" tIns="0" rIns="0" bIns="0" rtlCol="0" anchor="ctr"/>
+          <a:lstStyle/>
+          <a:p>
+            <a:pPr indent="0" marL="0">
+              <a:lnSpc>
+                <a:spcPts val="1800"/>
+              </a:lnSpc>
+              <a:buNone/>
+            </a:pPr>
+            <a:r>
+              <a:rPr lang="en-US" sz="1250" i="1" dirty="0">
+                <a:solidFill>
+                  <a:srgbClr val="475663"/>
+                </a:solidFill>
+                <a:latin typeface="Calibri" pitchFamily="34" charset="0"/>
+                <a:ea typeface="Calibri" pitchFamily="34" charset="-122"/>
+                <a:cs typeface="Calibri" pitchFamily="34" charset="-120"/>
+              </a:rPr>
+              <a:t>Below eight contributing people every figure is null, not rounded — for you as well as for everyone else. An eleven-person company cannot have anonymous reporting however it is sold.</a:t>
             </a:r>
             <a:endParaRPr lang="en-US" sz="1250" dirty="0"/>
           </a:p>
@@ -7275,6 +7078,626 @@
 <file path=ppt/slides/slide7.xml><?xml version="1.0" encoding="utf-8"?>
 <p:sld xmlns:a="http://schemas.openxmlformats.org/drawingml/2006/main" xmlns:r="http://schemas.openxmlformats.org/officeDocument/2006/relationships" xmlns:p="http://schemas.openxmlformats.org/presentationml/2006/main">
   <p:cSld name="Slide 7">
+    <p:bg>
+      <p:bgPr>
+        <a:solidFill>
+          <a:srgbClr val="102A43"/>
+        </a:solidFill>
+      </p:bgPr>
+    </p:bg>
+    <p:spTree>
+      <p:nvGrpSpPr>
+        <p:cNvPr id="1" name=""/>
+        <p:cNvGrpSpPr/>
+        <p:nvPr/>
+      </p:nvGrpSpPr>
+      <p:grpSpPr>
+        <a:xfrm>
+          <a:off x="0" y="0"/>
+          <a:ext cx="0" cy="0"/>
+          <a:chOff x="0" y="0"/>
+          <a:chExt cx="0" cy="0"/>
+        </a:xfrm>
+      </p:grpSpPr>
+      <p:sp>
+        <p:nvSpPr>
+          <p:cNvPr id="2" name="Shape 0"/>
+          <p:cNvSpPr/>
+          <p:nvPr/>
+        </p:nvSpPr>
+        <p:spPr>
+          <a:xfrm>
+            <a:off x="731520" y="690372"/>
+            <a:ext cx="118872" cy="118872"/>
+          </a:xfrm>
+          <a:prstGeom prst="ellipse">
+            <a:avLst/>
+          </a:prstGeom>
+          <a:solidFill>
+            <a:srgbClr val="B7E436"/>
+          </a:solidFill>
+          <a:ln/>
+        </p:spPr>
+      </p:sp>
+      <p:sp>
+        <p:nvSpPr>
+          <p:cNvPr id="3" name="Text 1"/>
+          <p:cNvSpPr txBox="1"/>
+          <p:nvPr/>
+        </p:nvSpPr>
+        <p:spPr>
+          <a:xfrm>
+            <a:off x="969264" y="640080"/>
+            <a:ext cx="7315200" cy="274320"/>
+          </a:xfrm>
+          <a:prstGeom prst="rect">
+            <a:avLst/>
+          </a:prstGeom>
+          <a:noFill/>
+          <a:ln/>
+        </p:spPr>
+        <p:txBody>
+          <a:bodyPr wrap="square" lIns="0" tIns="0" rIns="0" bIns="0" rtlCol="0" anchor="ctr"/>
+          <a:lstStyle/>
+          <a:p>
+            <a:pPr indent="0" marL="0">
+              <a:buNone/>
+            </a:pPr>
+            <a:r>
+              <a:rPr lang="en-US" sz="1200" b="1" spc="200" kern="0" dirty="0">
+                <a:solidFill>
+                  <a:srgbClr val="B7E436"/>
+                </a:solidFill>
+                <a:latin typeface="Arial" pitchFamily="34" charset="0"/>
+                <a:ea typeface="Arial" pitchFamily="34" charset="-122"/>
+                <a:cs typeface="Arial" pitchFamily="34" charset="-120"/>
+              </a:rPr>
+              <a:t>FOR YOUR SECURITY REVIEW</a:t>
+            </a:r>
+            <a:endParaRPr lang="en-US" sz="1200" dirty="0"/>
+          </a:p>
+        </p:txBody>
+      </p:sp>
+      <p:sp>
+        <p:nvSpPr>
+          <p:cNvPr id="4" name="Text 2"/>
+          <p:cNvSpPr txBox="1"/>
+          <p:nvPr/>
+        </p:nvSpPr>
+        <p:spPr>
+          <a:xfrm>
+            <a:off x="731520" y="1051560"/>
+            <a:ext cx="10698480" cy="1005840"/>
+          </a:xfrm>
+          <a:prstGeom prst="rect">
+            <a:avLst/>
+          </a:prstGeom>
+          <a:noFill/>
+          <a:ln/>
+        </p:spPr>
+        <p:txBody>
+          <a:bodyPr wrap="square" lIns="0" tIns="0" rIns="0" bIns="0" rtlCol="0" anchor="ctr"/>
+          <a:lstStyle/>
+          <a:p>
+            <a:pPr indent="0" marL="0">
+              <a:buNone/>
+            </a:pPr>
+            <a:r>
+              <a:rPr lang="en-US" sz="3800" b="1" dirty="0">
+                <a:solidFill>
+                  <a:srgbClr val="FFFFFF"/>
+                </a:solidFill>
+                <a:latin typeface="Cambria" pitchFamily="34" charset="0"/>
+                <a:ea typeface="Cambria" pitchFamily="34" charset="-122"/>
+                <a:cs typeface="Cambria" pitchFamily="34" charset="-120"/>
+              </a:rPr>
+              <a:t>Don’t trust us. Call the API.</a:t>
+            </a:r>
+            <a:endParaRPr lang="en-US" sz="3800" dirty="0"/>
+          </a:p>
+        </p:txBody>
+      </p:sp>
+      <p:sp>
+        <p:nvSpPr>
+          <p:cNvPr id="5" name="Text 3"/>
+          <p:cNvSpPr txBox="1"/>
+          <p:nvPr/>
+        </p:nvSpPr>
+        <p:spPr>
+          <a:xfrm>
+            <a:off x="731520" y="2194560"/>
+            <a:ext cx="10698480" cy="640080"/>
+          </a:xfrm>
+          <a:prstGeom prst="rect">
+            <a:avLst/>
+          </a:prstGeom>
+          <a:noFill/>
+          <a:ln/>
+        </p:spPr>
+        <p:txBody>
+          <a:bodyPr wrap="square" lIns="0" tIns="0" rIns="0" bIns="0" rtlCol="0" anchor="ctr"/>
+          <a:lstStyle/>
+          <a:p>
+            <a:pPr indent="0" marL="0">
+              <a:lnSpc>
+                <a:spcPts val="2000"/>
+              </a:lnSpc>
+              <a:buNone/>
+            </a:pPr>
+            <a:r>
+              <a:rPr lang="en-US" sz="1350" dirty="0">
+                <a:solidFill>
+                  <a:srgbClr val="B8C6D1"/>
+                </a:solidFill>
+                <a:latin typeface="Calibri" pitchFamily="34" charset="0"/>
+                <a:ea typeface="Calibri" pitchFamily="34" charset="-122"/>
+                <a:cs typeface="Calibri" pitchFamily="34" charset="-120"/>
+              </a:rPr>
+              <a:t>Checkable from a terminal — no account, no NDA, nobody from us in the room. 32 controls: 21 enforced in code, 7 implemented, 4 open. 942 automated tests behind the four responses below.</a:t>
+            </a:r>
+            <a:endParaRPr lang="en-US" sz="1350" dirty="0"/>
+          </a:p>
+        </p:txBody>
+      </p:sp>
+      <p:sp>
+        <p:nvSpPr>
+          <p:cNvPr id="6" name="Shape 4"/>
+          <p:cNvSpPr/>
+          <p:nvPr/>
+        </p:nvSpPr>
+        <p:spPr>
+          <a:xfrm>
+            <a:off x="731520" y="3108960"/>
+            <a:ext cx="10698480" cy="694944"/>
+          </a:xfrm>
+          <a:prstGeom prst="roundRect">
+            <a:avLst>
+              <a:gd name="adj" fmla="val 10526"/>
+            </a:avLst>
+          </a:prstGeom>
+          <a:solidFill>
+            <a:srgbClr val="1B3A54"/>
+          </a:solidFill>
+          <a:ln w="12700">
+            <a:solidFill>
+              <a:srgbClr val="1B3A54"/>
+            </a:solidFill>
+            <a:prstDash val="solid"/>
+          </a:ln>
+          <a:effectLst>
+            <a:outerShdw sx="100000" sy="100000" kx="0" ky="0" algn="bl" rotWithShape="0" blurRad="127000" dist="508" dir="5400000">
+              <a:srgbClr val="9AA8B4">
+                <a:alpha val="25000"/>
+              </a:srgbClr>
+            </a:outerShdw>
+          </a:effectLst>
+        </p:spPr>
+      </p:sp>
+      <p:sp>
+        <p:nvSpPr>
+          <p:cNvPr id="7" name="Text 5"/>
+          <p:cNvSpPr txBox="1"/>
+          <p:nvPr/>
+        </p:nvSpPr>
+        <p:spPr>
+          <a:xfrm>
+            <a:off x="1051560" y="3291840"/>
+            <a:ext cx="3291840" cy="320040"/>
+          </a:xfrm>
+          <a:prstGeom prst="rect">
+            <a:avLst/>
+          </a:prstGeom>
+          <a:noFill/>
+          <a:ln/>
+        </p:spPr>
+        <p:txBody>
+          <a:bodyPr wrap="square" lIns="0" tIns="0" rIns="0" bIns="0" rtlCol="0" anchor="ctr"/>
+          <a:lstStyle/>
+          <a:p>
+            <a:pPr indent="0" marL="0">
+              <a:buNone/>
+            </a:pPr>
+            <a:r>
+              <a:rPr lang="en-US" sz="1250" b="1" dirty="0">
+                <a:solidFill>
+                  <a:srgbClr val="B7E436"/>
+                </a:solidFill>
+                <a:latin typeface="Courier New" pitchFamily="34" charset="0"/>
+                <a:ea typeface="Courier New" pitchFamily="34" charset="-122"/>
+                <a:cs typeface="Courier New" pitchFamily="34" charset="-120"/>
+              </a:rPr>
+              <a:t>GET  /api/assurance</a:t>
+            </a:r>
+            <a:endParaRPr lang="en-US" sz="1250" dirty="0"/>
+          </a:p>
+        </p:txBody>
+      </p:sp>
+      <p:sp>
+        <p:nvSpPr>
+          <p:cNvPr id="8" name="Text 6"/>
+          <p:cNvSpPr txBox="1"/>
+          <p:nvPr/>
+        </p:nvSpPr>
+        <p:spPr>
+          <a:xfrm>
+            <a:off x="4526280" y="3291840"/>
+            <a:ext cx="6583680" cy="320040"/>
+          </a:xfrm>
+          <a:prstGeom prst="rect">
+            <a:avLst/>
+          </a:prstGeom>
+          <a:noFill/>
+          <a:ln/>
+        </p:spPr>
+        <p:txBody>
+          <a:bodyPr wrap="square" lIns="0" tIns="0" rIns="0" bIns="0" rtlCol="0" anchor="ctr"/>
+          <a:lstStyle/>
+          <a:p>
+            <a:pPr indent="0" marL="0">
+              <a:buNone/>
+            </a:pPr>
+            <a:r>
+              <a:rPr lang="en-US" sz="1200" dirty="0">
+                <a:solidFill>
+                  <a:srgbClr val="D6E2EA"/>
+                </a:solidFill>
+                <a:latin typeface="Calibri" pitchFamily="34" charset="0"/>
+                <a:ea typeface="Calibri" pitchFamily="34" charset="-122"/>
+                <a:cs typeface="Calibri" pitchFamily="34" charset="-120"/>
+              </a:rPr>
+              <a:t>Every control, its status, and the gaps — listed at the top, not buried.</a:t>
+            </a:r>
+            <a:endParaRPr lang="en-US" sz="1200" dirty="0"/>
+          </a:p>
+        </p:txBody>
+      </p:sp>
+      <p:sp>
+        <p:nvSpPr>
+          <p:cNvPr id="9" name="Shape 7"/>
+          <p:cNvSpPr/>
+          <p:nvPr/>
+        </p:nvSpPr>
+        <p:spPr>
+          <a:xfrm>
+            <a:off x="731520" y="3931920"/>
+            <a:ext cx="10698480" cy="694944"/>
+          </a:xfrm>
+          <a:prstGeom prst="roundRect">
+            <a:avLst>
+              <a:gd name="adj" fmla="val 10526"/>
+            </a:avLst>
+          </a:prstGeom>
+          <a:solidFill>
+            <a:srgbClr val="1B3A54"/>
+          </a:solidFill>
+          <a:ln w="12700">
+            <a:solidFill>
+              <a:srgbClr val="1B3A54"/>
+            </a:solidFill>
+            <a:prstDash val="solid"/>
+          </a:ln>
+          <a:effectLst>
+            <a:outerShdw sx="100000" sy="100000" kx="0" ky="0" algn="bl" rotWithShape="0" blurRad="127000" dist="508" dir="5400000">
+              <a:srgbClr val="9AA8B4">
+                <a:alpha val="25000"/>
+              </a:srgbClr>
+            </a:outerShdw>
+          </a:effectLst>
+        </p:spPr>
+      </p:sp>
+      <p:sp>
+        <p:nvSpPr>
+          <p:cNvPr id="10" name="Text 8"/>
+          <p:cNvSpPr txBox="1"/>
+          <p:nvPr/>
+        </p:nvSpPr>
+        <p:spPr>
+          <a:xfrm>
+            <a:off x="1051560" y="4114800"/>
+            <a:ext cx="3291840" cy="320040"/>
+          </a:xfrm>
+          <a:prstGeom prst="rect">
+            <a:avLst/>
+          </a:prstGeom>
+          <a:noFill/>
+          <a:ln/>
+        </p:spPr>
+        <p:txBody>
+          <a:bodyPr wrap="square" lIns="0" tIns="0" rIns="0" bIns="0" rtlCol="0" anchor="ctr"/>
+          <a:lstStyle/>
+          <a:p>
+            <a:pPr indent="0" marL="0">
+              <a:buNone/>
+            </a:pPr>
+            <a:r>
+              <a:rPr lang="en-US" sz="1250" b="1" dirty="0">
+                <a:solidFill>
+                  <a:srgbClr val="B7E436"/>
+                </a:solidFill>
+                <a:latin typeface="Courier New" pitchFamily="34" charset="0"/>
+                <a:ea typeface="Courier New" pitchFamily="34" charset="-122"/>
+                <a:cs typeface="Courier New" pitchFamily="34" charset="-120"/>
+              </a:rPr>
+              <a:t>GET  /api/movements/gate</a:t>
+            </a:r>
+            <a:endParaRPr lang="en-US" sz="1250" dirty="0"/>
+          </a:p>
+        </p:txBody>
+      </p:sp>
+      <p:sp>
+        <p:nvSpPr>
+          <p:cNvPr id="11" name="Text 9"/>
+          <p:cNvSpPr txBox="1"/>
+          <p:nvPr/>
+        </p:nvSpPr>
+        <p:spPr>
+          <a:xfrm>
+            <a:off x="4526280" y="4114800"/>
+            <a:ext cx="6583680" cy="320040"/>
+          </a:xfrm>
+          <a:prstGeom prst="rect">
+            <a:avLst/>
+          </a:prstGeom>
+          <a:noFill/>
+          <a:ln/>
+        </p:spPr>
+        <p:txBody>
+          <a:bodyPr wrap="square" lIns="0" tIns="0" rIns="0" bIns="0" rtlCol="0" anchor="ctr"/>
+          <a:lstStyle/>
+          <a:p>
+            <a:pPr indent="0" marL="0">
+              <a:buNone/>
+            </a:pPr>
+            <a:r>
+              <a:rPr lang="en-US" sz="1200" dirty="0">
+                <a:solidFill>
+                  <a:srgbClr val="D6E2EA"/>
+                </a:solidFill>
+                <a:latin typeface="Calibri" pitchFamily="34" charset="0"/>
+                <a:ea typeface="Calibri" pitchFamily="34" charset="-122"/>
+                <a:cs typeface="Calibri" pitchFamily="34" charset="-120"/>
+              </a:rPr>
+              <a:t>The publishing contract: five variants, a cue set per age band, no override.</a:t>
+            </a:r>
+            <a:endParaRPr lang="en-US" sz="1200" dirty="0"/>
+          </a:p>
+        </p:txBody>
+      </p:sp>
+      <p:sp>
+        <p:nvSpPr>
+          <p:cNvPr id="12" name="Shape 10"/>
+          <p:cNvSpPr/>
+          <p:nvPr/>
+        </p:nvSpPr>
+        <p:spPr>
+          <a:xfrm>
+            <a:off x="731520" y="4754880"/>
+            <a:ext cx="10698480" cy="694944"/>
+          </a:xfrm>
+          <a:prstGeom prst="roundRect">
+            <a:avLst>
+              <a:gd name="adj" fmla="val 10526"/>
+            </a:avLst>
+          </a:prstGeom>
+          <a:solidFill>
+            <a:srgbClr val="1B3A54"/>
+          </a:solidFill>
+          <a:ln w="12700">
+            <a:solidFill>
+              <a:srgbClr val="1B3A54"/>
+            </a:solidFill>
+            <a:prstDash val="solid"/>
+          </a:ln>
+          <a:effectLst>
+            <a:outerShdw sx="100000" sy="100000" kx="0" ky="0" algn="bl" rotWithShape="0" blurRad="127000" dist="508" dir="5400000">
+              <a:srgbClr val="9AA8B4">
+                <a:alpha val="25000"/>
+              </a:srgbClr>
+            </a:outerShdw>
+          </a:effectLst>
+        </p:spPr>
+      </p:sp>
+      <p:sp>
+        <p:nvSpPr>
+          <p:cNvPr id="13" name="Text 11"/>
+          <p:cNvSpPr txBox="1"/>
+          <p:nvPr/>
+        </p:nvSpPr>
+        <p:spPr>
+          <a:xfrm>
+            <a:off x="1051560" y="4937760"/>
+            <a:ext cx="3291840" cy="320040"/>
+          </a:xfrm>
+          <a:prstGeom prst="rect">
+            <a:avLst/>
+          </a:prstGeom>
+          <a:noFill/>
+          <a:ln/>
+        </p:spPr>
+        <p:txBody>
+          <a:bodyPr wrap="square" lIns="0" tIns="0" rIns="0" bIns="0" rtlCol="0" anchor="ctr"/>
+          <a:lstStyle/>
+          <a:p>
+            <a:pPr indent="0" marL="0">
+              <a:buNone/>
+            </a:pPr>
+            <a:r>
+              <a:rPr lang="en-US" sz="1250" b="1" dirty="0">
+                <a:solidFill>
+                  <a:srgbClr val="B7E436"/>
+                </a:solidFill>
+                <a:latin typeface="Courier New" pitchFamily="34" charset="0"/>
+                <a:ea typeface="Courier New" pitchFamily="34" charset="-122"/>
+                <a:cs typeface="Courier New" pitchFamily="34" charset="-120"/>
+              </a:rPr>
+              <a:t>POST /api/body/assess</a:t>
+            </a:r>
+            <a:endParaRPr lang="en-US" sz="1250" dirty="0"/>
+          </a:p>
+        </p:txBody>
+      </p:sp>
+      <p:sp>
+        <p:nvSpPr>
+          <p:cNvPr id="14" name="Text 12"/>
+          <p:cNvSpPr txBox="1"/>
+          <p:nvPr/>
+        </p:nvSpPr>
+        <p:spPr>
+          <a:xfrm>
+            <a:off x="4526280" y="4937760"/>
+            <a:ext cx="6583680" cy="320040"/>
+          </a:xfrm>
+          <a:prstGeom prst="rect">
+            <a:avLst/>
+          </a:prstGeom>
+          <a:noFill/>
+          <a:ln/>
+        </p:spPr>
+        <p:txBody>
+          <a:bodyPr wrap="square" lIns="0" tIns="0" rIns="0" bIns="0" rtlCol="0" anchor="ctr"/>
+          <a:lstStyle/>
+          <a:p>
+            <a:pPr indent="0" marL="0">
+              <a:buNone/>
+            </a:pPr>
+            <a:r>
+              <a:rPr lang="en-US" sz="1200" dirty="0">
+                <a:solidFill>
+                  <a:srgbClr val="D6E2EA"/>
+                </a:solidFill>
+                <a:latin typeface="Calibri" pitchFamily="34" charset="0"/>
+                <a:ea typeface="Calibri" pitchFamily="34" charset="-122"/>
+                <a:cs typeface="Calibri" pitchFamily="34" charset="-120"/>
+              </a:rPr>
+              <a:t>Send a twelve-year-old with consent set true. It returns metrics: null.</a:t>
+            </a:r>
+            <a:endParaRPr lang="en-US" sz="1200" dirty="0"/>
+          </a:p>
+        </p:txBody>
+      </p:sp>
+      <p:sp>
+        <p:nvSpPr>
+          <p:cNvPr id="15" name="Shape 13"/>
+          <p:cNvSpPr/>
+          <p:nvPr/>
+        </p:nvSpPr>
+        <p:spPr>
+          <a:xfrm>
+            <a:off x="731520" y="5577840"/>
+            <a:ext cx="10698480" cy="694944"/>
+          </a:xfrm>
+          <a:prstGeom prst="roundRect">
+            <a:avLst>
+              <a:gd name="adj" fmla="val 10526"/>
+            </a:avLst>
+          </a:prstGeom>
+          <a:solidFill>
+            <a:srgbClr val="1B3A54"/>
+          </a:solidFill>
+          <a:ln w="12700">
+            <a:solidFill>
+              <a:srgbClr val="1B3A54"/>
+            </a:solidFill>
+            <a:prstDash val="solid"/>
+          </a:ln>
+          <a:effectLst>
+            <a:outerShdw sx="100000" sy="100000" kx="0" ky="0" algn="bl" rotWithShape="0" blurRad="127000" dist="508" dir="5400000">
+              <a:srgbClr val="9AA8B4">
+                <a:alpha val="25000"/>
+              </a:srgbClr>
+            </a:outerShdw>
+          </a:effectLst>
+        </p:spPr>
+      </p:sp>
+      <p:sp>
+        <p:nvSpPr>
+          <p:cNvPr id="16" name="Text 14"/>
+          <p:cNvSpPr txBox="1"/>
+          <p:nvPr/>
+        </p:nvSpPr>
+        <p:spPr>
+          <a:xfrm>
+            <a:off x="1051560" y="5760720"/>
+            <a:ext cx="3291840" cy="320040"/>
+          </a:xfrm>
+          <a:prstGeom prst="rect">
+            <a:avLst/>
+          </a:prstGeom>
+          <a:noFill/>
+          <a:ln/>
+        </p:spPr>
+        <p:txBody>
+          <a:bodyPr wrap="square" lIns="0" tIns="0" rIns="0" bIns="0" rtlCol="0" anchor="ctr"/>
+          <a:lstStyle/>
+          <a:p>
+            <a:pPr indent="0" marL="0">
+              <a:buNone/>
+            </a:pPr>
+            <a:r>
+              <a:rPr lang="en-US" sz="1250" b="1" dirty="0">
+                <a:solidFill>
+                  <a:srgbClr val="B7E436"/>
+                </a:solidFill>
+                <a:latin typeface="Courier New" pitchFamily="34" charset="0"/>
+                <a:ea typeface="Courier New" pitchFamily="34" charset="-122"/>
+                <a:cs typeface="Courier New" pitchFamily="34" charset="-120"/>
+              </a:rPr>
+              <a:t>GET  /api/health</a:t>
+            </a:r>
+            <a:endParaRPr lang="en-US" sz="1250" dirty="0"/>
+          </a:p>
+        </p:txBody>
+      </p:sp>
+      <p:sp>
+        <p:nvSpPr>
+          <p:cNvPr id="17" name="Text 15"/>
+          <p:cNvSpPr txBox="1"/>
+          <p:nvPr/>
+        </p:nvSpPr>
+        <p:spPr>
+          <a:xfrm>
+            <a:off x="4526280" y="5760720"/>
+            <a:ext cx="6583680" cy="320040"/>
+          </a:xfrm>
+          <a:prstGeom prst="rect">
+            <a:avLst/>
+          </a:prstGeom>
+          <a:noFill/>
+          <a:ln/>
+        </p:spPr>
+        <p:txBody>
+          <a:bodyPr wrap="square" lIns="0" tIns="0" rIns="0" bIns="0" rtlCol="0" anchor="ctr"/>
+          <a:lstStyle/>
+          <a:p>
+            <a:pPr indent="0" marL="0">
+              <a:buNone/>
+            </a:pPr>
+            <a:r>
+              <a:rPr lang="en-US" sz="1200" dirty="0">
+                <a:solidFill>
+                  <a:srgbClr val="D6E2EA"/>
+                </a:solidFill>
+                <a:latin typeface="Calibri" pitchFamily="34" charset="0"/>
+                <a:ea typeface="Calibri" pitchFamily="34" charset="-122"/>
+                <a:cs typeface="Calibri" pitchFamily="34" charset="-120"/>
+              </a:rPr>
+              <a:t>A live check that opens a database connection, never a stored badge.</a:t>
+            </a:r>
+            <a:endParaRPr lang="en-US" sz="1200" dirty="0"/>
+          </a:p>
+        </p:txBody>
+      </p:sp>
+    </p:spTree>
+  </p:cSld>
+  <p:clrMapOvr>
+    <a:masterClrMapping/>
+  </p:clrMapOvr>
+</p:sld>
+</file>
+
+<file path=ppt/slides/slide8.xml><?xml version="1.0" encoding="utf-8"?>
+<p:sld xmlns:a="http://schemas.openxmlformats.org/drawingml/2006/main" xmlns:r="http://schemas.openxmlformats.org/officeDocument/2006/relationships" xmlns:p="http://schemas.openxmlformats.org/presentationml/2006/main">
+  <p:cSld name="Slide 8">
     <p:bg>
       <p:bgPr>
         <a:solidFill>
@@ -7349,7 +7772,7 @@
                 <a:ea typeface="Arial" pitchFamily="34" charset="-122"/>
                 <a:cs typeface="Arial" pitchFamily="34" charset="-120"/>
               </a:rPr>
-              <a:t>WHAT YOU ACTUALLY RECEIVE</a:t>
+              <a:t>YOUR LEGAL, HR AND SECURITY TEAMS</a:t>
             </a:r>
             <a:endParaRPr lang="en-US" sz="1200" dirty="0"/>
           </a:p>
@@ -7380,7 +7803,7 @@
               <a:buNone/>
             </a:pPr>
             <a:r>
-              <a:rPr lang="en-US" sz="3400" b="1" dirty="0">
+              <a:rPr lang="en-US" sz="3600" b="1" dirty="0">
                 <a:solidFill>
                   <a:srgbClr val="102A43"/>
                 </a:solidFill>
@@ -7388,26 +7811,9 @@
                 <a:ea typeface="Cambria" pitchFamily="34" charset="-122"/>
                 <a:cs typeface="Cambria" pitchFamily="34" charset="-120"/>
               </a:rPr>
-              <a:t>Enough to run a programme.</a:t>
-            </a:r>
-            <a:endParaRPr lang="en-US" sz="3400" dirty="0"/>
-          </a:p>
-          <a:p>
-            <a:pPr indent="0" marL="0">
-              <a:buNone/>
-            </a:pPr>
-            <a:r>
-              <a:rPr lang="en-US" sz="3400" b="1" dirty="0">
-                <a:solidFill>
-                  <a:srgbClr val="102A43"/>
-                </a:solidFill>
-                <a:latin typeface="Cambria" pitchFamily="34" charset="0"/>
-                <a:ea typeface="Cambria" pitchFamily="34" charset="-122"/>
-                <a:cs typeface="Cambria" pitchFamily="34" charset="-120"/>
-              </a:rPr>
-              <a:t>Not enough to manage a person.</a:t>
-            </a:r>
-            <a:endParaRPr lang="en-US" sz="3400" dirty="0"/>
+              <a:t>Four things enforced. Four things open.</a:t>
+            </a:r>
+            <a:endParaRPr lang="en-US" sz="3600" dirty="0"/>
           </a:p>
         </p:txBody>
       </p:sp>
@@ -7419,7 +7825,7 @@
         </p:nvSpPr>
         <p:spPr>
           <a:xfrm>
-            <a:off x="731520" y="2468880"/>
+            <a:off x="731520" y="2148840"/>
             <a:ext cx="5166360" cy="274320"/>
           </a:xfrm>
           <a:prstGeom prst="rect">
@@ -7444,7 +7850,7 @@
                 <a:ea typeface="Arial" pitchFamily="34" charset="-122"/>
                 <a:cs typeface="Arial" pitchFamily="34" charset="-120"/>
               </a:rPr>
-              <a:t>Today</a:t>
+              <a:t>Enforced in code and schema</a:t>
             </a:r>
             <a:endParaRPr lang="en-US" sz="1200" dirty="0"/>
           </a:p>
@@ -7458,7 +7864,7 @@
         </p:nvSpPr>
         <p:spPr>
           <a:xfrm>
-            <a:off x="6263640" y="2468880"/>
+            <a:off x="6263640" y="2148840"/>
             <a:ext cx="5166360" cy="274320"/>
           </a:xfrm>
           <a:prstGeom prst="rect">
@@ -7483,7 +7889,7 @@
                 <a:ea typeface="Arial" pitchFamily="34" charset="-122"/>
                 <a:cs typeface="Arial" pitchFamily="34" charset="-120"/>
               </a:rPr>
-              <a:t>Not built yet</a:t>
+              <a:t>Open, and named before you ask</a:t>
             </a:r>
             <a:endParaRPr lang="en-US" sz="1200" dirty="0"/>
           </a:p>
@@ -7497,12 +7903,12 @@
         </p:nvSpPr>
         <p:spPr>
           <a:xfrm>
-            <a:off x="731520" y="2834640"/>
-            <a:ext cx="5166360" cy="1965960"/>
+            <a:off x="731520" y="2514600"/>
+            <a:ext cx="5166360" cy="2971800"/>
           </a:xfrm>
           <a:prstGeom prst="roundRect">
             <a:avLst>
-              <a:gd name="adj" fmla="val 3721"/>
+              <a:gd name="adj" fmla="val 2462"/>
             </a:avLst>
           </a:prstGeom>
           <a:solidFill>
@@ -7531,47 +7937,8 @@
         </p:nvSpPr>
         <p:spPr>
           <a:xfrm>
-            <a:off x="1097280" y="3063240"/>
-            <a:ext cx="4480560" cy="274320"/>
-          </a:xfrm>
-          <a:prstGeom prst="rect">
-            <a:avLst/>
-          </a:prstGeom>
-          <a:noFill/>
-          <a:ln/>
-        </p:spPr>
-        <p:txBody>
-          <a:bodyPr wrap="square" lIns="0" tIns="0" rIns="0" bIns="0" rtlCol="0" anchor="ctr"/>
-          <a:lstStyle/>
-          <a:p>
-            <a:pPr indent="0" marL="0">
-              <a:buNone/>
-            </a:pPr>
-            <a:r>
-              <a:rPr lang="en-US" sz="1350" b="1" dirty="0">
-                <a:solidFill>
-                  <a:srgbClr val="102A43"/>
-                </a:solidFill>
-                <a:latin typeface="Arial" pitchFamily="34" charset="0"/>
-                <a:ea typeface="Arial" pitchFamily="34" charset="-122"/>
-                <a:cs typeface="Arial" pitchFamily="34" charset="-120"/>
-              </a:rPr>
-              <a:t>The cohort report returns</a:t>
-            </a:r>
-            <a:endParaRPr lang="en-US" sz="1350" dirty="0"/>
-          </a:p>
-        </p:txBody>
-      </p:sp>
-      <p:sp>
-        <p:nvSpPr>
-          <p:cNvPr id="9" name="Text 7"/>
-          <p:cNvSpPr txBox="1"/>
-          <p:nvPr/>
-        </p:nvSpPr>
-        <p:spPr>
-          <a:xfrm>
-            <a:off x="1097280" y="3474720"/>
-            <a:ext cx="4434840" cy="1737360"/>
+            <a:off x="1097280" y="2743200"/>
+            <a:ext cx="4434840" cy="2560320"/>
           </a:xfrm>
           <a:prstGeom prst="rect">
             <a:avLst/>
@@ -7585,16 +7952,16 @@
           <a:p>
             <a:pPr marL="342900" indent="-342900">
               <a:lnSpc>
-                <a:spcPts val="1700"/>
+                <a:spcPts val="1600"/>
               </a:lnSpc>
               <a:spcAft>
-                <a:spcPts val="700"/>
+                <a:spcPts val="900"/>
               </a:spcAft>
               <a:buSzPct val="100000"/>
               <a:buChar char="•"/>
             </a:pPr>
             <a:r>
-              <a:rPr lang="en-US" sz="1200" dirty="0">
+              <a:rPr lang="en-US" sz="1150" dirty="0">
                 <a:solidFill>
                   <a:srgbClr val="475663"/>
                 </a:solidFill>
@@ -7602,23 +7969,23 @@
                 <a:ea typeface="Calibri" pitchFamily="34" charset="-122"/>
                 <a:cs typeface="Calibri" pitchFamily="34" charset="-120"/>
               </a:rPr>
-              <a:t>Participation rate across the cohort</a:t>
-            </a:r>
-            <a:endParaRPr lang="en-US" sz="1200" dirty="0"/>
+              <a:t>A declared condition is stored as a catalogue identifier. No severity, no dates, no medication, no free text.</a:t>
+            </a:r>
+            <a:endParaRPr lang="en-US" sz="1150" dirty="0"/>
           </a:p>
           <a:p>
             <a:pPr marL="342900" indent="-342900">
               <a:lnSpc>
-                <a:spcPts val="1700"/>
+                <a:spcPts val="1600"/>
               </a:lnSpc>
               <a:spcAft>
-                <a:spcPts val="700"/>
+                <a:spcPts val="900"/>
               </a:spcAft>
               <a:buSzPct val="100000"/>
               <a:buChar char="•"/>
             </a:pPr>
             <a:r>
-              <a:rPr lang="en-US" sz="1200" dirty="0">
+              <a:rPr lang="en-US" sz="1150" dirty="0">
                 <a:solidFill>
                   <a:srgbClr val="475663"/>
                 </a:solidFill>
@@ -7626,23 +7993,23 @@
                 <a:ea typeface="Calibri" pitchFamily="34" charset="-122"/>
                 <a:cs typeface="Calibri" pitchFamily="34" charset="-120"/>
               </a:rPr>
-              <a:t>How many people were active</a:t>
-            </a:r>
-            <a:endParaRPr lang="en-US" sz="1200" dirty="0"/>
+              <a:t>Deleting an account cascades in the database from the user row — a guarantee, not a callback somebody has to remember.</a:t>
+            </a:r>
+            <a:endParaRPr lang="en-US" sz="1150" dirty="0"/>
           </a:p>
           <a:p>
             <a:pPr marL="342900" indent="-342900">
               <a:lnSpc>
-                <a:spcPts val="1700"/>
+                <a:spcPts val="1600"/>
               </a:lnSpc>
               <a:spcAft>
-                <a:spcPts val="700"/>
+                <a:spcPts val="900"/>
               </a:spcAft>
               <a:buSzPct val="100000"/>
               <a:buChar char="•"/>
             </a:pPr>
             <a:r>
-              <a:rPr lang="en-US" sz="1200" dirty="0">
+              <a:rPr lang="en-US" sz="1150" dirty="0">
                 <a:solidFill>
                   <a:srgbClr val="475663"/>
                 </a:solidFill>
@@ -7650,20 +8017,20 @@
                 <a:ea typeface="Calibri" pitchFamily="34" charset="-122"/>
                 <a:cs typeface="Calibri" pitchFamily="34" charset="-120"/>
               </a:rPr>
-              <a:t>Median days moved in the period</a:t>
-            </a:r>
-            <a:endParaRPr lang="en-US" sz="1200" dirty="0"/>
+              <a:t>Health data never reaches an organisation view at any cohort size. A test asserts that no module outside the conditions service touches that table.</a:t>
+            </a:r>
+            <a:endParaRPr lang="en-US" sz="1150" dirty="0"/>
           </a:p>
           <a:p>
             <a:pPr marL="342900" indent="-342900">
               <a:lnSpc>
-                <a:spcPts val="1700"/>
+                <a:spcPts val="1600"/>
               </a:lnSpc>
               <a:buSzPct val="100000"/>
               <a:buChar char="•"/>
             </a:pPr>
             <a:r>
-              <a:rPr lang="en-US" sz="1200" dirty="0">
+              <a:rPr lang="en-US" sz="1150" dirty="0">
                 <a:solidFill>
                   <a:srgbClr val="475663"/>
                 </a:solidFill>
@@ -7671,26 +8038,26 @@
                 <a:ea typeface="Calibri" pitchFamily="34" charset="-122"/>
                 <a:cs typeface="Calibri" pitchFamily="34" charset="-120"/>
               </a:rPr>
-              <a:t>Whether the answer was suppressed, and the floor</a:t>
-            </a:r>
-            <a:endParaRPr lang="en-US" sz="1200" dirty="0"/>
-          </a:p>
-        </p:txBody>
-      </p:sp>
-      <p:sp>
-        <p:nvSpPr>
-          <p:cNvPr id="10" name="Shape 8"/>
+              <a:t>Analytics identifiers are hashed on arrival with a salt regenerated daily, and never outlive the request.</a:t>
+            </a:r>
+            <a:endParaRPr lang="en-US" sz="1150" dirty="0"/>
+          </a:p>
+        </p:txBody>
+      </p:sp>
+      <p:sp>
+        <p:nvSpPr>
+          <p:cNvPr id="9" name="Shape 7"/>
           <p:cNvSpPr/>
           <p:nvPr/>
         </p:nvSpPr>
         <p:spPr>
           <a:xfrm>
-            <a:off x="6263640" y="2834640"/>
-            <a:ext cx="5166360" cy="1965960"/>
+            <a:off x="6263640" y="2514600"/>
+            <a:ext cx="5166360" cy="2971800"/>
           </a:xfrm>
           <a:prstGeom prst="roundRect">
             <a:avLst>
-              <a:gd name="adj" fmla="val 3721"/>
+              <a:gd name="adj" fmla="val 2462"/>
             </a:avLst>
           </a:prstGeom>
           <a:solidFill>
@@ -7713,53 +8080,14 @@
       </p:sp>
       <p:sp>
         <p:nvSpPr>
-          <p:cNvPr id="11" name="Text 9"/>
-          <p:cNvSpPr txBox="1"/>
-          <p:nvPr/>
-        </p:nvSpPr>
-        <p:spPr>
-          <a:xfrm>
-            <a:off x="6629400" y="3063240"/>
-            <a:ext cx="4480560" cy="274320"/>
-          </a:xfrm>
-          <a:prstGeom prst="rect">
-            <a:avLst/>
-          </a:prstGeom>
-          <a:noFill/>
-          <a:ln/>
-        </p:spPr>
-        <p:txBody>
-          <a:bodyPr wrap="square" lIns="0" tIns="0" rIns="0" bIns="0" rtlCol="0" anchor="ctr"/>
-          <a:lstStyle/>
-          <a:p>
-            <a:pPr indent="0" marL="0">
-              <a:buNone/>
-            </a:pPr>
-            <a:r>
-              <a:rPr lang="en-US" sz="1350" b="1" dirty="0">
-                <a:solidFill>
-                  <a:srgbClr val="102A43"/>
-                </a:solidFill>
-                <a:latin typeface="Arial" pitchFamily="34" charset="0"/>
-                <a:ea typeface="Arial" pitchFamily="34" charset="-122"/>
-                <a:cs typeface="Arial" pitchFamily="34" charset="-120"/>
-              </a:rPr>
-              <a:t>Built with a design partner</a:t>
-            </a:r>
-            <a:endParaRPr lang="en-US" sz="1350" dirty="0"/>
-          </a:p>
-        </p:txBody>
-      </p:sp>
-      <p:sp>
-        <p:nvSpPr>
-          <p:cNvPr id="12" name="Text 10"/>
-          <p:cNvSpPr txBox="1"/>
-          <p:nvPr/>
-        </p:nvSpPr>
-        <p:spPr>
-          <a:xfrm>
-            <a:off x="6629400" y="3474720"/>
-            <a:ext cx="4434840" cy="1737360"/>
+          <p:cNvPr id="10" name="Text 8"/>
+          <p:cNvSpPr txBox="1"/>
+          <p:nvPr/>
+        </p:nvSpPr>
+        <p:spPr>
+          <a:xfrm>
+            <a:off x="6629400" y="2743200"/>
+            <a:ext cx="4434840" cy="2560320"/>
           </a:xfrm>
           <a:prstGeom prst="rect">
             <a:avLst/>
@@ -7773,16 +8101,16 @@
           <a:p>
             <a:pPr marL="342900" indent="-342900">
               <a:lnSpc>
-                <a:spcPts val="1700"/>
+                <a:spcPts val="1600"/>
               </a:lnSpc>
               <a:spcAft>
-                <a:spcPts val="700"/>
+                <a:spcPts val="900"/>
               </a:spcAft>
               <a:buSzPct val="100000"/>
               <a:buChar char="•"/>
             </a:pPr>
             <a:r>
-              <a:rPr lang="en-US" sz="1200" dirty="0">
+              <a:rPr lang="en-US" sz="1150" dirty="0">
                 <a:solidFill>
                   <a:srgbClr val="475663"/>
                 </a:solidFill>
@@ -7790,23 +8118,23 @@
                 <a:ea typeface="Calibri" pitchFamily="34" charset="-122"/>
                 <a:cs typeface="Calibri" pitchFamily="34" charset="-120"/>
               </a:rPr>
-              <a:t>A trend series against a baseline</a:t>
-            </a:r>
-            <a:endParaRPr lang="en-US" sz="1200" dirty="0"/>
+              <a:t>No external WCAG 2.2 AA audit and no VPAT. Accessibility is designed for and tested in places, not certified.</a:t>
+            </a:r>
+            <a:endParaRPr lang="en-US" sz="1150" dirty="0"/>
           </a:p>
           <a:p>
             <a:pPr marL="342900" indent="-342900">
               <a:lnSpc>
-                <a:spcPts val="1700"/>
+                <a:spcPts val="1600"/>
               </a:lnSpc>
               <a:spcAft>
-                <a:spcPts val="700"/>
+                <a:spcPts val="900"/>
               </a:spcAft>
               <a:buSzPct val="100000"/>
               <a:buChar char="•"/>
             </a:pPr>
             <a:r>
-              <a:rPr lang="en-US" sz="1200" dirty="0">
+              <a:rPr lang="en-US" sz="1150" dirty="0">
                 <a:solidFill>
                   <a:srgbClr val="475663"/>
                 </a:solidFill>
@@ -7814,23 +8142,23 @@
                 <a:ea typeface="Calibri" pitchFamily="34" charset="-122"/>
                 <a:cs typeface="Calibri" pitchFamily="34" charset="-120"/>
               </a:rPr>
-              <a:t>Sedentary-risk distribution by cohort</a:t>
-            </a:r>
-            <a:endParaRPr lang="en-US" sz="1200" dirty="0"/>
+              <a:t>Age is self-declared. Ofcom’s position is that self-declaration is not highly effective age assurance.</a:t>
+            </a:r>
+            <a:endParaRPr lang="en-US" sz="1150" dirty="0"/>
           </a:p>
           <a:p>
             <a:pPr marL="342900" indent="-342900">
               <a:lnSpc>
-                <a:spcPts val="1700"/>
+                <a:spcPts val="1600"/>
               </a:lnSpc>
               <a:spcAft>
-                <a:spcPts val="700"/>
+                <a:spcPts val="900"/>
               </a:spcAft>
               <a:buSzPct val="100000"/>
               <a:buChar char="•"/>
             </a:pPr>
             <a:r>
-              <a:rPr lang="en-US" sz="1200" dirty="0">
+              <a:rPr lang="en-US" sz="1150" dirty="0">
                 <a:solidFill>
                   <a:srgbClr val="475663"/>
                 </a:solidFill>
@@ -7838,20 +8166,20 @@
                 <a:ea typeface="Calibri" pitchFamily="34" charset="-122"/>
                 <a:cs typeface="Calibri" pitchFamily="34" charset="-120"/>
               </a:rPr>
-              <a:t>A return-on-investment model, assumptions shown</a:t>
-            </a:r>
-            <a:endParaRPr lang="en-US" sz="1200" dirty="0"/>
+              <a:t>A member can read their whole record through their own endpoints, but there is no one-click export archive yet.</a:t>
+            </a:r>
+            <a:endParaRPr lang="en-US" sz="1150" dirty="0"/>
           </a:p>
           <a:p>
             <a:pPr marL="342900" indent="-342900">
               <a:lnSpc>
-                <a:spcPts val="1700"/>
+                <a:spcPts val="1600"/>
               </a:lnSpc>
               <a:buSzPct val="100000"/>
               <a:buChar char="•"/>
             </a:pPr>
             <a:r>
-              <a:rPr lang="en-US" sz="1200" dirty="0">
+              <a:rPr lang="en-US" sz="1150" dirty="0">
                 <a:solidFill>
                   <a:srgbClr val="475663"/>
                 </a:solidFill>
@@ -7859,21 +8187,21 @@
                 <a:ea typeface="Calibri" pitchFamily="34" charset="-122"/>
                 <a:cs typeface="Calibri" pitchFamily="34" charset="-120"/>
               </a:rPr>
-              <a:t>Single sign-on and directory sync</a:t>
-            </a:r>
-            <a:endParaRPr lang="en-US" sz="1200" dirty="0"/>
-          </a:p>
-        </p:txBody>
-      </p:sp>
-      <p:sp>
-        <p:nvSpPr>
-          <p:cNvPr id="13" name="Text 11"/>
-          <p:cNvSpPr txBox="1"/>
-          <p:nvPr/>
-        </p:nvSpPr>
-        <p:spPr>
-          <a:xfrm>
-            <a:off x="731520" y="5623560"/>
+              <a:t>The Clinical Safety Officer appointment record is incomplete against DCB0129, and the hazard log says so itself.</a:t>
+            </a:r>
+            <a:endParaRPr lang="en-US" sz="1150" dirty="0"/>
+          </a:p>
+        </p:txBody>
+      </p:sp>
+      <p:sp>
+        <p:nvSpPr>
+          <p:cNvPr id="11" name="Text 9"/>
+          <p:cNvSpPr txBox="1"/>
+          <p:nvPr/>
+        </p:nvSpPr>
+        <p:spPr>
+          <a:xfrm>
+            <a:off x="731520" y="5715000"/>
             <a:ext cx="10698480" cy="640080"/>
           </a:xfrm>
           <a:prstGeom prst="rect">
@@ -7901,646 +8229,9 @@
                 <a:ea typeface="Calibri" pitchFamily="34" charset="-122"/>
                 <a:cs typeface="Calibri" pitchFamily="34" charset="-120"/>
               </a:rPr>
-              <a:t>Below eight contributing people every figure is null, not rounded — for you as well as for everyone else. An eleven-person company cannot have anonymous reporting however it is sold.</a:t>
+              <a:t>We did not assemble the right-hand column for this slide. It is what GET /api/assurance returns to anybody who calls it, gaps lifted to the top of the response rather than left to be found area by area.</a:t>
             </a:r>
             <a:endParaRPr lang="en-US" sz="1250" dirty="0"/>
-          </a:p>
-        </p:txBody>
-      </p:sp>
-    </p:spTree>
-  </p:cSld>
-  <p:clrMapOvr>
-    <a:masterClrMapping/>
-  </p:clrMapOvr>
-</p:sld>
-</file>
-
-<file path=ppt/slides/slide8.xml><?xml version="1.0" encoding="utf-8"?>
-<p:sld xmlns:a="http://schemas.openxmlformats.org/drawingml/2006/main" xmlns:r="http://schemas.openxmlformats.org/officeDocument/2006/relationships" xmlns:p="http://schemas.openxmlformats.org/presentationml/2006/main">
-  <p:cSld name="Slide 8">
-    <p:bg>
-      <p:bgPr>
-        <a:solidFill>
-          <a:srgbClr val="102A43"/>
-        </a:solidFill>
-      </p:bgPr>
-    </p:bg>
-    <p:spTree>
-      <p:nvGrpSpPr>
-        <p:cNvPr id="1" name=""/>
-        <p:cNvGrpSpPr/>
-        <p:nvPr/>
-      </p:nvGrpSpPr>
-      <p:grpSpPr>
-        <a:xfrm>
-          <a:off x="0" y="0"/>
-          <a:ext cx="0" cy="0"/>
-          <a:chOff x="0" y="0"/>
-          <a:chExt cx="0" cy="0"/>
-        </a:xfrm>
-      </p:grpSpPr>
-      <p:sp>
-        <p:nvSpPr>
-          <p:cNvPr id="2" name="Shape 0"/>
-          <p:cNvSpPr/>
-          <p:nvPr/>
-        </p:nvSpPr>
-        <p:spPr>
-          <a:xfrm>
-            <a:off x="731520" y="690372"/>
-            <a:ext cx="118872" cy="118872"/>
-          </a:xfrm>
-          <a:prstGeom prst="ellipse">
-            <a:avLst/>
-          </a:prstGeom>
-          <a:solidFill>
-            <a:srgbClr val="B7E436"/>
-          </a:solidFill>
-          <a:ln/>
-        </p:spPr>
-      </p:sp>
-      <p:sp>
-        <p:nvSpPr>
-          <p:cNvPr id="3" name="Text 1"/>
-          <p:cNvSpPr txBox="1"/>
-          <p:nvPr/>
-        </p:nvSpPr>
-        <p:spPr>
-          <a:xfrm>
-            <a:off x="969264" y="640080"/>
-            <a:ext cx="7315200" cy="274320"/>
-          </a:xfrm>
-          <a:prstGeom prst="rect">
-            <a:avLst/>
-          </a:prstGeom>
-          <a:noFill/>
-          <a:ln/>
-        </p:spPr>
-        <p:txBody>
-          <a:bodyPr wrap="square" lIns="0" tIns="0" rIns="0" bIns="0" rtlCol="0" anchor="ctr"/>
-          <a:lstStyle/>
-          <a:p>
-            <a:pPr indent="0" marL="0">
-              <a:buNone/>
-            </a:pPr>
-            <a:r>
-              <a:rPr lang="en-US" sz="1200" b="1" spc="200" kern="0" dirty="0">
-                <a:solidFill>
-                  <a:srgbClr val="B7E436"/>
-                </a:solidFill>
-                <a:latin typeface="Arial" pitchFamily="34" charset="0"/>
-                <a:ea typeface="Arial" pitchFamily="34" charset="-122"/>
-                <a:cs typeface="Arial" pitchFamily="34" charset="-120"/>
-              </a:rPr>
-              <a:t>FOR YOUR SECURITY REVIEW</a:t>
-            </a:r>
-            <a:endParaRPr lang="en-US" sz="1200" dirty="0"/>
-          </a:p>
-        </p:txBody>
-      </p:sp>
-      <p:sp>
-        <p:nvSpPr>
-          <p:cNvPr id="4" name="Text 2"/>
-          <p:cNvSpPr txBox="1"/>
-          <p:nvPr/>
-        </p:nvSpPr>
-        <p:spPr>
-          <a:xfrm>
-            <a:off x="731520" y="1051560"/>
-            <a:ext cx="10698480" cy="1005840"/>
-          </a:xfrm>
-          <a:prstGeom prst="rect">
-            <a:avLst/>
-          </a:prstGeom>
-          <a:noFill/>
-          <a:ln/>
-        </p:spPr>
-        <p:txBody>
-          <a:bodyPr wrap="square" lIns="0" tIns="0" rIns="0" bIns="0" rtlCol="0" anchor="ctr"/>
-          <a:lstStyle/>
-          <a:p>
-            <a:pPr indent="0" marL="0">
-              <a:buNone/>
-            </a:pPr>
-            <a:r>
-              <a:rPr lang="en-US" sz="3400" b="1" dirty="0">
-                <a:solidFill>
-                  <a:srgbClr val="FFFFFF"/>
-                </a:solidFill>
-                <a:latin typeface="Cambria" pitchFamily="34" charset="0"/>
-                <a:ea typeface="Cambria" pitchFamily="34" charset="-122"/>
-                <a:cs typeface="Cambria" pitchFamily="34" charset="-120"/>
-              </a:rPr>
-              <a:t>A claim you can call is worth</a:t>
-            </a:r>
-            <a:endParaRPr lang="en-US" sz="3400" dirty="0"/>
-          </a:p>
-          <a:p>
-            <a:pPr indent="0" marL="0">
-              <a:buNone/>
-            </a:pPr>
-            <a:r>
-              <a:rPr lang="en-US" sz="3400" b="1" dirty="0">
-                <a:solidFill>
-                  <a:srgbClr val="FFFFFF"/>
-                </a:solidFill>
-                <a:latin typeface="Cambria" pitchFamily="34" charset="0"/>
-                <a:ea typeface="Cambria" pitchFamily="34" charset="-122"/>
-                <a:cs typeface="Cambria" pitchFamily="34" charset="-120"/>
-              </a:rPr>
-              <a:t>more than a claim you can read.</a:t>
-            </a:r>
-            <a:endParaRPr lang="en-US" sz="3400" dirty="0"/>
-          </a:p>
-        </p:txBody>
-      </p:sp>
-      <p:sp>
-        <p:nvSpPr>
-          <p:cNvPr id="5" name="Text 3"/>
-          <p:cNvSpPr txBox="1"/>
-          <p:nvPr/>
-        </p:nvSpPr>
-        <p:spPr>
-          <a:xfrm>
-            <a:off x="731520" y="2286000"/>
-            <a:ext cx="10698480" cy="640080"/>
-          </a:xfrm>
-          <a:prstGeom prst="rect">
-            <a:avLst/>
-          </a:prstGeom>
-          <a:noFill/>
-          <a:ln/>
-        </p:spPr>
-        <p:txBody>
-          <a:bodyPr wrap="square" lIns="0" tIns="0" rIns="0" bIns="0" rtlCol="0" anchor="ctr"/>
-          <a:lstStyle/>
-          <a:p>
-            <a:pPr indent="0" marL="0">
-              <a:lnSpc>
-                <a:spcPts val="2000"/>
-              </a:lnSpc>
-              <a:buNone/>
-            </a:pPr>
-            <a:r>
-              <a:rPr lang="en-US" sz="1350" dirty="0">
-                <a:solidFill>
-                  <a:srgbClr val="B8C6D1"/>
-                </a:solidFill>
-                <a:latin typeface="Calibri" pitchFamily="34" charset="0"/>
-                <a:ea typeface="Calibri" pitchFamily="34" charset="-122"/>
-                <a:cs typeface="Calibri" pitchFamily="34" charset="-120"/>
-              </a:rPr>
-              <a:t>Checkable from a terminal, without an account and without us in the room. The assurance endpoint lists 32 controls — 21 enforced in code, 7 implemented, 4 still open.</a:t>
-            </a:r>
-            <a:endParaRPr lang="en-US" sz="1350" dirty="0"/>
-          </a:p>
-        </p:txBody>
-      </p:sp>
-      <p:sp>
-        <p:nvSpPr>
-          <p:cNvPr id="6" name="Shape 4"/>
-          <p:cNvSpPr/>
-          <p:nvPr/>
-        </p:nvSpPr>
-        <p:spPr>
-          <a:xfrm>
-            <a:off x="731520" y="3108960"/>
-            <a:ext cx="10698480" cy="694944"/>
-          </a:xfrm>
-          <a:prstGeom prst="roundRect">
-            <a:avLst>
-              <a:gd name="adj" fmla="val 10526"/>
-            </a:avLst>
-          </a:prstGeom>
-          <a:solidFill>
-            <a:srgbClr val="1B3A54"/>
-          </a:solidFill>
-          <a:ln w="12700">
-            <a:solidFill>
-              <a:srgbClr val="1B3A54"/>
-            </a:solidFill>
-            <a:prstDash val="solid"/>
-          </a:ln>
-          <a:effectLst>
-            <a:outerShdw sx="100000" sy="100000" kx="0" ky="0" algn="bl" rotWithShape="0" blurRad="127000" dist="508" dir="5400000">
-              <a:srgbClr val="9AA8B4">
-                <a:alpha val="25000"/>
-              </a:srgbClr>
-            </a:outerShdw>
-          </a:effectLst>
-        </p:spPr>
-      </p:sp>
-      <p:sp>
-        <p:nvSpPr>
-          <p:cNvPr id="7" name="Text 5"/>
-          <p:cNvSpPr txBox="1"/>
-          <p:nvPr/>
-        </p:nvSpPr>
-        <p:spPr>
-          <a:xfrm>
-            <a:off x="1051560" y="3310128"/>
-            <a:ext cx="3291840" cy="320040"/>
-          </a:xfrm>
-          <a:prstGeom prst="rect">
-            <a:avLst/>
-          </a:prstGeom>
-          <a:noFill/>
-          <a:ln/>
-        </p:spPr>
-        <p:txBody>
-          <a:bodyPr wrap="square" lIns="0" tIns="0" rIns="0" bIns="0" rtlCol="0" anchor="ctr"/>
-          <a:lstStyle/>
-          <a:p>
-            <a:pPr indent="0" marL="0">
-              <a:buNone/>
-            </a:pPr>
-            <a:r>
-              <a:rPr lang="en-US" sz="1250" b="1" dirty="0">
-                <a:solidFill>
-                  <a:srgbClr val="B7E436"/>
-                </a:solidFill>
-                <a:latin typeface="Courier New" pitchFamily="34" charset="0"/>
-                <a:ea typeface="Courier New" pitchFamily="34" charset="-122"/>
-                <a:cs typeface="Courier New" pitchFamily="34" charset="-120"/>
-              </a:rPr>
-              <a:t>GET  /api/assurance</a:t>
-            </a:r>
-            <a:endParaRPr lang="en-US" sz="1250" dirty="0"/>
-          </a:p>
-        </p:txBody>
-      </p:sp>
-      <p:sp>
-        <p:nvSpPr>
-          <p:cNvPr id="8" name="Text 6"/>
-          <p:cNvSpPr txBox="1"/>
-          <p:nvPr/>
-        </p:nvSpPr>
-        <p:spPr>
-          <a:xfrm>
-            <a:off x="4526280" y="3310128"/>
-            <a:ext cx="6583680" cy="320040"/>
-          </a:xfrm>
-          <a:prstGeom prst="rect">
-            <a:avLst/>
-          </a:prstGeom>
-          <a:noFill/>
-          <a:ln/>
-        </p:spPr>
-        <p:txBody>
-          <a:bodyPr wrap="square" lIns="0" tIns="0" rIns="0" bIns="0" rtlCol="0" anchor="ctr"/>
-          <a:lstStyle/>
-          <a:p>
-            <a:pPr indent="0" marL="0">
-              <a:buNone/>
-            </a:pPr>
-            <a:r>
-              <a:rPr lang="en-US" sz="1200" dirty="0">
-                <a:solidFill>
-                  <a:srgbClr val="D6E2EA"/>
-                </a:solidFill>
-                <a:latin typeface="Calibri" pitchFamily="34" charset="0"/>
-                <a:ea typeface="Calibri" pitchFamily="34" charset="-122"/>
-                <a:cs typeface="Calibri" pitchFamily="34" charset="-120"/>
-              </a:rPr>
-              <a:t>Every control, its status, and the gaps — listed at the top, not buried.</a:t>
-            </a:r>
-            <a:endParaRPr lang="en-US" sz="1200" dirty="0"/>
-          </a:p>
-        </p:txBody>
-      </p:sp>
-      <p:sp>
-        <p:nvSpPr>
-          <p:cNvPr id="9" name="Shape 7"/>
-          <p:cNvSpPr/>
-          <p:nvPr/>
-        </p:nvSpPr>
-        <p:spPr>
-          <a:xfrm>
-            <a:off x="731520" y="3931920"/>
-            <a:ext cx="10698480" cy="694944"/>
-          </a:xfrm>
-          <a:prstGeom prst="roundRect">
-            <a:avLst>
-              <a:gd name="adj" fmla="val 10526"/>
-            </a:avLst>
-          </a:prstGeom>
-          <a:solidFill>
-            <a:srgbClr val="1B3A54"/>
-          </a:solidFill>
-          <a:ln w="12700">
-            <a:solidFill>
-              <a:srgbClr val="1B3A54"/>
-            </a:solidFill>
-            <a:prstDash val="solid"/>
-          </a:ln>
-          <a:effectLst>
-            <a:outerShdw sx="100000" sy="100000" kx="0" ky="0" algn="bl" rotWithShape="0" blurRad="127000" dist="508" dir="5400000">
-              <a:srgbClr val="9AA8B4">
-                <a:alpha val="25000"/>
-              </a:srgbClr>
-            </a:outerShdw>
-          </a:effectLst>
-        </p:spPr>
-      </p:sp>
-      <p:sp>
-        <p:nvSpPr>
-          <p:cNvPr id="10" name="Text 8"/>
-          <p:cNvSpPr txBox="1"/>
-          <p:nvPr/>
-        </p:nvSpPr>
-        <p:spPr>
-          <a:xfrm>
-            <a:off x="1051560" y="4133088"/>
-            <a:ext cx="3291840" cy="320040"/>
-          </a:xfrm>
-          <a:prstGeom prst="rect">
-            <a:avLst/>
-          </a:prstGeom>
-          <a:noFill/>
-          <a:ln/>
-        </p:spPr>
-        <p:txBody>
-          <a:bodyPr wrap="square" lIns="0" tIns="0" rIns="0" bIns="0" rtlCol="0" anchor="ctr"/>
-          <a:lstStyle/>
-          <a:p>
-            <a:pPr indent="0" marL="0">
-              <a:buNone/>
-            </a:pPr>
-            <a:r>
-              <a:rPr lang="en-US" sz="1250" b="1" dirty="0">
-                <a:solidFill>
-                  <a:srgbClr val="B7E436"/>
-                </a:solidFill>
-                <a:latin typeface="Courier New" pitchFamily="34" charset="0"/>
-                <a:ea typeface="Courier New" pitchFamily="34" charset="-122"/>
-                <a:cs typeface="Courier New" pitchFamily="34" charset="-120"/>
-              </a:rPr>
-              <a:t>GET  /api/movements/gate</a:t>
-            </a:r>
-            <a:endParaRPr lang="en-US" sz="1250" dirty="0"/>
-          </a:p>
-        </p:txBody>
-      </p:sp>
-      <p:sp>
-        <p:nvSpPr>
-          <p:cNvPr id="11" name="Text 9"/>
-          <p:cNvSpPr txBox="1"/>
-          <p:nvPr/>
-        </p:nvSpPr>
-        <p:spPr>
-          <a:xfrm>
-            <a:off x="4526280" y="4133088"/>
-            <a:ext cx="6583680" cy="320040"/>
-          </a:xfrm>
-          <a:prstGeom prst="rect">
-            <a:avLst/>
-          </a:prstGeom>
-          <a:noFill/>
-          <a:ln/>
-        </p:spPr>
-        <p:txBody>
-          <a:bodyPr wrap="square" lIns="0" tIns="0" rIns="0" bIns="0" rtlCol="0" anchor="ctr"/>
-          <a:lstStyle/>
-          <a:p>
-            <a:pPr indent="0" marL="0">
-              <a:buNone/>
-            </a:pPr>
-            <a:r>
-              <a:rPr lang="en-US" sz="1200" dirty="0">
-                <a:solidFill>
-                  <a:srgbClr val="D6E2EA"/>
-                </a:solidFill>
-                <a:latin typeface="Calibri" pitchFamily="34" charset="0"/>
-                <a:ea typeface="Calibri" pitchFamily="34" charset="-122"/>
-                <a:cs typeface="Calibri" pitchFamily="34" charset="-120"/>
-              </a:rPr>
-              <a:t>The publishing contract: five variants, a cue set per age mode, no override.</a:t>
-            </a:r>
-            <a:endParaRPr lang="en-US" sz="1200" dirty="0"/>
-          </a:p>
-        </p:txBody>
-      </p:sp>
-      <p:sp>
-        <p:nvSpPr>
-          <p:cNvPr id="12" name="Shape 10"/>
-          <p:cNvSpPr/>
-          <p:nvPr/>
-        </p:nvSpPr>
-        <p:spPr>
-          <a:xfrm>
-            <a:off x="731520" y="4754880"/>
-            <a:ext cx="10698480" cy="694944"/>
-          </a:xfrm>
-          <a:prstGeom prst="roundRect">
-            <a:avLst>
-              <a:gd name="adj" fmla="val 10526"/>
-            </a:avLst>
-          </a:prstGeom>
-          <a:solidFill>
-            <a:srgbClr val="1B3A54"/>
-          </a:solidFill>
-          <a:ln w="12700">
-            <a:solidFill>
-              <a:srgbClr val="1B3A54"/>
-            </a:solidFill>
-            <a:prstDash val="solid"/>
-          </a:ln>
-          <a:effectLst>
-            <a:outerShdw sx="100000" sy="100000" kx="0" ky="0" algn="bl" rotWithShape="0" blurRad="127000" dist="508" dir="5400000">
-              <a:srgbClr val="9AA8B4">
-                <a:alpha val="25000"/>
-              </a:srgbClr>
-            </a:outerShdw>
-          </a:effectLst>
-        </p:spPr>
-      </p:sp>
-      <p:sp>
-        <p:nvSpPr>
-          <p:cNvPr id="13" name="Text 11"/>
-          <p:cNvSpPr txBox="1"/>
-          <p:nvPr/>
-        </p:nvSpPr>
-        <p:spPr>
-          <a:xfrm>
-            <a:off x="1051560" y="4956048"/>
-            <a:ext cx="3291840" cy="320040"/>
-          </a:xfrm>
-          <a:prstGeom prst="rect">
-            <a:avLst/>
-          </a:prstGeom>
-          <a:noFill/>
-          <a:ln/>
-        </p:spPr>
-        <p:txBody>
-          <a:bodyPr wrap="square" lIns="0" tIns="0" rIns="0" bIns="0" rtlCol="0" anchor="ctr"/>
-          <a:lstStyle/>
-          <a:p>
-            <a:pPr indent="0" marL="0">
-              <a:buNone/>
-            </a:pPr>
-            <a:r>
-              <a:rPr lang="en-US" sz="1250" b="1" dirty="0">
-                <a:solidFill>
-                  <a:srgbClr val="B7E436"/>
-                </a:solidFill>
-                <a:latin typeface="Courier New" pitchFamily="34" charset="0"/>
-                <a:ea typeface="Courier New" pitchFamily="34" charset="-122"/>
-                <a:cs typeface="Courier New" pitchFamily="34" charset="-120"/>
-              </a:rPr>
-              <a:t>POST /api/body/assess</a:t>
-            </a:r>
-            <a:endParaRPr lang="en-US" sz="1250" dirty="0"/>
-          </a:p>
-        </p:txBody>
-      </p:sp>
-      <p:sp>
-        <p:nvSpPr>
-          <p:cNvPr id="14" name="Text 12"/>
-          <p:cNvSpPr txBox="1"/>
-          <p:nvPr/>
-        </p:nvSpPr>
-        <p:spPr>
-          <a:xfrm>
-            <a:off x="4526280" y="4956048"/>
-            <a:ext cx="6583680" cy="320040"/>
-          </a:xfrm>
-          <a:prstGeom prst="rect">
-            <a:avLst/>
-          </a:prstGeom>
-          <a:noFill/>
-          <a:ln/>
-        </p:spPr>
-        <p:txBody>
-          <a:bodyPr wrap="square" lIns="0" tIns="0" rIns="0" bIns="0" rtlCol="0" anchor="ctr"/>
-          <a:lstStyle/>
-          <a:p>
-            <a:pPr indent="0" marL="0">
-              <a:buNone/>
-            </a:pPr>
-            <a:r>
-              <a:rPr lang="en-US" sz="1200" dirty="0">
-                <a:solidFill>
-                  <a:srgbClr val="D6E2EA"/>
-                </a:solidFill>
-                <a:latin typeface="Calibri" pitchFamily="34" charset="0"/>
-                <a:ea typeface="Calibri" pitchFamily="34" charset="-122"/>
-                <a:cs typeface="Calibri" pitchFamily="34" charset="-120"/>
-              </a:rPr>
-              <a:t>Send a twelve-year-old with consent set true. It returns metrics: null.</a:t>
-            </a:r>
-            <a:endParaRPr lang="en-US" sz="1200" dirty="0"/>
-          </a:p>
-        </p:txBody>
-      </p:sp>
-      <p:sp>
-        <p:nvSpPr>
-          <p:cNvPr id="15" name="Shape 13"/>
-          <p:cNvSpPr/>
-          <p:nvPr/>
-        </p:nvSpPr>
-        <p:spPr>
-          <a:xfrm>
-            <a:off x="731520" y="5577840"/>
-            <a:ext cx="10698480" cy="694944"/>
-          </a:xfrm>
-          <a:prstGeom prst="roundRect">
-            <a:avLst>
-              <a:gd name="adj" fmla="val 10526"/>
-            </a:avLst>
-          </a:prstGeom>
-          <a:solidFill>
-            <a:srgbClr val="1B3A54"/>
-          </a:solidFill>
-          <a:ln w="12700">
-            <a:solidFill>
-              <a:srgbClr val="1B3A54"/>
-            </a:solidFill>
-            <a:prstDash val="solid"/>
-          </a:ln>
-          <a:effectLst>
-            <a:outerShdw sx="100000" sy="100000" kx="0" ky="0" algn="bl" rotWithShape="0" blurRad="127000" dist="508" dir="5400000">
-              <a:srgbClr val="9AA8B4">
-                <a:alpha val="25000"/>
-              </a:srgbClr>
-            </a:outerShdw>
-          </a:effectLst>
-        </p:spPr>
-      </p:sp>
-      <p:sp>
-        <p:nvSpPr>
-          <p:cNvPr id="16" name="Text 14"/>
-          <p:cNvSpPr txBox="1"/>
-          <p:nvPr/>
-        </p:nvSpPr>
-        <p:spPr>
-          <a:xfrm>
-            <a:off x="1051560" y="5779008"/>
-            <a:ext cx="3291840" cy="320040"/>
-          </a:xfrm>
-          <a:prstGeom prst="rect">
-            <a:avLst/>
-          </a:prstGeom>
-          <a:noFill/>
-          <a:ln/>
-        </p:spPr>
-        <p:txBody>
-          <a:bodyPr wrap="square" lIns="0" tIns="0" rIns="0" bIns="0" rtlCol="0" anchor="ctr"/>
-          <a:lstStyle/>
-          <a:p>
-            <a:pPr indent="0" marL="0">
-              <a:buNone/>
-            </a:pPr>
-            <a:r>
-              <a:rPr lang="en-US" sz="1250" b="1" dirty="0">
-                <a:solidFill>
-                  <a:srgbClr val="B7E436"/>
-                </a:solidFill>
-                <a:latin typeface="Courier New" pitchFamily="34" charset="0"/>
-                <a:ea typeface="Courier New" pitchFamily="34" charset="-122"/>
-                <a:cs typeface="Courier New" pitchFamily="34" charset="-120"/>
-              </a:rPr>
-              <a:t>GET  /api/health</a:t>
-            </a:r>
-            <a:endParaRPr lang="en-US" sz="1250" dirty="0"/>
-          </a:p>
-        </p:txBody>
-      </p:sp>
-      <p:sp>
-        <p:nvSpPr>
-          <p:cNvPr id="17" name="Text 15"/>
-          <p:cNvSpPr txBox="1"/>
-          <p:nvPr/>
-        </p:nvSpPr>
-        <p:spPr>
-          <a:xfrm>
-            <a:off x="4526280" y="5779008"/>
-            <a:ext cx="6583680" cy="320040"/>
-          </a:xfrm>
-          <a:prstGeom prst="rect">
-            <a:avLst/>
-          </a:prstGeom>
-          <a:noFill/>
-          <a:ln/>
-        </p:spPr>
-        <p:txBody>
-          <a:bodyPr wrap="square" lIns="0" tIns="0" rIns="0" bIns="0" rtlCol="0" anchor="ctr"/>
-          <a:lstStyle/>
-          <a:p>
-            <a:pPr indent="0" marL="0">
-              <a:buNone/>
-            </a:pPr>
-            <a:r>
-              <a:rPr lang="en-US" sz="1200" dirty="0">
-                <a:solidFill>
-                  <a:srgbClr val="D6E2EA"/>
-                </a:solidFill>
-                <a:latin typeface="Calibri" pitchFamily="34" charset="0"/>
-                <a:ea typeface="Calibri" pitchFamily="34" charset="-122"/>
-                <a:cs typeface="Calibri" pitchFamily="34" charset="-120"/>
-              </a:rPr>
-              <a:t>A live check that opens a database connection, never a stored badge.</a:t>
-            </a:r>
-            <a:endParaRPr lang="en-US" sz="1200" dirty="0"/>
           </a:p>
         </p:txBody>
       </p:sp>
@@ -8629,7 +8320,7 @@
                 <a:ea typeface="Arial" pitchFamily="34" charset="-122"/>
                 <a:cs typeface="Arial" pitchFamily="34" charset="-120"/>
               </a:rPr>
-              <a:t>YOUR LEGAL, HR AND SECURITY TEAMS</a:t>
+              <a:t>THE DEAL</a:t>
             </a:r>
             <a:endParaRPr lang="en-US" sz="1200" dirty="0"/>
           </a:p>
@@ -8660,7 +8351,7 @@
               <a:buNone/>
             </a:pPr>
             <a:r>
-              <a:rPr lang="en-US" sz="3600" b="1" dirty="0">
+              <a:rPr lang="en-US" sz="3800" b="1" dirty="0">
                 <a:solidFill>
                   <a:srgbClr val="102A43"/>
                 </a:solidFill>
@@ -8668,9 +8359,9 @@
                 <a:ea typeface="Cambria" pitchFamily="34" charset="-122"/>
                 <a:cs typeface="Cambria" pitchFamily="34" charset="-120"/>
               </a:rPr>
-              <a:t>Four things enforced. Four things open.</a:t>
-            </a:r>
-            <a:endParaRPr lang="en-US" sz="3600" dirty="0"/>
+              <a:t>You would be our first.</a:t>
+            </a:r>
+            <a:endParaRPr lang="en-US" sz="3800" dirty="0"/>
           </a:p>
         </p:txBody>
       </p:sp>
@@ -8682,98 +8373,365 @@
         </p:nvSpPr>
         <p:spPr>
           <a:xfrm>
-            <a:off x="731520" y="2148840"/>
-            <a:ext cx="5166360" cy="274320"/>
-          </a:xfrm>
-          <a:prstGeom prst="rect">
-            <a:avLst/>
-          </a:prstGeom>
-          <a:noFill/>
-          <a:ln/>
-        </p:spPr>
-        <p:txBody>
-          <a:bodyPr wrap="square" lIns="0" tIns="0" rIns="0" bIns="0" rtlCol="0" anchor="ctr"/>
-          <a:lstStyle/>
-          <a:p>
-            <a:pPr indent="0" marL="0">
-              <a:buNone/>
-            </a:pPr>
-            <a:r>
-              <a:rPr lang="en-US" sz="1200" b="1" spc="200" kern="0" dirty="0">
+            <a:off x="731520" y="2103120"/>
+            <a:ext cx="5760720" cy="1463040"/>
+          </a:xfrm>
+          <a:prstGeom prst="rect">
+            <a:avLst/>
+          </a:prstGeom>
+          <a:noFill/>
+          <a:ln/>
+        </p:spPr>
+        <p:txBody>
+          <a:bodyPr wrap="square" lIns="0" tIns="0" rIns="0" bIns="0" rtlCol="0" anchor="ctr"/>
+          <a:lstStyle/>
+          <a:p>
+            <a:pPr indent="0" marL="0">
+              <a:lnSpc>
+                <a:spcPts val="2500"/>
+              </a:lnSpc>
+              <a:buNone/>
+            </a:pPr>
+            <a:r>
+              <a:rPr lang="en-US" sz="1500" dirty="0">
+                <a:solidFill>
+                  <a:srgbClr val="475663"/>
+                </a:solidFill>
+                <a:latin typeface="Calibri" pitchFamily="34" charset="0"/>
+                <a:ea typeface="Calibri" pitchFamily="34" charset="-122"/>
+                <a:cs typeface="Calibri" pitchFamily="34" charset="-120"/>
+              </a:rPr>
+              <a:t>Every vendor in this category opens with logos. We have none — no customers, no case study, no measured outcome. So we are not asking you to believe a result. We are asking you to help produce the first one, and pricing it accordingly.</a:t>
+            </a:r>
+            <a:endParaRPr lang="en-US" sz="1500" dirty="0"/>
+          </a:p>
+        </p:txBody>
+      </p:sp>
+      <p:sp>
+        <p:nvSpPr>
+          <p:cNvPr id="6" name="Text 4"/>
+          <p:cNvSpPr txBox="1"/>
+          <p:nvPr/>
+        </p:nvSpPr>
+        <p:spPr>
+          <a:xfrm>
+            <a:off x="731520" y="3794760"/>
+            <a:ext cx="1828800" cy="685800"/>
+          </a:xfrm>
+          <a:prstGeom prst="rect">
+            <a:avLst/>
+          </a:prstGeom>
+          <a:noFill/>
+          <a:ln/>
+        </p:spPr>
+        <p:txBody>
+          <a:bodyPr wrap="square" lIns="0" tIns="0" rIns="0" bIns="0" rtlCol="0" anchor="ctr"/>
+          <a:lstStyle/>
+          <a:p>
+            <a:pPr indent="0" marL="0">
+              <a:buNone/>
+            </a:pPr>
+            <a:r>
+              <a:rPr lang="en-US" sz="4000" b="1" dirty="0">
                 <a:solidFill>
                   <a:srgbClr val="00A99D"/>
                 </a:solidFill>
-                <a:latin typeface="Arial" pitchFamily="34" charset="0"/>
-                <a:ea typeface="Arial" pitchFamily="34" charset="-122"/>
-                <a:cs typeface="Arial" pitchFamily="34" charset="-120"/>
-              </a:rPr>
-              <a:t>Enforced in code and schema</a:t>
-            </a:r>
-            <a:endParaRPr lang="en-US" sz="1200" dirty="0"/>
-          </a:p>
-        </p:txBody>
-      </p:sp>
-      <p:sp>
-        <p:nvSpPr>
-          <p:cNvPr id="6" name="Text 4"/>
-          <p:cNvSpPr txBox="1"/>
-          <p:nvPr/>
-        </p:nvSpPr>
-        <p:spPr>
-          <a:xfrm>
-            <a:off x="6263640" y="2148840"/>
-            <a:ext cx="5166360" cy="274320"/>
-          </a:xfrm>
-          <a:prstGeom prst="rect">
-            <a:avLst/>
-          </a:prstGeom>
-          <a:noFill/>
-          <a:ln/>
-        </p:spPr>
-        <p:txBody>
-          <a:bodyPr wrap="square" lIns="0" tIns="0" rIns="0" bIns="0" rtlCol="0" anchor="ctr"/>
-          <a:lstStyle/>
-          <a:p>
-            <a:pPr indent="0" marL="0">
-              <a:buNone/>
-            </a:pPr>
-            <a:r>
-              <a:rPr lang="en-US" sz="1200" b="1" spc="200" kern="0" dirty="0">
-                <a:solidFill>
-                  <a:srgbClr val="FF6B5E"/>
-                </a:solidFill>
-                <a:latin typeface="Arial" pitchFamily="34" charset="0"/>
-                <a:ea typeface="Arial" pitchFamily="34" charset="-122"/>
-                <a:cs typeface="Arial" pitchFamily="34" charset="-120"/>
-              </a:rPr>
-              <a:t>Open, and named before you ask</a:t>
-            </a:r>
-            <a:endParaRPr lang="en-US" sz="1200" dirty="0"/>
-          </a:p>
-        </p:txBody>
-      </p:sp>
-      <p:sp>
-        <p:nvSpPr>
-          <p:cNvPr id="7" name="Shape 5"/>
+                <a:latin typeface="Cambria" pitchFamily="34" charset="0"/>
+                <a:ea typeface="Cambria" pitchFamily="34" charset="-122"/>
+                <a:cs typeface="Cambria" pitchFamily="34" charset="-120"/>
+              </a:rPr>
+              <a:t>0</a:t>
+            </a:r>
+            <a:endParaRPr lang="en-US" sz="4000" dirty="0"/>
+          </a:p>
+        </p:txBody>
+      </p:sp>
+      <p:sp>
+        <p:nvSpPr>
+          <p:cNvPr id="7" name="Text 5"/>
+          <p:cNvSpPr txBox="1"/>
+          <p:nvPr/>
+        </p:nvSpPr>
+        <p:spPr>
+          <a:xfrm>
+            <a:off x="731520" y="4544568"/>
+            <a:ext cx="1828800" cy="640080"/>
+          </a:xfrm>
+          <a:prstGeom prst="rect">
+            <a:avLst/>
+          </a:prstGeom>
+          <a:noFill/>
+          <a:ln/>
+        </p:spPr>
+        <p:txBody>
+          <a:bodyPr wrap="square" lIns="0" tIns="0" rIns="0" bIns="0" rtlCol="0" anchor="ctr"/>
+          <a:lstStyle/>
+          <a:p>
+            <a:pPr indent="0" marL="0">
+              <a:lnSpc>
+                <a:spcPts val="1500"/>
+              </a:lnSpc>
+              <a:buNone/>
+            </a:pPr>
+            <a:r>
+              <a:rPr lang="en-US" sz="1100" dirty="0">
+                <a:solidFill>
+                  <a:srgbClr val="475663"/>
+                </a:solidFill>
+                <a:latin typeface="Calibri" pitchFamily="34" charset="0"/>
+                <a:ea typeface="Calibri" pitchFamily="34" charset="-122"/>
+                <a:cs typeface="Calibri" pitchFamily="34" charset="-120"/>
+              </a:rPr>
+              <a:t>organisations have</a:t>
+            </a:r>
+            <a:endParaRPr lang="en-US" sz="1100" dirty="0"/>
+          </a:p>
+          <a:p>
+            <a:pPr indent="0" marL="0">
+              <a:lnSpc>
+                <a:spcPts val="1500"/>
+              </a:lnSpc>
+              <a:buNone/>
+            </a:pPr>
+            <a:r>
+              <a:rPr lang="en-US" sz="1100" dirty="0">
+                <a:solidFill>
+                  <a:srgbClr val="475663"/>
+                </a:solidFill>
+                <a:latin typeface="Calibri" pitchFamily="34" charset="0"/>
+                <a:ea typeface="Calibri" pitchFamily="34" charset="-122"/>
+                <a:cs typeface="Calibri" pitchFamily="34" charset="-120"/>
+              </a:rPr>
+              <a:t>run a cohort</a:t>
+            </a:r>
+            <a:endParaRPr lang="en-US" sz="1100" dirty="0"/>
+          </a:p>
+        </p:txBody>
+      </p:sp>
+      <p:sp>
+        <p:nvSpPr>
+          <p:cNvPr id="8" name="Text 6"/>
+          <p:cNvSpPr txBox="1"/>
+          <p:nvPr/>
+        </p:nvSpPr>
+        <p:spPr>
+          <a:xfrm>
+            <a:off x="2697480" y="3794760"/>
+            <a:ext cx="1828800" cy="685800"/>
+          </a:xfrm>
+          <a:prstGeom prst="rect">
+            <a:avLst/>
+          </a:prstGeom>
+          <a:noFill/>
+          <a:ln/>
+        </p:spPr>
+        <p:txBody>
+          <a:bodyPr wrap="square" lIns="0" tIns="0" rIns="0" bIns="0" rtlCol="0" anchor="ctr"/>
+          <a:lstStyle/>
+          <a:p>
+            <a:pPr indent="0" marL="0">
+              <a:buNone/>
+            </a:pPr>
+            <a:r>
+              <a:rPr lang="en-US" sz="4000" b="1" dirty="0">
+                <a:solidFill>
+                  <a:srgbClr val="00A99D"/>
+                </a:solidFill>
+                <a:latin typeface="Cambria" pitchFamily="34" charset="0"/>
+                <a:ea typeface="Cambria" pitchFamily="34" charset="-122"/>
+                <a:cs typeface="Cambria" pitchFamily="34" charset="-120"/>
+              </a:rPr>
+              <a:t>3–5</a:t>
+            </a:r>
+            <a:endParaRPr lang="en-US" sz="4000" dirty="0"/>
+          </a:p>
+        </p:txBody>
+      </p:sp>
+      <p:sp>
+        <p:nvSpPr>
+          <p:cNvPr id="9" name="Text 7"/>
+          <p:cNvSpPr txBox="1"/>
+          <p:nvPr/>
+        </p:nvSpPr>
+        <p:spPr>
+          <a:xfrm>
+            <a:off x="2697480" y="4544568"/>
+            <a:ext cx="1828800" cy="640080"/>
+          </a:xfrm>
+          <a:prstGeom prst="rect">
+            <a:avLst/>
+          </a:prstGeom>
+          <a:noFill/>
+          <a:ln/>
+        </p:spPr>
+        <p:txBody>
+          <a:bodyPr wrap="square" lIns="0" tIns="0" rIns="0" bIns="0" rtlCol="0" anchor="ctr"/>
+          <a:lstStyle/>
+          <a:p>
+            <a:pPr indent="0" marL="0">
+              <a:lnSpc>
+                <a:spcPts val="1500"/>
+              </a:lnSpc>
+              <a:buNone/>
+            </a:pPr>
+            <a:r>
+              <a:rPr lang="en-US" sz="1100" dirty="0">
+                <a:solidFill>
+                  <a:srgbClr val="475663"/>
+                </a:solidFill>
+                <a:latin typeface="Calibri" pitchFamily="34" charset="0"/>
+                <a:ea typeface="Calibri" pitchFamily="34" charset="-122"/>
+                <a:cs typeface="Calibri" pitchFamily="34" charset="-120"/>
+              </a:rPr>
+              <a:t>design partners, and</a:t>
+            </a:r>
+            <a:endParaRPr lang="en-US" sz="1100" dirty="0"/>
+          </a:p>
+          <a:p>
+            <a:pPr indent="0" marL="0">
+              <a:lnSpc>
+                <a:spcPts val="1500"/>
+              </a:lnSpc>
+              <a:buNone/>
+            </a:pPr>
+            <a:r>
+              <a:rPr lang="en-US" sz="1100" dirty="0">
+                <a:solidFill>
+                  <a:srgbClr val="475663"/>
+                </a:solidFill>
+                <a:latin typeface="Calibri" pitchFamily="34" charset="0"/>
+                <a:ea typeface="Calibri" pitchFamily="34" charset="-122"/>
+                <a:cs typeface="Calibri" pitchFamily="34" charset="-120"/>
+              </a:rPr>
+              <a:t>we want no more</a:t>
+            </a:r>
+            <a:endParaRPr lang="en-US" sz="1100" dirty="0"/>
+          </a:p>
+        </p:txBody>
+      </p:sp>
+      <p:sp>
+        <p:nvSpPr>
+          <p:cNvPr id="10" name="Text 8"/>
+          <p:cNvSpPr txBox="1"/>
+          <p:nvPr/>
+        </p:nvSpPr>
+        <p:spPr>
+          <a:xfrm>
+            <a:off x="4663440" y="3794760"/>
+            <a:ext cx="1828800" cy="685800"/>
+          </a:xfrm>
+          <a:prstGeom prst="rect">
+            <a:avLst/>
+          </a:prstGeom>
+          <a:noFill/>
+          <a:ln/>
+        </p:spPr>
+        <p:txBody>
+          <a:bodyPr wrap="square" lIns="0" tIns="0" rIns="0" bIns="0" rtlCol="0" anchor="ctr"/>
+          <a:lstStyle/>
+          <a:p>
+            <a:pPr indent="0" marL="0">
+              <a:buNone/>
+            </a:pPr>
+            <a:r>
+              <a:rPr lang="en-US" sz="4000" b="1" dirty="0">
+                <a:solidFill>
+                  <a:srgbClr val="00A99D"/>
+                </a:solidFill>
+                <a:latin typeface="Cambria" pitchFamily="34" charset="0"/>
+                <a:ea typeface="Cambria" pitchFamily="34" charset="-122"/>
+                <a:cs typeface="Cambria" pitchFamily="34" charset="-120"/>
+              </a:rPr>
+              <a:t>£2</a:t>
+            </a:r>
+            <a:endParaRPr lang="en-US" sz="4000" dirty="0"/>
+          </a:p>
+        </p:txBody>
+      </p:sp>
+      <p:sp>
+        <p:nvSpPr>
+          <p:cNvPr id="11" name="Text 9"/>
+          <p:cNvSpPr txBox="1"/>
+          <p:nvPr/>
+        </p:nvSpPr>
+        <p:spPr>
+          <a:xfrm>
+            <a:off x="4663440" y="4544568"/>
+            <a:ext cx="1828800" cy="640080"/>
+          </a:xfrm>
+          <a:prstGeom prst="rect">
+            <a:avLst/>
+          </a:prstGeom>
+          <a:noFill/>
+          <a:ln/>
+        </p:spPr>
+        <p:txBody>
+          <a:bodyPr wrap="square" lIns="0" tIns="0" rIns="0" bIns="0" rtlCol="0" anchor="ctr"/>
+          <a:lstStyle/>
+          <a:p>
+            <a:pPr indent="0" marL="0">
+              <a:lnSpc>
+                <a:spcPts val="1500"/>
+              </a:lnSpc>
+              <a:buNone/>
+            </a:pPr>
+            <a:r>
+              <a:rPr lang="en-US" sz="1100" dirty="0">
+                <a:solidFill>
+                  <a:srgbClr val="475663"/>
+                </a:solidFill>
+                <a:latin typeface="Calibri" pitchFamily="34" charset="0"/>
+                <a:ea typeface="Calibri" pitchFamily="34" charset="-122"/>
+                <a:cs typeface="Calibri" pitchFamily="34" charset="-120"/>
+              </a:rPr>
+              <a:t>a seat, held for the</a:t>
+            </a:r>
+            <a:endParaRPr lang="en-US" sz="1100" dirty="0"/>
+          </a:p>
+          <a:p>
+            <a:pPr indent="0" marL="0">
+              <a:lnSpc>
+                <a:spcPts val="1500"/>
+              </a:lnSpc>
+              <a:buNone/>
+            </a:pPr>
+            <a:r>
+              <a:rPr lang="en-US" sz="1100" dirty="0">
+                <a:solidFill>
+                  <a:srgbClr val="475663"/>
+                </a:solidFill>
+                <a:latin typeface="Calibri" pitchFamily="34" charset="0"/>
+                <a:ea typeface="Calibri" pitchFamily="34" charset="-122"/>
+                <a:cs typeface="Calibri" pitchFamily="34" charset="-120"/>
+              </a:rPr>
+              <a:t>whole first year</a:t>
+            </a:r>
+            <a:endParaRPr lang="en-US" sz="1100" dirty="0"/>
+          </a:p>
+        </p:txBody>
+      </p:sp>
+      <p:sp>
+        <p:nvSpPr>
+          <p:cNvPr id="12" name="Shape 10"/>
           <p:cNvSpPr/>
           <p:nvPr/>
         </p:nvSpPr>
         <p:spPr>
           <a:xfrm>
-            <a:off x="731520" y="2514600"/>
-            <a:ext cx="5166360" cy="2971800"/>
+            <a:off x="6720840" y="2103120"/>
+            <a:ext cx="4709160" cy="3291840"/>
           </a:xfrm>
           <a:prstGeom prst="roundRect">
             <a:avLst>
-              <a:gd name="adj" fmla="val 2462"/>
+              <a:gd name="adj" fmla="val 2222"/>
             </a:avLst>
           </a:prstGeom>
           <a:solidFill>
-            <a:srgbClr val="F4F7F9"/>
+            <a:srgbClr val="102A43"/>
           </a:solidFill>
           <a:ln w="12700">
             <a:solidFill>
-              <a:srgbClr val="F4F7F9"/>
+              <a:srgbClr val="102A43"/>
             </a:solidFill>
             <a:prstDash val="solid"/>
           </a:ln>
@@ -8788,14 +8746,76 @@
       </p:sp>
       <p:sp>
         <p:nvSpPr>
-          <p:cNvPr id="8" name="Text 6"/>
-          <p:cNvSpPr txBox="1"/>
-          <p:nvPr/>
-        </p:nvSpPr>
-        <p:spPr>
-          <a:xfrm>
-            <a:off x="1097280" y="2743200"/>
-            <a:ext cx="4434840" cy="2560320"/>
+          <p:cNvPr id="13" name="Text 11"/>
+          <p:cNvSpPr txBox="1"/>
+          <p:nvPr/>
+        </p:nvSpPr>
+        <p:spPr>
+          <a:xfrm>
+            <a:off x="7086600" y="2377440"/>
+            <a:ext cx="4023360" cy="731520"/>
+          </a:xfrm>
+          <a:prstGeom prst="rect">
+            <a:avLst/>
+          </a:prstGeom>
+          <a:noFill/>
+          <a:ln/>
+        </p:spPr>
+        <p:txBody>
+          <a:bodyPr wrap="square" lIns="0" tIns="0" rIns="0" bIns="0" rtlCol="0" anchor="ctr"/>
+          <a:lstStyle/>
+          <a:p>
+            <a:pPr indent="0" marL="0">
+              <a:lnSpc>
+                <a:spcPts val="2300"/>
+              </a:lnSpc>
+              <a:buNone/>
+            </a:pPr>
+            <a:r>
+              <a:rPr lang="en-US" sz="1700" b="1" dirty="0">
+                <a:solidFill>
+                  <a:srgbClr val="FFFFFF"/>
+                </a:solidFill>
+                <a:latin typeface="Cambria" pitchFamily="34" charset="0"/>
+                <a:ea typeface="Cambria" pitchFamily="34" charset="-122"/>
+                <a:cs typeface="Cambria" pitchFamily="34" charset="-120"/>
+              </a:rPr>
+              <a:t>What a design partner gets</a:t>
+            </a:r>
+            <a:endParaRPr lang="en-US" sz="1700" dirty="0"/>
+          </a:p>
+          <a:p>
+            <a:pPr indent="0" marL="0">
+              <a:lnSpc>
+                <a:spcPts val="2300"/>
+              </a:lnSpc>
+              <a:buNone/>
+            </a:pPr>
+            <a:r>
+              <a:rPr lang="en-US" sz="1700" b="1" dirty="0">
+                <a:solidFill>
+                  <a:srgbClr val="FFFFFF"/>
+                </a:solidFill>
+                <a:latin typeface="Cambria" pitchFamily="34" charset="0"/>
+                <a:ea typeface="Cambria" pitchFamily="34" charset="-122"/>
+                <a:cs typeface="Cambria" pitchFamily="34" charset="-120"/>
+              </a:rPr>
+              <a:t>that customer six will not</a:t>
+            </a:r>
+            <a:endParaRPr lang="en-US" sz="1700" dirty="0"/>
+          </a:p>
+        </p:txBody>
+      </p:sp>
+      <p:sp>
+        <p:nvSpPr>
+          <p:cNvPr id="14" name="Text 12"/>
+          <p:cNvSpPr txBox="1"/>
+          <p:nvPr/>
+        </p:nvSpPr>
+        <p:spPr>
+          <a:xfrm>
+            <a:off x="7086600" y="3291840"/>
+            <a:ext cx="3977640" cy="1920240"/>
           </a:xfrm>
           <a:prstGeom prst="rect">
             <a:avLst/>
@@ -8809,286 +8829,137 @@
           <a:p>
             <a:pPr marL="342900" indent="-342900">
               <a:lnSpc>
-                <a:spcPts val="1600"/>
+                <a:spcPts val="1700"/>
               </a:lnSpc>
               <a:spcAft>
-                <a:spcPts val="900"/>
+                <a:spcPts val="1000"/>
               </a:spcAft>
               <a:buSzPct val="100000"/>
               <a:buChar char="•"/>
             </a:pPr>
             <a:r>
-              <a:rPr lang="en-US" sz="1150" dirty="0">
-                <a:solidFill>
-                  <a:srgbClr val="475663"/>
+              <a:rPr lang="en-US" sz="1250" dirty="0">
+                <a:solidFill>
+                  <a:srgbClr val="D6E2EA"/>
                 </a:solidFill>
                 <a:latin typeface="Calibri" pitchFamily="34" charset="0"/>
                 <a:ea typeface="Calibri" pitchFamily="34" charset="-122"/>
                 <a:cs typeface="Calibri" pitchFamily="34" charset="-120"/>
               </a:rPr>
-              <a:t>A declared condition is stored as a catalogue identifier. No severity, no dates, no medication, no free text.</a:t>
-            </a:r>
-            <a:endParaRPr lang="en-US" sz="1150" dirty="0"/>
+              <a:t>The floor price, held for twelve months</a:t>
+            </a:r>
+            <a:endParaRPr lang="en-US" sz="1250" dirty="0"/>
           </a:p>
           <a:p>
             <a:pPr marL="342900" indent="-342900">
               <a:lnSpc>
-                <a:spcPts val="1600"/>
+                <a:spcPts val="1700"/>
               </a:lnSpc>
               <a:spcAft>
-                <a:spcPts val="900"/>
+                <a:spcPts val="1000"/>
               </a:spcAft>
               <a:buSzPct val="100000"/>
               <a:buChar char="•"/>
             </a:pPr>
             <a:r>
-              <a:rPr lang="en-US" sz="1150" dirty="0">
-                <a:solidFill>
-                  <a:srgbClr val="475663"/>
+              <a:rPr lang="en-US" sz="1250" dirty="0">
+                <a:solidFill>
+                  <a:srgbClr val="D6E2EA"/>
                 </a:solidFill>
                 <a:latin typeface="Calibri" pitchFamily="34" charset="0"/>
                 <a:ea typeface="Calibri" pitchFamily="34" charset="-122"/>
                 <a:cs typeface="Calibri" pitchFamily="34" charset="-120"/>
               </a:rPr>
-              <a:t>Deleting an account cascades in the database from the user row — a guarantee, not a callback somebody has to remember.</a:t>
-            </a:r>
-            <a:endParaRPr lang="en-US" sz="1150" dirty="0"/>
+              <a:t>First call on the order of the four unbuilt things on slide six</a:t>
+            </a:r>
+            <a:endParaRPr lang="en-US" sz="1250" dirty="0"/>
           </a:p>
           <a:p>
             <a:pPr marL="342900" indent="-342900">
               <a:lnSpc>
-                <a:spcPts val="1600"/>
+                <a:spcPts val="1700"/>
               </a:lnSpc>
               <a:spcAft>
-                <a:spcPts val="900"/>
+                <a:spcPts val="1000"/>
               </a:spcAft>
               <a:buSzPct val="100000"/>
               <a:buChar char="•"/>
             </a:pPr>
             <a:r>
-              <a:rPr lang="en-US" sz="1150" dirty="0">
-                <a:solidFill>
-                  <a:srgbClr val="475663"/>
+              <a:rPr lang="en-US" sz="1250" dirty="0">
+                <a:solidFill>
+                  <a:srgbClr val="D6E2EA"/>
                 </a:solidFill>
                 <a:latin typeface="Calibri" pitchFamily="34" charset="0"/>
                 <a:ea typeface="Calibri" pitchFamily="34" charset="-122"/>
                 <a:cs typeface="Calibri" pitchFamily="34" charset="-120"/>
               </a:rPr>
-              <a:t>Health data never reaches an organisation view at any cohort size. A test asserts that no module outside the conditions service touches that table.</a:t>
-            </a:r>
-            <a:endParaRPr lang="en-US" sz="1150" dirty="0"/>
+              <a:t>A named sponsor on our side, not a ticket queue</a:t>
+            </a:r>
+            <a:endParaRPr lang="en-US" sz="1250" dirty="0"/>
           </a:p>
           <a:p>
             <a:pPr marL="342900" indent="-342900">
               <a:lnSpc>
-                <a:spcPts val="1600"/>
+                <a:spcPts val="1700"/>
               </a:lnSpc>
               <a:buSzPct val="100000"/>
               <a:buChar char="•"/>
             </a:pPr>
             <a:r>
-              <a:rPr lang="en-US" sz="1150" dirty="0">
-                <a:solidFill>
-                  <a:srgbClr val="475663"/>
+              <a:rPr lang="en-US" sz="1250" dirty="0">
+                <a:solidFill>
+                  <a:srgbClr val="D6E2EA"/>
                 </a:solidFill>
                 <a:latin typeface="Calibri" pitchFamily="34" charset="0"/>
                 <a:ea typeface="Calibri" pitchFamily="34" charset="-122"/>
                 <a:cs typeface="Calibri" pitchFamily="34" charset="-120"/>
               </a:rPr>
-              <a:t>Analytics identifiers are hashed on arrival with a salt regenerated daily, and never outlive the request.</a:t>
-            </a:r>
-            <a:endParaRPr lang="en-US" sz="1150" dirty="0"/>
-          </a:p>
-        </p:txBody>
-      </p:sp>
-      <p:sp>
-        <p:nvSpPr>
-          <p:cNvPr id="9" name="Shape 7"/>
-          <p:cNvSpPr/>
-          <p:nvPr/>
-        </p:nvSpPr>
-        <p:spPr>
-          <a:xfrm>
-            <a:off x="6263640" y="2514600"/>
-            <a:ext cx="5166360" cy="2971800"/>
-          </a:xfrm>
-          <a:prstGeom prst="roundRect">
-            <a:avLst>
-              <a:gd name="adj" fmla="val 2462"/>
-            </a:avLst>
-          </a:prstGeom>
-          <a:solidFill>
-            <a:srgbClr val="F4F7F9"/>
-          </a:solidFill>
-          <a:ln w="12700">
-            <a:solidFill>
-              <a:srgbClr val="F4F7F9"/>
-            </a:solidFill>
-            <a:prstDash val="solid"/>
-          </a:ln>
-          <a:effectLst>
-            <a:outerShdw sx="100000" sy="100000" kx="0" ky="0" algn="bl" rotWithShape="0" blurRad="127000" dist="508" dir="5400000">
-              <a:srgbClr val="9AA8B4">
-                <a:alpha val="25000"/>
-              </a:srgbClr>
-            </a:outerShdw>
-          </a:effectLst>
-        </p:spPr>
-      </p:sp>
-      <p:sp>
-        <p:nvSpPr>
-          <p:cNvPr id="10" name="Text 8"/>
-          <p:cNvSpPr txBox="1"/>
-          <p:nvPr/>
-        </p:nvSpPr>
-        <p:spPr>
-          <a:xfrm>
-            <a:off x="6629400" y="2743200"/>
-            <a:ext cx="4434840" cy="2560320"/>
-          </a:xfrm>
-          <a:prstGeom prst="rect">
-            <a:avLst/>
-          </a:prstGeom>
-          <a:noFill/>
-          <a:ln/>
-        </p:spPr>
-        <p:txBody>
-          <a:bodyPr wrap="square" lIns="0" tIns="0" rIns="0" bIns="0" rtlCol="0" anchor="t"/>
-          <a:lstStyle/>
-          <a:p>
-            <a:pPr marL="342900" indent="-342900">
+              <a:t>A twelve-week pilot that ends at week twelve unless you say otherwise</a:t>
+            </a:r>
+            <a:endParaRPr lang="en-US" sz="1250" dirty="0"/>
+          </a:p>
+        </p:txBody>
+      </p:sp>
+      <p:sp>
+        <p:nvSpPr>
+          <p:cNvPr id="15" name="Text 13"/>
+          <p:cNvSpPr txBox="1"/>
+          <p:nvPr/>
+        </p:nvSpPr>
+        <p:spPr>
+          <a:xfrm>
+            <a:off x="731520" y="5623560"/>
+            <a:ext cx="10698480" cy="640080"/>
+          </a:xfrm>
+          <a:prstGeom prst="rect">
+            <a:avLst/>
+          </a:prstGeom>
+          <a:noFill/>
+          <a:ln/>
+        </p:spPr>
+        <p:txBody>
+          <a:bodyPr wrap="square" lIns="0" tIns="0" rIns="0" bIns="0" rtlCol="0" anchor="ctr"/>
+          <a:lstStyle/>
+          <a:p>
+            <a:pPr indent="0" marL="0">
               <a:lnSpc>
-                <a:spcPts val="1600"/>
+                <a:spcPts val="1900"/>
               </a:lnSpc>
-              <a:spcAft>
-                <a:spcPts val="900"/>
-              </a:spcAft>
-              <a:buSzPct val="100000"/>
-              <a:buChar char="•"/>
-            </a:pPr>
-            <a:r>
-              <a:rPr lang="en-US" sz="1150" dirty="0">
-                <a:solidFill>
-                  <a:srgbClr val="475663"/>
+              <a:buNone/>
+            </a:pPr>
+            <a:r>
+              <a:rPr lang="en-US" sz="1300" i="1" dirty="0">
+                <a:solidFill>
+                  <a:srgbClr val="00A99D"/>
                 </a:solidFill>
                 <a:latin typeface="Calibri" pitchFamily="34" charset="0"/>
                 <a:ea typeface="Calibri" pitchFamily="34" charset="-122"/>
                 <a:cs typeface="Calibri" pitchFamily="34" charset="-120"/>
               </a:rPr>
-              <a:t>No external WCAG 2.2 AA audit and no VPAT. Accessibility is designed for and tested in places, not certified.</a:t>
-            </a:r>
-            <a:endParaRPr lang="en-US" sz="1150" dirty="0"/>
-          </a:p>
-          <a:p>
-            <a:pPr marL="342900" indent="-342900">
-              <a:lnSpc>
-                <a:spcPts val="1600"/>
-              </a:lnSpc>
-              <a:spcAft>
-                <a:spcPts val="900"/>
-              </a:spcAft>
-              <a:buSzPct val="100000"/>
-              <a:buChar char="•"/>
-            </a:pPr>
-            <a:r>
-              <a:rPr lang="en-US" sz="1150" dirty="0">
-                <a:solidFill>
-                  <a:srgbClr val="475663"/>
-                </a:solidFill>
-                <a:latin typeface="Calibri" pitchFamily="34" charset="0"/>
-                <a:ea typeface="Calibri" pitchFamily="34" charset="-122"/>
-                <a:cs typeface="Calibri" pitchFamily="34" charset="-120"/>
-              </a:rPr>
-              <a:t>Age is self-declared. Ofcom’s position is that self-declaration is not highly effective age assurance.</a:t>
-            </a:r>
-            <a:endParaRPr lang="en-US" sz="1150" dirty="0"/>
-          </a:p>
-          <a:p>
-            <a:pPr marL="342900" indent="-342900">
-              <a:lnSpc>
-                <a:spcPts val="1600"/>
-              </a:lnSpc>
-              <a:spcAft>
-                <a:spcPts val="900"/>
-              </a:spcAft>
-              <a:buSzPct val="100000"/>
-              <a:buChar char="•"/>
-            </a:pPr>
-            <a:r>
-              <a:rPr lang="en-US" sz="1150" dirty="0">
-                <a:solidFill>
-                  <a:srgbClr val="475663"/>
-                </a:solidFill>
-                <a:latin typeface="Calibri" pitchFamily="34" charset="0"/>
-                <a:ea typeface="Calibri" pitchFamily="34" charset="-122"/>
-                <a:cs typeface="Calibri" pitchFamily="34" charset="-120"/>
-              </a:rPr>
-              <a:t>A member can read their whole record through their own endpoints, but there is no one-click export archive yet.</a:t>
-            </a:r>
-            <a:endParaRPr lang="en-US" sz="1150" dirty="0"/>
-          </a:p>
-          <a:p>
-            <a:pPr marL="342900" indent="-342900">
-              <a:lnSpc>
-                <a:spcPts val="1600"/>
-              </a:lnSpc>
-              <a:buSzPct val="100000"/>
-              <a:buChar char="•"/>
-            </a:pPr>
-            <a:r>
-              <a:rPr lang="en-US" sz="1150" dirty="0">
-                <a:solidFill>
-                  <a:srgbClr val="475663"/>
-                </a:solidFill>
-                <a:latin typeface="Calibri" pitchFamily="34" charset="0"/>
-                <a:ea typeface="Calibri" pitchFamily="34" charset="-122"/>
-                <a:cs typeface="Calibri" pitchFamily="34" charset="-120"/>
-              </a:rPr>
-              <a:t>The Clinical Safety Officer appointment record is incomplete against DCB0129, and the hazard log says so itself.</a:t>
-            </a:r>
-            <a:endParaRPr lang="en-US" sz="1150" dirty="0"/>
-          </a:p>
-        </p:txBody>
-      </p:sp>
-      <p:sp>
-        <p:nvSpPr>
-          <p:cNvPr id="11" name="Text 9"/>
-          <p:cNvSpPr txBox="1"/>
-          <p:nvPr/>
-        </p:nvSpPr>
-        <p:spPr>
-          <a:xfrm>
-            <a:off x="731520" y="5715000"/>
-            <a:ext cx="10698480" cy="640080"/>
-          </a:xfrm>
-          <a:prstGeom prst="rect">
-            <a:avLst/>
-          </a:prstGeom>
-          <a:noFill/>
-          <a:ln/>
-        </p:spPr>
-        <p:txBody>
-          <a:bodyPr wrap="square" lIns="0" tIns="0" rIns="0" bIns="0" rtlCol="0" anchor="ctr"/>
-          <a:lstStyle/>
-          <a:p>
-            <a:pPr indent="0" marL="0">
-              <a:lnSpc>
-                <a:spcPts val="1800"/>
-              </a:lnSpc>
-              <a:buNone/>
-            </a:pPr>
-            <a:r>
-              <a:rPr lang="en-US" sz="1250" i="1" dirty="0">
-                <a:solidFill>
-                  <a:srgbClr val="475663"/>
-                </a:solidFill>
-                <a:latin typeface="Calibri" pitchFamily="34" charset="0"/>
-                <a:ea typeface="Calibri" pitchFamily="34" charset="-122"/>
-                <a:cs typeface="Calibri" pitchFamily="34" charset="-120"/>
-              </a:rPr>
-              <a:t>The right-hand column is not a list we were pushed into. It is what GET /api/assurance returns when anybody calls it, with the gaps lifted to the top of the response rather than left to be found area by area.</a:t>
-            </a:r>
-            <a:endParaRPr lang="en-US" sz="1250" dirty="0"/>
+              <a:t>Once there is a case study, this conversation costs more and includes less. That is not a tactic — it is what happens to every design-partner programme that works.</a:t>
+            </a:r>
+            <a:endParaRPr lang="en-US" sz="1300" dirty="0"/>
           </a:p>
         </p:txBody>
       </p:sp>
